--- a/docs/GotIt-Pitch-Deck.pptx
+++ b/docs/GotIt-Pitch-Deck.pptx
@@ -10,6 +10,7 @@
     <p:sldId id="258" r:id="rId9"/>
     <p:sldId id="259" r:id="rId10"/>
     <p:sldId id="260" r:id="rId11"/>
+    <p:sldId id="266" r:id="rId17"/>
     <p:sldId id="261" r:id="rId12"/>
     <p:sldId id="262" r:id="rId13"/>
     <p:sldId id="263" r:id="rId14"/>
@@ -3616,11 +3617,11 @@
             <a:r>
               <a:rPr sz="1100" b="1" i="0">
                 <a:solidFill>
-                  <a:srgbClr val="71717A"/>
-                </a:solidFill>
-                <a:latin typeface="Inter"/>
-              </a:rPr>
-              <a:t>ROADMAP</a:t>
+                  <a:srgbClr val="FACC15"/>
+                </a:solidFill>
+                <a:latin typeface="Inter"/>
+              </a:rPr>
+              <a:t>HOW WE LOST WAVE 1</a:t>
             </a:r>
           </a:p>
         </p:txBody>
@@ -3653,13 +3654,13 @@
               </a:lnSpc>
             </a:pPr>
             <a:r>
-              <a:rPr sz="2600" b="1" i="0">
+              <a:rPr sz="2800" b="1" i="0">
                 <a:solidFill>
                   <a:srgbClr val="F5F5F4"/>
                 </a:solidFill>
                 <a:latin typeface="Fraunces"/>
               </a:rPr>
-              <a:t>Pay transparency stops being a compliance chore</a:t>
+              <a:t>We scored zero of 159. The build was fine.</a:t>
             </a:r>
           </a:p>
           <a:p>
@@ -3669,27 +3670,75 @@
               </a:lnSpc>
             </a:pPr>
             <a:r>
-              <a:rPr sz="2600" b="1" i="0">
+              <a:rPr sz="2800" b="1" i="0">
                 <a:solidFill>
                   <a:srgbClr val="F5F5F4"/>
                 </a:solidFill>
                 <a:latin typeface="Fraunces"/>
               </a:rPr>
-              <a:t>and becomes infrastructure.</a:t>
-            </a:r>
-          </a:p>
-        </p:txBody>
-      </p:sp>
-      <p:sp>
-        <p:nvSpPr>
-          <p:cNvPr id="5" name="TextBox 4"/>
-          <p:cNvSpPr txBox="1"/>
-          <p:nvPr/>
-        </p:nvSpPr>
-        <p:spPr>
-          <a:xfrm>
-            <a:off x="685800" y="2377440"/>
-            <a:ext cx="2377440" cy="256032"/>
+              <a:t>The submission was not.</a:t>
+            </a:r>
+          </a:p>
+        </p:txBody>
+      </p:sp>
+      <p:sp>
+        <p:nvSpPr>
+          <p:cNvPr id="5" name="Rounded Rectangle 4"/>
+          <p:cNvSpPr/>
+          <p:nvPr/>
+        </p:nvSpPr>
+        <p:spPr>
+          <a:xfrm>
+            <a:off x="685800" y="2148840"/>
+            <a:ext cx="3520440" cy="2286000"/>
+          </a:xfrm>
+          <a:prstGeom prst="roundRect">
+            <a:avLst>
+              <a:gd name="adj" fmla="val 6000"/>
+            </a:avLst>
+          </a:prstGeom>
+          <a:solidFill>
+            <a:srgbClr val="121214"/>
+          </a:solidFill>
+          <a:ln w="12700">
+            <a:solidFill>
+              <a:srgbClr val="26262B"/>
+            </a:solidFill>
+          </a:ln>
+          <a:effectLst/>
+        </p:spPr>
+        <p:style>
+          <a:lnRef idx="1">
+            <a:schemeClr val="accent1"/>
+          </a:lnRef>
+          <a:fillRef idx="3">
+            <a:schemeClr val="accent1"/>
+          </a:fillRef>
+          <a:effectRef idx="2">
+            <a:schemeClr val="accent1"/>
+          </a:effectRef>
+          <a:fontRef idx="minor">
+            <a:schemeClr val="lt1"/>
+          </a:fontRef>
+        </p:style>
+        <p:txBody>
+          <a:bodyPr rtlCol="0" anchor="ctr"/>
+          <a:lstStyle/>
+          <a:p>
+            <a:pPr algn="ctr"/>
+          </a:p>
+        </p:txBody>
+      </p:sp>
+      <p:sp>
+        <p:nvSpPr>
+          <p:cNvPr id="6" name="TextBox 5"/>
+          <p:cNvSpPr txBox="1"/>
+          <p:nvPr/>
+        </p:nvSpPr>
+        <p:spPr>
+          <a:xfrm>
+            <a:off x="941832" y="2423160"/>
+            <a:ext cx="3008376" cy="457200"/>
           </a:xfrm>
           <a:prstGeom prst="rect">
             <a:avLst/>
@@ -3708,104 +3757,443 @@
               </a:lnSpc>
             </a:pPr>
             <a:r>
-              <a:rPr sz="1100" b="1" i="0">
+              <a:rPr sz="1500" b="1" i="0">
+                <a:solidFill>
+                  <a:srgbClr val="EF4444"/>
+                </a:solidFill>
+                <a:latin typeface="Inter"/>
+              </a:rPr>
+              <a:t>An empty section</a:t>
+            </a:r>
+          </a:p>
+        </p:txBody>
+      </p:sp>
+      <p:sp>
+        <p:nvSpPr>
+          <p:cNvPr id="7" name="TextBox 6"/>
+          <p:cNvSpPr txBox="1"/>
+          <p:nvPr/>
+        </p:nvSpPr>
+        <p:spPr>
+          <a:xfrm>
+            <a:off x="941832" y="3017520"/>
+            <a:ext cx="3008376" cy="1280160"/>
+          </a:xfrm>
+          <a:prstGeom prst="rect">
+            <a:avLst/>
+          </a:prstGeom>
+          <a:noFill/>
+        </p:spPr>
+        <p:txBody>
+          <a:bodyPr wrap="square" lIns="0" rIns="0" tIns="0" bIns="0" anchor="t">
+            <a:spAutoFit/>
+          </a:bodyPr>
+          <a:lstStyle/>
+          <a:p>
+            <a:pPr algn="l">
+              <a:lnSpc>
+                <a:spcPct val="145000"/>
+              </a:lnSpc>
+            </a:pPr>
+            <a:r>
+              <a:rPr sz="1150" b="0" i="0">
+                <a:solidFill>
+                  <a:srgbClr val="A1A1AA"/>
+                </a:solidFill>
+                <a:latin typeface="Inter"/>
+              </a:rPr>
+              <a:t>Our “Challenges I ran into” section shipped as five bold headings with no text under them — the only one of 159 like it. Nobody re-reads their own pitch like a judge does.</a:t>
+            </a:r>
+          </a:p>
+        </p:txBody>
+      </p:sp>
+      <p:sp>
+        <p:nvSpPr>
+          <p:cNvPr id="8" name="Rounded Rectangle 7"/>
+          <p:cNvSpPr/>
+          <p:nvPr/>
+        </p:nvSpPr>
+        <p:spPr>
+          <a:xfrm>
+            <a:off x="4526280" y="2148840"/>
+            <a:ext cx="3520440" cy="2286000"/>
+          </a:xfrm>
+          <a:prstGeom prst="roundRect">
+            <a:avLst>
+              <a:gd name="adj" fmla="val 6000"/>
+            </a:avLst>
+          </a:prstGeom>
+          <a:solidFill>
+            <a:srgbClr val="121214"/>
+          </a:solidFill>
+          <a:ln w="12700">
+            <a:solidFill>
+              <a:srgbClr val="26262B"/>
+            </a:solidFill>
+          </a:ln>
+          <a:effectLst/>
+        </p:spPr>
+        <p:style>
+          <a:lnRef idx="1">
+            <a:schemeClr val="accent1"/>
+          </a:lnRef>
+          <a:fillRef idx="3">
+            <a:schemeClr val="accent1"/>
+          </a:fillRef>
+          <a:effectRef idx="2">
+            <a:schemeClr val="accent1"/>
+          </a:effectRef>
+          <a:fontRef idx="minor">
+            <a:schemeClr val="lt1"/>
+          </a:fontRef>
+        </p:style>
+        <p:txBody>
+          <a:bodyPr rtlCol="0" anchor="ctr"/>
+          <a:lstStyle/>
+          <a:p>
+            <a:pPr algn="ctr"/>
+          </a:p>
+        </p:txBody>
+      </p:sp>
+      <p:sp>
+        <p:nvSpPr>
+          <p:cNvPr id="9" name="TextBox 8"/>
+          <p:cNvSpPr txBox="1"/>
+          <p:nvPr/>
+        </p:nvSpPr>
+        <p:spPr>
+          <a:xfrm>
+            <a:off x="4782312" y="2423160"/>
+            <a:ext cx="3008376" cy="457200"/>
+          </a:xfrm>
+          <a:prstGeom prst="rect">
+            <a:avLst/>
+          </a:prstGeom>
+          <a:noFill/>
+        </p:spPr>
+        <p:txBody>
+          <a:bodyPr wrap="square" lIns="0" rIns="0" tIns="0" bIns="0" anchor="t">
+            <a:spAutoFit/>
+          </a:bodyPr>
+          <a:lstStyle/>
+          <a:p>
+            <a:pPr algn="l">
+              <a:lnSpc>
+                <a:spcPct val="125000"/>
+              </a:lnSpc>
+            </a:pPr>
+            <a:r>
+              <a:rPr sz="1500" b="1" i="0">
+                <a:solidFill>
+                  <a:srgbClr val="EF4444"/>
+                </a:solidFill>
+                <a:latin typeface="Inter"/>
+              </a:rPr>
+              <a:t>A placeholder profile</a:t>
+            </a:r>
+          </a:p>
+        </p:txBody>
+      </p:sp>
+      <p:sp>
+        <p:nvSpPr>
+          <p:cNvPr id="10" name="TextBox 9"/>
+          <p:cNvSpPr txBox="1"/>
+          <p:nvPr/>
+        </p:nvSpPr>
+        <p:spPr>
+          <a:xfrm>
+            <a:off x="4782312" y="3017520"/>
+            <a:ext cx="3008376" cy="1280160"/>
+          </a:xfrm>
+          <a:prstGeom prst="rect">
+            <a:avLst/>
+          </a:prstGeom>
+          <a:noFill/>
+        </p:spPr>
+        <p:txBody>
+          <a:bodyPr wrap="square" lIns="0" rIns="0" tIns="0" bIns="0" anchor="t">
+            <a:spAutoFit/>
+          </a:bodyPr>
+          <a:lstStyle/>
+          <a:p>
+            <a:pPr algn="l">
+              <a:lnSpc>
+                <a:spcPct val="145000"/>
+              </a:lnSpc>
+            </a:pPr>
+            <a:r>
+              <a:rPr sz="1150" b="0" i="0">
+                <a:solidFill>
+                  <a:srgbClr val="A1A1AA"/>
+                </a:solidFill>
+                <a:latin typeface="Inter"/>
+              </a:rPr>
+              <a:t>Community bio: “chill but cool.” No website, no socials. All seven funded teams had a website.</a:t>
+            </a:r>
+          </a:p>
+        </p:txBody>
+      </p:sp>
+      <p:sp>
+        <p:nvSpPr>
+          <p:cNvPr id="11" name="Rounded Rectangle 10"/>
+          <p:cNvSpPr/>
+          <p:nvPr/>
+        </p:nvSpPr>
+        <p:spPr>
+          <a:xfrm>
+            <a:off x="8366760" y="2148840"/>
+            <a:ext cx="3520440" cy="2286000"/>
+          </a:xfrm>
+          <a:prstGeom prst="roundRect">
+            <a:avLst>
+              <a:gd name="adj" fmla="val 6000"/>
+            </a:avLst>
+          </a:prstGeom>
+          <a:solidFill>
+            <a:srgbClr val="121214"/>
+          </a:solidFill>
+          <a:ln w="12700">
+            <a:solidFill>
+              <a:srgbClr val="26262B"/>
+            </a:solidFill>
+          </a:ln>
+          <a:effectLst/>
+        </p:spPr>
+        <p:style>
+          <a:lnRef idx="1">
+            <a:schemeClr val="accent1"/>
+          </a:lnRef>
+          <a:fillRef idx="3">
+            <a:schemeClr val="accent1"/>
+          </a:fillRef>
+          <a:effectRef idx="2">
+            <a:schemeClr val="accent1"/>
+          </a:effectRef>
+          <a:fontRef idx="minor">
+            <a:schemeClr val="lt1"/>
+          </a:fontRef>
+        </p:style>
+        <p:txBody>
+          <a:bodyPr rtlCol="0" anchor="ctr"/>
+          <a:lstStyle/>
+          <a:p>
+            <a:pPr algn="ctr"/>
+          </a:p>
+        </p:txBody>
+      </p:sp>
+      <p:sp>
+        <p:nvSpPr>
+          <p:cNvPr id="12" name="TextBox 11"/>
+          <p:cNvSpPr txBox="1"/>
+          <p:nvPr/>
+        </p:nvSpPr>
+        <p:spPr>
+          <a:xfrm>
+            <a:off x="8622792" y="2423160"/>
+            <a:ext cx="3008376" cy="457200"/>
+          </a:xfrm>
+          <a:prstGeom prst="rect">
+            <a:avLst/>
+          </a:prstGeom>
+          <a:noFill/>
+        </p:spPr>
+        <p:txBody>
+          <a:bodyPr wrap="square" lIns="0" rIns="0" tIns="0" bIns="0" anchor="t">
+            <a:spAutoFit/>
+          </a:bodyPr>
+          <a:lstStyle/>
+          <a:p>
+            <a:pPr algn="l">
+              <a:lnSpc>
+                <a:spcPct val="125000"/>
+              </a:lnSpc>
+            </a:pPr>
+            <a:r>
+              <a:rPr sz="1500" b="1" i="0">
+                <a:solidFill>
+                  <a:srgbClr val="EF4444"/>
+                </a:solidFill>
+                <a:latin typeface="Inter"/>
+              </a:rPr>
+              <a:t>One tag, wrong category</a:t>
+            </a:r>
+          </a:p>
+        </p:txBody>
+      </p:sp>
+      <p:sp>
+        <p:nvSpPr>
+          <p:cNvPr id="13" name="TextBox 12"/>
+          <p:cNvSpPr txBox="1"/>
+          <p:nvPr/>
+        </p:nvSpPr>
+        <p:spPr>
+          <a:xfrm>
+            <a:off x="8622792" y="3017520"/>
+            <a:ext cx="3008376" cy="1280160"/>
+          </a:xfrm>
+          <a:prstGeom prst="rect">
+            <a:avLst/>
+          </a:prstGeom>
+          <a:noFill/>
+        </p:spPr>
+        <p:txBody>
+          <a:bodyPr wrap="square" lIns="0" rIns="0" tIns="0" bIns="0" anchor="t">
+            <a:spAutoFit/>
+          </a:bodyPr>
+          <a:lstStyle/>
+          <a:p>
+            <a:pPr algn="l">
+              <a:lnSpc>
+                <a:spcPct val="145000"/>
+              </a:lnSpc>
+            </a:pPr>
+            <a:r>
+              <a:rPr sz="1150" b="0" i="0">
+                <a:solidFill>
+                  <a:srgbClr val="A1A1AA"/>
+                </a:solidFill>
+                <a:latin typeface="Inter"/>
+              </a:rPr>
+              <a:t>A single `TypeScript` tag, filed under the most crowded category. The field median was five tags.</a:t>
+            </a:r>
+          </a:p>
+        </p:txBody>
+      </p:sp>
+      <p:sp>
+        <p:nvSpPr>
+          <p:cNvPr id="14" name="Rounded Rectangle 13"/>
+          <p:cNvSpPr/>
+          <p:nvPr/>
+        </p:nvSpPr>
+        <p:spPr>
+          <a:xfrm>
+            <a:off x="685800" y="4754880"/>
+            <a:ext cx="10820095" cy="960120"/>
+          </a:xfrm>
+          <a:prstGeom prst="roundRect">
+            <a:avLst>
+              <a:gd name="adj" fmla="val 6000"/>
+            </a:avLst>
+          </a:prstGeom>
+          <a:solidFill>
+            <a:srgbClr val="1A1A1E"/>
+          </a:solidFill>
+          <a:ln w="12700">
+            <a:solidFill>
+              <a:srgbClr val="26262B"/>
+            </a:solidFill>
+          </a:ln>
+          <a:effectLst/>
+        </p:spPr>
+        <p:style>
+          <a:lnRef idx="1">
+            <a:schemeClr val="accent1"/>
+          </a:lnRef>
+          <a:fillRef idx="3">
+            <a:schemeClr val="accent1"/>
+          </a:fillRef>
+          <a:effectRef idx="2">
+            <a:schemeClr val="accent1"/>
+          </a:effectRef>
+          <a:fontRef idx="minor">
+            <a:schemeClr val="lt1"/>
+          </a:fontRef>
+        </p:style>
+        <p:txBody>
+          <a:bodyPr rtlCol="0" anchor="ctr"/>
+          <a:lstStyle/>
+          <a:p>
+            <a:pPr algn="ctr"/>
+          </a:p>
+        </p:txBody>
+      </p:sp>
+      <p:sp>
+        <p:nvSpPr>
+          <p:cNvPr id="15" name="TextBox 14"/>
+          <p:cNvSpPr txBox="1"/>
+          <p:nvPr/>
+        </p:nvSpPr>
+        <p:spPr>
+          <a:xfrm>
+            <a:off x="978408" y="4919472"/>
+            <a:ext cx="10234879" cy="548640"/>
+          </a:xfrm>
+          <a:prstGeom prst="rect">
+            <a:avLst/>
+          </a:prstGeom>
+          <a:noFill/>
+        </p:spPr>
+        <p:txBody>
+          <a:bodyPr wrap="square" lIns="0" rIns="0" tIns="0" bIns="0" anchor="t">
+            <a:spAutoFit/>
+          </a:bodyPr>
+          <a:lstStyle/>
+          <a:p>
+            <a:pPr algn="l">
+              <a:lnSpc>
+                <a:spcPct val="135000"/>
+              </a:lnSpc>
+            </a:pPr>
+            <a:r>
+              <a:rPr sz="1250" b="0" i="0">
+                <a:solidFill>
+                  <a:srgbClr val="F5F5F4"/>
+                </a:solidFill>
+                <a:latin typeface="Inter"/>
+              </a:rPr>
+              <a:t>What changed: a pre-submission gate now fails a pitch with an empty section, a jargon tagline, too few tags or a missing community link. It reports 21 errors against our real Wave 1 draft.</a:t>
+            </a:r>
+          </a:p>
+        </p:txBody>
+      </p:sp>
+      <p:sp>
+        <p:nvSpPr>
+          <p:cNvPr id="16" name="TextBox 15"/>
+          <p:cNvSpPr txBox="1"/>
+          <p:nvPr/>
+        </p:nvSpPr>
+        <p:spPr>
+          <a:xfrm>
+            <a:off x="978408" y="5504688"/>
+            <a:ext cx="10234879" cy="256032"/>
+          </a:xfrm>
+          <a:prstGeom prst="rect">
+            <a:avLst/>
+          </a:prstGeom>
+          <a:noFill/>
+        </p:spPr>
+        <p:txBody>
+          <a:bodyPr wrap="square" lIns="0" rIns="0" tIns="0" bIns="0" anchor="t">
+            <a:spAutoFit/>
+          </a:bodyPr>
+          <a:lstStyle/>
+          <a:p>
+            <a:pPr algn="l">
+              <a:lnSpc>
+                <a:spcPct val="125000"/>
+              </a:lnSpc>
+            </a:pPr>
+            <a:r>
+              <a:rPr sz="1100" b="0" i="0">
                 <a:solidFill>
                   <a:srgbClr val="71717A"/>
                 </a:solidFill>
                 <a:latin typeface="Inter"/>
               </a:rPr>
-              <a:t>When</a:t>
-            </a:r>
-          </a:p>
-        </p:txBody>
-      </p:sp>
-      <p:sp>
-        <p:nvSpPr>
-          <p:cNvPr id="6" name="TextBox 5"/>
-          <p:cNvSpPr txBox="1"/>
-          <p:nvPr/>
-        </p:nvSpPr>
-        <p:spPr>
-          <a:xfrm>
-            <a:off x="3063240" y="2377440"/>
-            <a:ext cx="6858000" cy="256032"/>
-          </a:xfrm>
-          <a:prstGeom prst="rect">
-            <a:avLst/>
-          </a:prstGeom>
-          <a:noFill/>
-        </p:spPr>
-        <p:txBody>
-          <a:bodyPr wrap="square" lIns="0" rIns="0" tIns="0" bIns="0" anchor="t">
-            <a:spAutoFit/>
-          </a:bodyPr>
-          <a:lstStyle/>
-          <a:p>
-            <a:pPr algn="l">
-              <a:lnSpc>
-                <a:spcPct val="125000"/>
-              </a:lnSpc>
-            </a:pPr>
-            <a:r>
-              <a:rPr sz="1100" b="1" i="0">
-                <a:solidFill>
-                  <a:srgbClr val="71717A"/>
-                </a:solidFill>
-                <a:latin typeface="Inter"/>
-              </a:rPr>
-              <a:t>What</a:t>
-            </a:r>
-          </a:p>
-        </p:txBody>
-      </p:sp>
-      <p:sp>
-        <p:nvSpPr>
-          <p:cNvPr id="7" name="TextBox 6"/>
-          <p:cNvSpPr txBox="1"/>
-          <p:nvPr/>
-        </p:nvSpPr>
-        <p:spPr>
-          <a:xfrm>
-            <a:off x="9921240" y="2377440"/>
-            <a:ext cx="1581912" cy="256032"/>
-          </a:xfrm>
-          <a:prstGeom prst="rect">
-            <a:avLst/>
-          </a:prstGeom>
-          <a:noFill/>
-        </p:spPr>
-        <p:txBody>
-          <a:bodyPr wrap="square" lIns="0" rIns="0" tIns="0" bIns="0" anchor="t">
-            <a:spAutoFit/>
-          </a:bodyPr>
-          <a:lstStyle/>
-          <a:p>
-            <a:pPr algn="l">
-              <a:lnSpc>
-                <a:spcPct val="125000"/>
-              </a:lnSpc>
-            </a:pPr>
-            <a:r>
-              <a:rPr sz="1100" b="1" i="0">
-                <a:solidFill>
-                  <a:srgbClr val="71717A"/>
-                </a:solidFill>
-                <a:latin typeface="Inter"/>
-              </a:rPr>
-              <a:t>Status</a:t>
-            </a:r>
-          </a:p>
-        </p:txBody>
-      </p:sp>
-      <p:sp>
-        <p:nvSpPr>
-          <p:cNvPr id="8" name="Rectangle 7"/>
+              <a:t>The post-mortem is in the repo: docs/WAVE1-POSTMORTEM.md</a:t>
+            </a:r>
+          </a:p>
+        </p:txBody>
+      </p:sp>
+      <p:sp>
+        <p:nvSpPr>
+          <p:cNvPr id="17" name="Rectangle 16"/>
           <p:cNvSpPr/>
           <p:nvPr/>
         </p:nvSpPr>
         <p:spPr>
           <a:xfrm>
-            <a:off x="685800" y="2688336"/>
+            <a:off x="685800" y="6291072"/>
             <a:ext cx="10820095" cy="10972"/>
           </a:xfrm>
           <a:prstGeom prst="rect">
@@ -3843,14 +4231,154 @@
       </p:sp>
       <p:sp>
         <p:nvSpPr>
-          <p:cNvPr id="9" name="TextBox 8"/>
-          <p:cNvSpPr txBox="1"/>
-          <p:nvPr/>
-        </p:nvSpPr>
-        <p:spPr>
-          <a:xfrm>
-            <a:off x="685800" y="2770632"/>
-            <a:ext cx="2377440" cy="475488"/>
+          <p:cNvPr id="18" name="TextBox 17"/>
+          <p:cNvSpPr txBox="1"/>
+          <p:nvPr/>
+        </p:nvSpPr>
+        <p:spPr>
+          <a:xfrm>
+            <a:off x="685800" y="6400800"/>
+            <a:ext cx="7315200" cy="274320"/>
+          </a:xfrm>
+          <a:prstGeom prst="rect">
+            <a:avLst/>
+          </a:prstGeom>
+          <a:noFill/>
+        </p:spPr>
+        <p:txBody>
+          <a:bodyPr wrap="square" lIns="0" rIns="0" tIns="0" bIns="0" anchor="t">
+            <a:spAutoFit/>
+          </a:bodyPr>
+          <a:lstStyle/>
+          <a:p>
+            <a:pPr algn="l">
+              <a:lnSpc>
+                <a:spcPct val="125000"/>
+              </a:lnSpc>
+            </a:pPr>
+            <a:r>
+              <a:rPr sz="900" b="0" i="0">
+                <a:solidFill>
+                  <a:srgbClr val="71717A"/>
+                </a:solidFill>
+                <a:latin typeface="Inter"/>
+              </a:rPr>
+              <a:t>GotIt · Midnight Buildathon · Directive (EU) 2023/970 Art. 9</a:t>
+            </a:r>
+          </a:p>
+        </p:txBody>
+      </p:sp>
+      <p:sp>
+        <p:nvSpPr>
+          <p:cNvPr id="19" name="TextBox 18"/>
+          <p:cNvSpPr txBox="1"/>
+          <p:nvPr/>
+        </p:nvSpPr>
+        <p:spPr>
+          <a:xfrm>
+            <a:off x="10591495" y="6400800"/>
+            <a:ext cx="914400" cy="274320"/>
+          </a:xfrm>
+          <a:prstGeom prst="rect">
+            <a:avLst/>
+          </a:prstGeom>
+          <a:noFill/>
+        </p:spPr>
+        <p:txBody>
+          <a:bodyPr wrap="square" lIns="0" rIns="0" tIns="0" bIns="0" anchor="t">
+            <a:spAutoFit/>
+          </a:bodyPr>
+          <a:lstStyle/>
+          <a:p>
+            <a:pPr algn="r">
+              <a:lnSpc>
+                <a:spcPct val="125000"/>
+              </a:lnSpc>
+            </a:pPr>
+            <a:r>
+              <a:rPr sz="900" b="0" i="0">
+                <a:solidFill>
+                  <a:srgbClr val="71717A"/>
+                </a:solidFill>
+                <a:latin typeface="Inter"/>
+              </a:rPr>
+              <a:t>10</a:t>
+            </a:r>
+          </a:p>
+        </p:txBody>
+      </p:sp>
+    </p:spTree>
+  </p:cSld>
+  <p:clrMapOvr>
+    <a:masterClrMapping/>
+  </p:clrMapOvr>
+</p:sld>
+</file>
+
+<file path=ppt/slides/slide11.xml><?xml version="1.0" encoding="utf-8"?>
+<p:sld xmlns:a="http://schemas.openxmlformats.org/drawingml/2006/main" xmlns:p="http://schemas.openxmlformats.org/presentationml/2006/main" xmlns:r="http://schemas.openxmlformats.org/officeDocument/2006/relationships">
+  <p:cSld>
+    <p:spTree>
+      <p:nvGrpSpPr>
+        <p:cNvPr id="1" name=""/>
+        <p:cNvGrpSpPr/>
+        <p:nvPr/>
+      </p:nvGrpSpPr>
+      <p:grpSpPr/>
+      <p:sp>
+        <p:nvSpPr>
+          <p:cNvPr id="2" name="Rectangle 1"/>
+          <p:cNvSpPr/>
+          <p:nvPr/>
+        </p:nvSpPr>
+        <p:spPr>
+          <a:xfrm>
+            <a:off x="0" y="0"/>
+            <a:ext cx="12191695" cy="6858000"/>
+          </a:xfrm>
+          <a:prstGeom prst="rect">
+            <a:avLst/>
+          </a:prstGeom>
+          <a:solidFill>
+            <a:srgbClr val="0A0A0B"/>
+          </a:solidFill>
+          <a:ln>
+            <a:noFill/>
+          </a:ln>
+          <a:effectLst/>
+        </p:spPr>
+        <p:style>
+          <a:lnRef idx="1">
+            <a:schemeClr val="accent1"/>
+          </a:lnRef>
+          <a:fillRef idx="3">
+            <a:schemeClr val="accent1"/>
+          </a:fillRef>
+          <a:effectRef idx="2">
+            <a:schemeClr val="accent1"/>
+          </a:effectRef>
+          <a:fontRef idx="minor">
+            <a:schemeClr val="lt1"/>
+          </a:fontRef>
+        </p:style>
+        <p:txBody>
+          <a:bodyPr rtlCol="0" anchor="ctr"/>
+          <a:lstStyle/>
+          <a:p>
+            <a:pPr algn="ctr"/>
+          </a:p>
+        </p:txBody>
+      </p:sp>
+      <p:sp>
+        <p:nvSpPr>
+          <p:cNvPr id="3" name="TextBox 2"/>
+          <p:cNvSpPr txBox="1"/>
+          <p:nvPr/>
+        </p:nvSpPr>
+        <p:spPr>
+          <a:xfrm>
+            <a:off x="685800" y="685800"/>
+            <a:ext cx="10820095" cy="228600"/>
           </a:xfrm>
           <a:prstGeom prst="rect">
             <a:avLst/>
@@ -3869,104 +4397,198 @@
               </a:lnSpc>
             </a:pPr>
             <a:r>
-              <a:rPr sz="1200" b="0" i="0">
+              <a:rPr sz="1100" b="1" i="0">
+                <a:solidFill>
+                  <a:srgbClr val="71717A"/>
+                </a:solidFill>
+                <a:latin typeface="Inter"/>
+              </a:rPr>
+              <a:t>ROADMAP</a:t>
+            </a:r>
+          </a:p>
+        </p:txBody>
+      </p:sp>
+      <p:sp>
+        <p:nvSpPr>
+          <p:cNvPr id="4" name="TextBox 3"/>
+          <p:cNvSpPr txBox="1"/>
+          <p:nvPr/>
+        </p:nvSpPr>
+        <p:spPr>
+          <a:xfrm>
+            <a:off x="685800" y="777240"/>
+            <a:ext cx="10820095" cy="914400"/>
+          </a:xfrm>
+          <a:prstGeom prst="rect">
+            <a:avLst/>
+          </a:prstGeom>
+          <a:noFill/>
+        </p:spPr>
+        <p:txBody>
+          <a:bodyPr wrap="square" lIns="0" rIns="0" tIns="0" bIns="0" anchor="t">
+            <a:spAutoFit/>
+          </a:bodyPr>
+          <a:lstStyle/>
+          <a:p>
+            <a:pPr algn="l">
+              <a:lnSpc>
+                <a:spcPct val="108000"/>
+              </a:lnSpc>
+            </a:pPr>
+            <a:r>
+              <a:rPr sz="2600" b="1" i="0">
                 <a:solidFill>
                   <a:srgbClr val="F5F5F4"/>
                 </a:solidFill>
-                <a:latin typeface="Inter"/>
-              </a:rPr>
-              <a:t>Wave 2 · due 19 Oct</a:t>
-            </a:r>
-          </a:p>
-        </p:txBody>
-      </p:sp>
-      <p:sp>
-        <p:nvSpPr>
-          <p:cNvPr id="10" name="TextBox 9"/>
-          <p:cNvSpPr txBox="1"/>
-          <p:nvPr/>
-        </p:nvSpPr>
-        <p:spPr>
-          <a:xfrm>
-            <a:off x="3063240" y="2770632"/>
-            <a:ext cx="6858000" cy="475488"/>
-          </a:xfrm>
-          <a:prstGeom prst="rect">
-            <a:avLst/>
-          </a:prstGeom>
-          <a:noFill/>
-        </p:spPr>
-        <p:txBody>
-          <a:bodyPr wrap="square" lIns="0" rIns="0" tIns="0" bIns="0" anchor="t">
-            <a:spAutoFit/>
-          </a:bodyPr>
-          <a:lstStyle/>
-          <a:p>
-            <a:pPr algn="l">
-              <a:lnSpc>
-                <a:spcPct val="100000"/>
-              </a:lnSpc>
-            </a:pPr>
-            <a:r>
-              <a:rPr sz="1200" b="0" i="0">
+                <a:latin typeface="Fraunces"/>
+              </a:rPr>
+              <a:t>Pay transparency stops being a compliance chore</a:t>
+            </a:r>
+          </a:p>
+          <a:p>
+            <a:pPr algn="l">
+              <a:lnSpc>
+                <a:spcPct val="108000"/>
+              </a:lnSpc>
+            </a:pPr>
+            <a:r>
+              <a:rPr sz="2600" b="1" i="0">
                 <a:solidFill>
                   <a:srgbClr val="F5F5F4"/>
                 </a:solidFill>
-                <a:latin typeface="Inter"/>
-              </a:rPr>
-              <a:t>Deploy v2, the report surface, a public verification page, and named EU pilots.</a:t>
-            </a:r>
-          </a:p>
-        </p:txBody>
-      </p:sp>
-      <p:sp>
-        <p:nvSpPr>
-          <p:cNvPr id="11" name="TextBox 10"/>
-          <p:cNvSpPr txBox="1"/>
-          <p:nvPr/>
-        </p:nvSpPr>
-        <p:spPr>
-          <a:xfrm>
-            <a:off x="9921240" y="2770632"/>
-            <a:ext cx="1581912" cy="475488"/>
-          </a:xfrm>
-          <a:prstGeom prst="rect">
-            <a:avLst/>
-          </a:prstGeom>
-          <a:noFill/>
-        </p:spPr>
-        <p:txBody>
-          <a:bodyPr wrap="square" lIns="0" rIns="0" tIns="0" bIns="0" anchor="t">
-            <a:spAutoFit/>
-          </a:bodyPr>
-          <a:lstStyle/>
-          <a:p>
-            <a:pPr algn="l">
-              <a:lnSpc>
-                <a:spcPct val="100000"/>
-              </a:lnSpc>
-            </a:pPr>
-            <a:r>
-              <a:rPr sz="1200" b="1" i="0">
-                <a:solidFill>
-                  <a:srgbClr val="FACC15"/>
-                </a:solidFill>
-                <a:latin typeface="Inter"/>
-              </a:rPr>
-              <a:t>in progress</a:t>
-            </a:r>
-          </a:p>
-        </p:txBody>
-      </p:sp>
-      <p:sp>
-        <p:nvSpPr>
-          <p:cNvPr id="12" name="Rectangle 11"/>
+                <a:latin typeface="Fraunces"/>
+              </a:rPr>
+              <a:t>and becomes infrastructure.</a:t>
+            </a:r>
+          </a:p>
+        </p:txBody>
+      </p:sp>
+      <p:sp>
+        <p:nvSpPr>
+          <p:cNvPr id="5" name="TextBox 4"/>
+          <p:cNvSpPr txBox="1"/>
+          <p:nvPr/>
+        </p:nvSpPr>
+        <p:spPr>
+          <a:xfrm>
+            <a:off x="685800" y="2377440"/>
+            <a:ext cx="2377440" cy="256032"/>
+          </a:xfrm>
+          <a:prstGeom prst="rect">
+            <a:avLst/>
+          </a:prstGeom>
+          <a:noFill/>
+        </p:spPr>
+        <p:txBody>
+          <a:bodyPr wrap="square" lIns="0" rIns="0" tIns="0" bIns="0" anchor="t">
+            <a:spAutoFit/>
+          </a:bodyPr>
+          <a:lstStyle/>
+          <a:p>
+            <a:pPr algn="l">
+              <a:lnSpc>
+                <a:spcPct val="125000"/>
+              </a:lnSpc>
+            </a:pPr>
+            <a:r>
+              <a:rPr sz="1100" b="1" i="0">
+                <a:solidFill>
+                  <a:srgbClr val="71717A"/>
+                </a:solidFill>
+                <a:latin typeface="Inter"/>
+              </a:rPr>
+              <a:t>When</a:t>
+            </a:r>
+          </a:p>
+        </p:txBody>
+      </p:sp>
+      <p:sp>
+        <p:nvSpPr>
+          <p:cNvPr id="6" name="TextBox 5"/>
+          <p:cNvSpPr txBox="1"/>
+          <p:nvPr/>
+        </p:nvSpPr>
+        <p:spPr>
+          <a:xfrm>
+            <a:off x="3063240" y="2377440"/>
+            <a:ext cx="6858000" cy="256032"/>
+          </a:xfrm>
+          <a:prstGeom prst="rect">
+            <a:avLst/>
+          </a:prstGeom>
+          <a:noFill/>
+        </p:spPr>
+        <p:txBody>
+          <a:bodyPr wrap="square" lIns="0" rIns="0" tIns="0" bIns="0" anchor="t">
+            <a:spAutoFit/>
+          </a:bodyPr>
+          <a:lstStyle/>
+          <a:p>
+            <a:pPr algn="l">
+              <a:lnSpc>
+                <a:spcPct val="125000"/>
+              </a:lnSpc>
+            </a:pPr>
+            <a:r>
+              <a:rPr sz="1100" b="1" i="0">
+                <a:solidFill>
+                  <a:srgbClr val="71717A"/>
+                </a:solidFill>
+                <a:latin typeface="Inter"/>
+              </a:rPr>
+              <a:t>What</a:t>
+            </a:r>
+          </a:p>
+        </p:txBody>
+      </p:sp>
+      <p:sp>
+        <p:nvSpPr>
+          <p:cNvPr id="7" name="TextBox 6"/>
+          <p:cNvSpPr txBox="1"/>
+          <p:nvPr/>
+        </p:nvSpPr>
+        <p:spPr>
+          <a:xfrm>
+            <a:off x="9921240" y="2377440"/>
+            <a:ext cx="1581912" cy="256032"/>
+          </a:xfrm>
+          <a:prstGeom prst="rect">
+            <a:avLst/>
+          </a:prstGeom>
+          <a:noFill/>
+        </p:spPr>
+        <p:txBody>
+          <a:bodyPr wrap="square" lIns="0" rIns="0" tIns="0" bIns="0" anchor="t">
+            <a:spAutoFit/>
+          </a:bodyPr>
+          <a:lstStyle/>
+          <a:p>
+            <a:pPr algn="l">
+              <a:lnSpc>
+                <a:spcPct val="125000"/>
+              </a:lnSpc>
+            </a:pPr>
+            <a:r>
+              <a:rPr sz="1100" b="1" i="0">
+                <a:solidFill>
+                  <a:srgbClr val="71717A"/>
+                </a:solidFill>
+                <a:latin typeface="Inter"/>
+              </a:rPr>
+              <a:t>Status</a:t>
+            </a:r>
+          </a:p>
+        </p:txBody>
+      </p:sp>
+      <p:sp>
+        <p:nvSpPr>
+          <p:cNvPr id="8" name="Rectangle 7"/>
           <p:cNvSpPr/>
           <p:nvPr/>
         </p:nvSpPr>
         <p:spPr>
           <a:xfrm>
-            <a:off x="685800" y="3209544"/>
+            <a:off x="685800" y="2688336"/>
             <a:ext cx="10820095" cy="10972"/>
           </a:xfrm>
           <a:prstGeom prst="rect">
@@ -4004,13 +4626,13 @@
       </p:sp>
       <p:sp>
         <p:nvSpPr>
-          <p:cNvPr id="13" name="TextBox 12"/>
-          <p:cNvSpPr txBox="1"/>
-          <p:nvPr/>
-        </p:nvSpPr>
-        <p:spPr>
-          <a:xfrm>
-            <a:off x="685800" y="3291840"/>
+          <p:cNvPr id="9" name="TextBox 8"/>
+          <p:cNvSpPr txBox="1"/>
+          <p:nvPr/>
+        </p:nvSpPr>
+        <p:spPr>
+          <a:xfrm>
+            <a:off x="685800" y="2770632"/>
             <a:ext cx="2377440" cy="475488"/>
           </a:xfrm>
           <a:prstGeom prst="rect">
@@ -4036,20 +4658,20 @@
                 </a:solidFill>
                 <a:latin typeface="Inter"/>
               </a:rPr>
-              <a:t>Wave 3</a:t>
-            </a:r>
-          </a:p>
-        </p:txBody>
-      </p:sp>
-      <p:sp>
-        <p:nvSpPr>
-          <p:cNvPr id="14" name="TextBox 13"/>
-          <p:cNvSpPr txBox="1"/>
-          <p:nvPr/>
-        </p:nvSpPr>
-        <p:spPr>
-          <a:xfrm>
-            <a:off x="3063240" y="3291840"/>
+              <a:t>Wave 2 · due 19 Oct</a:t>
+            </a:r>
+          </a:p>
+        </p:txBody>
+      </p:sp>
+      <p:sp>
+        <p:nvSpPr>
+          <p:cNvPr id="10" name="TextBox 9"/>
+          <p:cNvSpPr txBox="1"/>
+          <p:nvPr/>
+        </p:nvSpPr>
+        <p:spPr>
+          <a:xfrm>
+            <a:off x="3063240" y="2770632"/>
             <a:ext cx="6858000" cy="475488"/>
           </a:xfrm>
           <a:prstGeom prst="rect">
@@ -4075,20 +4697,20 @@
                 </a:solidFill>
                 <a:latin typeface="Inter"/>
               </a:rPr>
-              <a:t>Replace the trusted issuer with a Merkle membership proof — so no company learns its own employees' salaries even to verify them.</a:t>
-            </a:r>
-          </a:p>
-        </p:txBody>
-      </p:sp>
-      <p:sp>
-        <p:nvSpPr>
-          <p:cNvPr id="15" name="TextBox 14"/>
-          <p:cNvSpPr txBox="1"/>
-          <p:nvPr/>
-        </p:nvSpPr>
-        <p:spPr>
-          <a:xfrm>
-            <a:off x="9921240" y="3291840"/>
+              <a:t>Deploy v2, the report surface, a public verification page, and named EU pilots.</a:t>
+            </a:r>
+          </a:p>
+        </p:txBody>
+      </p:sp>
+      <p:sp>
+        <p:nvSpPr>
+          <p:cNvPr id="11" name="TextBox 10"/>
+          <p:cNvSpPr txBox="1"/>
+          <p:nvPr/>
+        </p:nvSpPr>
+        <p:spPr>
+          <a:xfrm>
+            <a:off x="9921240" y="2770632"/>
             <a:ext cx="1581912" cy="475488"/>
           </a:xfrm>
           <a:prstGeom prst="rect">
@@ -4110,24 +4732,24 @@
             <a:r>
               <a:rPr sz="1200" b="1" i="0">
                 <a:solidFill>
-                  <a:srgbClr val="A1A1AA"/>
-                </a:solidFill>
-                <a:latin typeface="Inter"/>
-              </a:rPr>
-              <a:t>planned</a:t>
-            </a:r>
-          </a:p>
-        </p:txBody>
-      </p:sp>
-      <p:sp>
-        <p:nvSpPr>
-          <p:cNvPr id="16" name="Rectangle 15"/>
+                  <a:srgbClr val="FACC15"/>
+                </a:solidFill>
+                <a:latin typeface="Inter"/>
+              </a:rPr>
+              <a:t>in progress</a:t>
+            </a:r>
+          </a:p>
+        </p:txBody>
+      </p:sp>
+      <p:sp>
+        <p:nvSpPr>
+          <p:cNvPr id="12" name="Rectangle 11"/>
           <p:cNvSpPr/>
           <p:nvPr/>
         </p:nvSpPr>
         <p:spPr>
           <a:xfrm>
-            <a:off x="685800" y="3730752"/>
+            <a:off x="685800" y="3209544"/>
             <a:ext cx="10820095" cy="10972"/>
           </a:xfrm>
           <a:prstGeom prst="rect">
@@ -4165,13 +4787,13 @@
       </p:sp>
       <p:sp>
         <p:nvSpPr>
-          <p:cNvPr id="17" name="TextBox 16"/>
-          <p:cNvSpPr txBox="1"/>
-          <p:nvPr/>
-        </p:nvSpPr>
-        <p:spPr>
-          <a:xfrm>
-            <a:off x="685800" y="3813048"/>
+          <p:cNvPr id="13" name="TextBox 12"/>
+          <p:cNvSpPr txBox="1"/>
+          <p:nvPr/>
+        </p:nvSpPr>
+        <p:spPr>
+          <a:xfrm>
+            <a:off x="685800" y="3291840"/>
             <a:ext cx="2377440" cy="475488"/>
           </a:xfrm>
           <a:prstGeom prst="rect">
@@ -4204,13 +4826,13 @@
       </p:sp>
       <p:sp>
         <p:nvSpPr>
-          <p:cNvPr id="18" name="TextBox 17"/>
-          <p:cNvSpPr txBox="1"/>
-          <p:nvPr/>
-        </p:nvSpPr>
-        <p:spPr>
-          <a:xfrm>
-            <a:off x="3063240" y="3813048"/>
+          <p:cNvPr id="14" name="TextBox 13"/>
+          <p:cNvSpPr txBox="1"/>
+          <p:nvPr/>
+        </p:nvSpPr>
+        <p:spPr>
+          <a:xfrm>
+            <a:off x="3063240" y="3291840"/>
             <a:ext cx="6858000" cy="475488"/>
           </a:xfrm>
           <a:prstGeom prst="rect">
@@ -4236,20 +4858,20 @@
                 </a:solidFill>
                 <a:latin typeface="Inter"/>
               </a:rPr>
-              <a:t>Read-only connector for the payroll exports companies already produce. Nobody re-keys a year of payroll by hand.</a:t>
-            </a:r>
-          </a:p>
-        </p:txBody>
-      </p:sp>
-      <p:sp>
-        <p:nvSpPr>
-          <p:cNvPr id="19" name="TextBox 18"/>
-          <p:cNvSpPr txBox="1"/>
-          <p:nvPr/>
-        </p:nvSpPr>
-        <p:spPr>
-          <a:xfrm>
-            <a:off x="9921240" y="3813048"/>
+              <a:t>Replace the trusted issuer with a Merkle membership proof — so no company learns its own employees' salaries even to verify them.</a:t>
+            </a:r>
+          </a:p>
+        </p:txBody>
+      </p:sp>
+      <p:sp>
+        <p:nvSpPr>
+          <p:cNvPr id="15" name="TextBox 14"/>
+          <p:cNvSpPr txBox="1"/>
+          <p:nvPr/>
+        </p:nvSpPr>
+        <p:spPr>
+          <a:xfrm>
+            <a:off x="9921240" y="3291840"/>
             <a:ext cx="1581912" cy="475488"/>
           </a:xfrm>
           <a:prstGeom prst="rect">
@@ -4282,13 +4904,13 @@
       </p:sp>
       <p:sp>
         <p:nvSpPr>
-          <p:cNvPr id="20" name="Rectangle 19"/>
+          <p:cNvPr id="16" name="Rectangle 15"/>
           <p:cNvSpPr/>
           <p:nvPr/>
         </p:nvSpPr>
         <p:spPr>
           <a:xfrm>
-            <a:off x="685800" y="4251960"/>
+            <a:off x="685800" y="3730752"/>
             <a:ext cx="10820095" cy="10972"/>
           </a:xfrm>
           <a:prstGeom prst="rect">
@@ -4326,13 +4948,13 @@
       </p:sp>
       <p:sp>
         <p:nvSpPr>
-          <p:cNvPr id="21" name="TextBox 20"/>
-          <p:cNvSpPr txBox="1"/>
-          <p:nvPr/>
-        </p:nvSpPr>
-        <p:spPr>
-          <a:xfrm>
-            <a:off x="685800" y="4334256"/>
+          <p:cNvPr id="17" name="TextBox 16"/>
+          <p:cNvSpPr txBox="1"/>
+          <p:nvPr/>
+        </p:nvSpPr>
+        <p:spPr>
+          <a:xfrm>
+            <a:off x="685800" y="3813048"/>
             <a:ext cx="2377440" cy="475488"/>
           </a:xfrm>
           <a:prstGeom prst="rect">
@@ -4358,20 +4980,20 @@
                 </a:solidFill>
                 <a:latin typeface="Inter"/>
               </a:rPr>
-              <a:t>US</a:t>
-            </a:r>
-          </a:p>
-        </p:txBody>
-      </p:sp>
-      <p:sp>
-        <p:nvSpPr>
-          <p:cNvPr id="22" name="TextBox 21"/>
-          <p:cNvSpPr txBox="1"/>
-          <p:nvPr/>
-        </p:nvSpPr>
-        <p:spPr>
-          <a:xfrm>
-            <a:off x="3063240" y="4334256"/>
+              <a:t>Wave 3</a:t>
+            </a:r>
+          </a:p>
+        </p:txBody>
+      </p:sp>
+      <p:sp>
+        <p:nvSpPr>
+          <p:cNvPr id="18" name="TextBox 17"/>
+          <p:cNvSpPr txBox="1"/>
+          <p:nvPr/>
+        </p:nvSpPr>
+        <p:spPr>
+          <a:xfrm>
+            <a:off x="3063240" y="3813048"/>
             <a:ext cx="6858000" cy="475488"/>
           </a:xfrm>
           <a:prstGeom prst="rect">
@@ -4397,20 +5019,20 @@
                 </a:solidFill>
                 <a:latin typeface="Inter"/>
               </a:rPr>
-              <a:t>EO 14173 pay-scale reporting is back in force since the Fourth Circuit vacated its injunction in Feb 2026, plus ~15 state laws.</a:t>
-            </a:r>
-          </a:p>
-        </p:txBody>
-      </p:sp>
-      <p:sp>
-        <p:nvSpPr>
-          <p:cNvPr id="23" name="TextBox 22"/>
-          <p:cNvSpPr txBox="1"/>
-          <p:nvPr/>
-        </p:nvSpPr>
-        <p:spPr>
-          <a:xfrm>
-            <a:off x="9921240" y="4334256"/>
+              <a:t>Read-only connector for the payroll exports companies already produce. Nobody re-keys a year of payroll by hand.</a:t>
+            </a:r>
+          </a:p>
+        </p:txBody>
+      </p:sp>
+      <p:sp>
+        <p:nvSpPr>
+          <p:cNvPr id="19" name="TextBox 18"/>
+          <p:cNvSpPr txBox="1"/>
+          <p:nvPr/>
+        </p:nvSpPr>
+        <p:spPr>
+          <a:xfrm>
+            <a:off x="9921240" y="3813048"/>
             <a:ext cx="1581912" cy="475488"/>
           </a:xfrm>
           <a:prstGeom prst="rect">
@@ -4432,102 +5054,24 @@
             <a:r>
               <a:rPr sz="1200" b="1" i="0">
                 <a:solidFill>
-                  <a:srgbClr val="FACC15"/>
-                </a:solidFill>
-                <a:latin typeface="Inter"/>
-              </a:rPr>
-              <a:t>opening</a:t>
-            </a:r>
-          </a:p>
-        </p:txBody>
-      </p:sp>
-      <p:sp>
-        <p:nvSpPr>
-          <p:cNvPr id="24" name="TextBox 23"/>
-          <p:cNvSpPr txBox="1"/>
-          <p:nvPr/>
-        </p:nvSpPr>
-        <p:spPr>
-          <a:xfrm>
-            <a:off x="685800" y="5029200"/>
-            <a:ext cx="10820095" cy="548640"/>
-          </a:xfrm>
-          <a:prstGeom prst="rect">
-            <a:avLst/>
-          </a:prstGeom>
-          <a:noFill/>
-        </p:spPr>
-        <p:txBody>
-          <a:bodyPr wrap="square" lIns="0" rIns="0" tIns="0" bIns="0" anchor="t">
-            <a:spAutoFit/>
-          </a:bodyPr>
-          <a:lstStyle/>
-          <a:p>
-            <a:pPr algn="l">
-              <a:lnSpc>
-                <a:spcPct val="145000"/>
-              </a:lnSpc>
-            </a:pPr>
-            <a:r>
-              <a:rPr sz="1300" b="0" i="0">
-                <a:solidFill>
-                  <a:srgbClr val="F5F5F4"/>
-                </a:solidFill>
-                <a:latin typeface="Inter"/>
-              </a:rPr>
-              <a:t>Buyer: the Head of Total Rewards at a 150–2,500 person European company. Their project starts now, because they must report on last year.</a:t>
-            </a:r>
-          </a:p>
-        </p:txBody>
-      </p:sp>
-      <p:sp>
-        <p:nvSpPr>
-          <p:cNvPr id="25" name="TextBox 24"/>
-          <p:cNvSpPr txBox="1"/>
-          <p:nvPr/>
-        </p:nvSpPr>
-        <p:spPr>
-          <a:xfrm>
-            <a:off x="685800" y="5715000"/>
-            <a:ext cx="10820095" cy="365760"/>
-          </a:xfrm>
-          <a:prstGeom prst="rect">
-            <a:avLst/>
-          </a:prstGeom>
-          <a:noFill/>
-        </p:spPr>
-        <p:txBody>
-          <a:bodyPr wrap="square" lIns="0" rIns="0" tIns="0" bIns="0" anchor="t">
-            <a:spAutoFit/>
-          </a:bodyPr>
-          <a:lstStyle/>
-          <a:p>
-            <a:pPr algn="l">
-              <a:lnSpc>
-                <a:spcPct val="125000"/>
-              </a:lnSpc>
-            </a:pPr>
-            <a:r>
-              <a:rPr sz="1200" b="1" i="0">
-                <a:solidFill>
-                  <a:srgbClr val="FACC15"/>
-                </a:solidFill>
-                <a:latin typeface="Inter"/>
-              </a:rPr>
-              <a:t>Live on Midnight Preprod  ·  github.com/PhiBao/gotit  ·  Apache-2.0</a:t>
-            </a:r>
-          </a:p>
-        </p:txBody>
-      </p:sp>
-      <p:sp>
-        <p:nvSpPr>
-          <p:cNvPr id="26" name="Rectangle 25"/>
+                  <a:srgbClr val="A1A1AA"/>
+                </a:solidFill>
+                <a:latin typeface="Inter"/>
+              </a:rPr>
+              <a:t>planned</a:t>
+            </a:r>
+          </a:p>
+        </p:txBody>
+      </p:sp>
+      <p:sp>
+        <p:nvSpPr>
+          <p:cNvPr id="20" name="Rectangle 19"/>
           <p:cNvSpPr/>
           <p:nvPr/>
         </p:nvSpPr>
         <p:spPr>
           <a:xfrm>
-            <a:off x="685800" y="6291072"/>
+            <a:off x="685800" y="4251960"/>
             <a:ext cx="10820095" cy="10972"/>
           </a:xfrm>
           <a:prstGeom prst="rect">
@@ -4565,6 +5109,245 @@
       </p:sp>
       <p:sp>
         <p:nvSpPr>
+          <p:cNvPr id="21" name="TextBox 20"/>
+          <p:cNvSpPr txBox="1"/>
+          <p:nvPr/>
+        </p:nvSpPr>
+        <p:spPr>
+          <a:xfrm>
+            <a:off x="685800" y="4334256"/>
+            <a:ext cx="2377440" cy="475488"/>
+          </a:xfrm>
+          <a:prstGeom prst="rect">
+            <a:avLst/>
+          </a:prstGeom>
+          <a:noFill/>
+        </p:spPr>
+        <p:txBody>
+          <a:bodyPr wrap="square" lIns="0" rIns="0" tIns="0" bIns="0" anchor="t">
+            <a:spAutoFit/>
+          </a:bodyPr>
+          <a:lstStyle/>
+          <a:p>
+            <a:pPr algn="l">
+              <a:lnSpc>
+                <a:spcPct val="100000"/>
+              </a:lnSpc>
+            </a:pPr>
+            <a:r>
+              <a:rPr sz="1200" b="0" i="0">
+                <a:solidFill>
+                  <a:srgbClr val="F5F5F4"/>
+                </a:solidFill>
+                <a:latin typeface="Inter"/>
+              </a:rPr>
+              <a:t>US</a:t>
+            </a:r>
+          </a:p>
+        </p:txBody>
+      </p:sp>
+      <p:sp>
+        <p:nvSpPr>
+          <p:cNvPr id="22" name="TextBox 21"/>
+          <p:cNvSpPr txBox="1"/>
+          <p:nvPr/>
+        </p:nvSpPr>
+        <p:spPr>
+          <a:xfrm>
+            <a:off x="3063240" y="4334256"/>
+            <a:ext cx="6858000" cy="475488"/>
+          </a:xfrm>
+          <a:prstGeom prst="rect">
+            <a:avLst/>
+          </a:prstGeom>
+          <a:noFill/>
+        </p:spPr>
+        <p:txBody>
+          <a:bodyPr wrap="square" lIns="0" rIns="0" tIns="0" bIns="0" anchor="t">
+            <a:spAutoFit/>
+          </a:bodyPr>
+          <a:lstStyle/>
+          <a:p>
+            <a:pPr algn="l">
+              <a:lnSpc>
+                <a:spcPct val="100000"/>
+              </a:lnSpc>
+            </a:pPr>
+            <a:r>
+              <a:rPr sz="1200" b="0" i="0">
+                <a:solidFill>
+                  <a:srgbClr val="F5F5F4"/>
+                </a:solidFill>
+                <a:latin typeface="Inter"/>
+              </a:rPr>
+              <a:t>EO 14173 pay-scale reporting is back in force since the Fourth Circuit vacated its injunction in Feb 2026, plus ~15 state laws.</a:t>
+            </a:r>
+          </a:p>
+        </p:txBody>
+      </p:sp>
+      <p:sp>
+        <p:nvSpPr>
+          <p:cNvPr id="23" name="TextBox 22"/>
+          <p:cNvSpPr txBox="1"/>
+          <p:nvPr/>
+        </p:nvSpPr>
+        <p:spPr>
+          <a:xfrm>
+            <a:off x="9921240" y="4334256"/>
+            <a:ext cx="1581912" cy="475488"/>
+          </a:xfrm>
+          <a:prstGeom prst="rect">
+            <a:avLst/>
+          </a:prstGeom>
+          <a:noFill/>
+        </p:spPr>
+        <p:txBody>
+          <a:bodyPr wrap="square" lIns="0" rIns="0" tIns="0" bIns="0" anchor="t">
+            <a:spAutoFit/>
+          </a:bodyPr>
+          <a:lstStyle/>
+          <a:p>
+            <a:pPr algn="l">
+              <a:lnSpc>
+                <a:spcPct val="100000"/>
+              </a:lnSpc>
+            </a:pPr>
+            <a:r>
+              <a:rPr sz="1200" b="1" i="0">
+                <a:solidFill>
+                  <a:srgbClr val="FACC15"/>
+                </a:solidFill>
+                <a:latin typeface="Inter"/>
+              </a:rPr>
+              <a:t>opening</a:t>
+            </a:r>
+          </a:p>
+        </p:txBody>
+      </p:sp>
+      <p:sp>
+        <p:nvSpPr>
+          <p:cNvPr id="24" name="TextBox 23"/>
+          <p:cNvSpPr txBox="1"/>
+          <p:nvPr/>
+        </p:nvSpPr>
+        <p:spPr>
+          <a:xfrm>
+            <a:off x="685800" y="5029200"/>
+            <a:ext cx="10820095" cy="548640"/>
+          </a:xfrm>
+          <a:prstGeom prst="rect">
+            <a:avLst/>
+          </a:prstGeom>
+          <a:noFill/>
+        </p:spPr>
+        <p:txBody>
+          <a:bodyPr wrap="square" lIns="0" rIns="0" tIns="0" bIns="0" anchor="t">
+            <a:spAutoFit/>
+          </a:bodyPr>
+          <a:lstStyle/>
+          <a:p>
+            <a:pPr algn="l">
+              <a:lnSpc>
+                <a:spcPct val="145000"/>
+              </a:lnSpc>
+            </a:pPr>
+            <a:r>
+              <a:rPr sz="1300" b="0" i="0">
+                <a:solidFill>
+                  <a:srgbClr val="F5F5F4"/>
+                </a:solidFill>
+                <a:latin typeface="Inter"/>
+              </a:rPr>
+              <a:t>Buyer: the Head of Total Rewards at a 150–2,500 person European company. Their project starts now, because they must report on last year.</a:t>
+            </a:r>
+          </a:p>
+        </p:txBody>
+      </p:sp>
+      <p:sp>
+        <p:nvSpPr>
+          <p:cNvPr id="25" name="TextBox 24"/>
+          <p:cNvSpPr txBox="1"/>
+          <p:nvPr/>
+        </p:nvSpPr>
+        <p:spPr>
+          <a:xfrm>
+            <a:off x="685800" y="5715000"/>
+            <a:ext cx="10820095" cy="365760"/>
+          </a:xfrm>
+          <a:prstGeom prst="rect">
+            <a:avLst/>
+          </a:prstGeom>
+          <a:noFill/>
+        </p:spPr>
+        <p:txBody>
+          <a:bodyPr wrap="square" lIns="0" rIns="0" tIns="0" bIns="0" anchor="t">
+            <a:spAutoFit/>
+          </a:bodyPr>
+          <a:lstStyle/>
+          <a:p>
+            <a:pPr algn="l">
+              <a:lnSpc>
+                <a:spcPct val="125000"/>
+              </a:lnSpc>
+            </a:pPr>
+            <a:r>
+              <a:rPr sz="1200" b="1" i="0">
+                <a:solidFill>
+                  <a:srgbClr val="FACC15"/>
+                </a:solidFill>
+                <a:latin typeface="Inter"/>
+              </a:rPr>
+              <a:t>Live on Midnight Preprod  ·  github.com/PhiBao/gotit  ·  Apache-2.0</a:t>
+            </a:r>
+          </a:p>
+        </p:txBody>
+      </p:sp>
+      <p:sp>
+        <p:nvSpPr>
+          <p:cNvPr id="26" name="Rectangle 25"/>
+          <p:cNvSpPr/>
+          <p:nvPr/>
+        </p:nvSpPr>
+        <p:spPr>
+          <a:xfrm>
+            <a:off x="685800" y="6291072"/>
+            <a:ext cx="10820095" cy="10972"/>
+          </a:xfrm>
+          <a:prstGeom prst="rect">
+            <a:avLst/>
+          </a:prstGeom>
+          <a:solidFill>
+            <a:srgbClr val="26262B"/>
+          </a:solidFill>
+          <a:ln>
+            <a:noFill/>
+          </a:ln>
+          <a:effectLst/>
+        </p:spPr>
+        <p:style>
+          <a:lnRef idx="1">
+            <a:schemeClr val="accent1"/>
+          </a:lnRef>
+          <a:fillRef idx="3">
+            <a:schemeClr val="accent1"/>
+          </a:fillRef>
+          <a:effectRef idx="2">
+            <a:schemeClr val="accent1"/>
+          </a:effectRef>
+          <a:fontRef idx="minor">
+            <a:schemeClr val="lt1"/>
+          </a:fontRef>
+        </p:style>
+        <p:txBody>
+          <a:bodyPr rtlCol="0" anchor="ctr"/>
+          <a:lstStyle/>
+          <a:p>
+            <a:pPr algn="ctr"/>
+          </a:p>
+        </p:txBody>
+      </p:sp>
+      <p:sp>
+        <p:nvSpPr>
           <p:cNvPr id="27" name="TextBox 26"/>
           <p:cNvSpPr txBox="1"/>
           <p:nvPr/>
@@ -4636,7 +5419,7 @@
                 </a:solidFill>
                 <a:latin typeface="Inter"/>
               </a:rPr>
-              <a:t>10</a:t>
+              <a:t>11</a:t>
             </a:r>
           </a:p>
         </p:txBody>
@@ -8641,13 +9424,13 @@
               </a:lnSpc>
             </a:pPr>
             <a:r>
-              <a:rPr sz="1100" b="1" i="0">
+              <a:rPr sz="1100" b="1">
                 <a:solidFill>
                   <a:srgbClr val="71717A"/>
                 </a:solidFill>
                 <a:latin typeface="Inter"/>
               </a:rPr>
-              <a:t>TRUST</a:t>
+              <a:t>THE PART WE ARE MOST PLEASED WITH</a:t>
             </a:r>
           </a:p>
         </p:txBody>
@@ -8660,33 +9443,49 @@
         </p:nvSpPr>
         <p:spPr>
           <a:xfrm>
-            <a:off x="685800" y="777240"/>
-            <a:ext cx="10820095" cy="914400"/>
-          </a:xfrm>
-          <a:prstGeom prst="rect">
-            <a:avLst/>
-          </a:prstGeom>
-          <a:noFill/>
-        </p:spPr>
-        <p:txBody>
-          <a:bodyPr wrap="square" lIns="0" rIns="0" tIns="0" bIns="0" anchor="t">
-            <a:spAutoFit/>
-          </a:bodyPr>
-          <a:lstStyle/>
-          <a:p>
-            <a:pPr algn="l">
-              <a:lnSpc>
-                <a:spcPct val="108000"/>
-              </a:lnSpc>
-            </a:pPr>
-            <a:r>
-              <a:rPr sz="3100" b="1" i="0">
+            <a:off x="685800" y="822960"/>
+            <a:ext cx="10607040" cy="822960"/>
+          </a:xfrm>
+          <a:prstGeom prst="rect">
+            <a:avLst/>
+          </a:prstGeom>
+          <a:noFill/>
+        </p:spPr>
+        <p:txBody>
+          <a:bodyPr wrap="square" lIns="0" rIns="0" tIns="0" bIns="0" anchor="t">
+            <a:spAutoFit/>
+          </a:bodyPr>
+          <a:lstStyle/>
+          <a:p>
+            <a:pPr algn="l">
+              <a:lnSpc>
+                <a:spcPct val="112000"/>
+              </a:lnSpc>
+            </a:pPr>
+            <a:r>
+              <a:rPr sz="3000" b="1">
                 <a:solidFill>
                   <a:srgbClr val="F5F5F4"/>
                 </a:solidFill>
                 <a:latin typeface="Fraunces"/>
               </a:rPr>
-              <a:t>Anyone can check it. No wallet, no account.</a:t>
+              <a:t>Art. 9(1)(e) cannot be computed.</a:t>
+            </a:r>
+          </a:p>
+          <a:p>
+            <a:pPr algn="l">
+              <a:lnSpc>
+                <a:spcPct val="112000"/>
+              </a:lnSpc>
+            </a:pPr>
+            <a:r>
+              <a:rPr sz="3000" b="1">
+                <a:solidFill>
+                  <a:srgbClr val="F5F5F4"/>
+                </a:solidFill>
+                <a:latin typeface="Fraunces"/>
+              </a:rPr>
+              <a:t>We can prove why — and what we refused.</a:t>
             </a:r>
           </a:p>
         </p:txBody>
@@ -8699,8 +9498,8 @@
         </p:nvSpPr>
         <p:spPr>
           <a:xfrm>
-            <a:off x="685800" y="2011680"/>
-            <a:ext cx="5257800" cy="1463040"/>
+            <a:off x="685800" y="2103120"/>
+            <a:ext cx="5257800" cy="2148840"/>
           </a:xfrm>
           <a:prstGeom prst="roundRect">
             <a:avLst>
@@ -8747,33 +9546,33 @@
         </p:nvSpPr>
         <p:spPr>
           <a:xfrm>
-            <a:off x="960120" y="2286000"/>
-            <a:ext cx="4709160" cy="365760"/>
-          </a:xfrm>
-          <a:prstGeom prst="rect">
-            <a:avLst/>
-          </a:prstGeom>
-          <a:noFill/>
-        </p:spPr>
-        <p:txBody>
-          <a:bodyPr wrap="square" lIns="0" rIns="0" tIns="0" bIns="0" anchor="t">
-            <a:spAutoFit/>
-          </a:bodyPr>
-          <a:lstStyle/>
-          <a:p>
-            <a:pPr algn="l">
-              <a:lnSpc>
-                <a:spcPct val="125000"/>
-              </a:lnSpc>
-            </a:pPr>
-            <a:r>
-              <a:rPr sz="1500" b="1" i="0">
-                <a:solidFill>
-                  <a:srgbClr val="F5F5F4"/>
-                </a:solidFill>
-                <a:latin typeface="Inter"/>
-              </a:rPr>
-              <a:t>The employer publishes</a:t>
+            <a:off x="960120" y="2359152"/>
+            <a:ext cx="4709160" cy="274320"/>
+          </a:xfrm>
+          <a:prstGeom prst="rect">
+            <a:avLst/>
+          </a:prstGeom>
+          <a:noFill/>
+        </p:spPr>
+        <p:txBody>
+          <a:bodyPr wrap="square" lIns="0" rIns="0" tIns="0" bIns="0" anchor="t">
+            <a:spAutoFit/>
+          </a:bodyPr>
+          <a:lstStyle/>
+          <a:p>
+            <a:pPr algn="l">
+              <a:lnSpc>
+                <a:spcPct val="130000"/>
+              </a:lnSpc>
+            </a:pPr>
+            <a:r>
+              <a:rPr sz="1050" b="1">
+                <a:solidFill>
+                  <a:srgbClr val="71717A"/>
+                </a:solidFill>
+                <a:latin typeface="Inter"/>
+              </a:rPr>
+              <a:t>THE QUESTION THE DIRECTIVE ASKS</a:t>
             </a:r>
           </a:p>
         </p:txBody>
@@ -8786,8 +9585,8 @@
         </p:nvSpPr>
         <p:spPr>
           <a:xfrm>
-            <a:off x="960120" y="2788920"/>
-            <a:ext cx="4709160" cy="640080"/>
+            <a:off x="960120" y="2724912"/>
+            <a:ext cx="4709160" cy="1371600"/>
           </a:xfrm>
           <a:prstGeom prst="rect">
             <a:avLst/>
@@ -8806,13 +9605,45 @@
               </a:lnSpc>
             </a:pPr>
             <a:r>
-              <a:rPr sz="1250" b="0" i="0">
+              <a:rPr sz="1350" b="0">
                 <a:solidFill>
                   <a:srgbClr val="A1A1AA"/>
                 </a:solidFill>
                 <a:latin typeface="Inter"/>
               </a:rPr>
-              <a:t>a report plus a fingerprint taken over the exact bucket counts it was built from.</a:t>
+              <a:t>The proportion of each group receiving complementary or variable pay.</a:t>
+            </a:r>
+          </a:p>
+          <a:p>
+            <a:pPr algn="l">
+              <a:lnSpc>
+                <a:spcPct val="145000"/>
+              </a:lnSpc>
+            </a:pPr>
+            <a:r>
+              <a:rPr sz="1350" b="0">
+                <a:solidFill>
+                  <a:srgbClr val="A1A1AA"/>
+                </a:solidFill>
+                <a:latin typeface="Inter"/>
+              </a:rPr>
+              <a:t/>
+            </a:r>
+          </a:p>
+          <a:p>
+            <a:pPr algn="l">
+              <a:lnSpc>
+                <a:spcPct val="145000"/>
+              </a:lnSpc>
+            </a:pPr>
+            <a:r>
+              <a:rPr sz="1350" b="0">
+                <a:solidFill>
+                  <a:srgbClr val="A1A1AA"/>
+                </a:solidFill>
+                <a:latin typeface="Inter"/>
+              </a:rPr>
+              <a:t>Every published report answers it with a single number.</a:t>
             </a:r>
           </a:p>
         </p:txBody>
@@ -8825,8 +9656,8 @@
         </p:nvSpPr>
         <p:spPr>
           <a:xfrm>
-            <a:off x="6492240" y="2011680"/>
-            <a:ext cx="5257800" cy="1463040"/>
+            <a:off x="6492240" y="2103120"/>
+            <a:ext cx="5257800" cy="2148840"/>
           </a:xfrm>
           <a:prstGeom prst="roundRect">
             <a:avLst>
@@ -8873,33 +9704,33 @@
         </p:nvSpPr>
         <p:spPr>
           <a:xfrm>
-            <a:off x="6766560" y="2286000"/>
-            <a:ext cx="4709160" cy="365760"/>
-          </a:xfrm>
-          <a:prstGeom prst="rect">
-            <a:avLst/>
-          </a:prstGeom>
-          <a:noFill/>
-        </p:spPr>
-        <p:txBody>
-          <a:bodyPr wrap="square" lIns="0" rIns="0" tIns="0" bIns="0" anchor="t">
-            <a:spAutoFit/>
-          </a:bodyPr>
-          <a:lstStyle/>
-          <a:p>
-            <a:pPr algn="l">
-              <a:lnSpc>
-                <a:spcPct val="125000"/>
-              </a:lnSpc>
-            </a:pPr>
-            <a:r>
-              <a:rPr sz="1500" b="1" i="0">
-                <a:solidFill>
-                  <a:srgbClr val="F5F5F4"/>
-                </a:solidFill>
-                <a:latin typeface="Inter"/>
-              </a:rPr>
-              <a:t>Anyone pastes that fingerprint</a:t>
+            <a:off x="6766560" y="2359152"/>
+            <a:ext cx="4709160" cy="274320"/>
+          </a:xfrm>
+          <a:prstGeom prst="rect">
+            <a:avLst/>
+          </a:prstGeom>
+          <a:noFill/>
+        </p:spPr>
+        <p:txBody>
+          <a:bodyPr wrap="square" lIns="0" rIns="0" tIns="0" bIns="0" anchor="t">
+            <a:spAutoFit/>
+          </a:bodyPr>
+          <a:lstStyle/>
+          <a:p>
+            <a:pPr algn="l">
+              <a:lnSpc>
+                <a:spcPct val="130000"/>
+              </a:lnSpc>
+            </a:pPr>
+            <a:r>
+              <a:rPr sz="1050" b="1">
+                <a:solidFill>
+                  <a:srgbClr val="71717A"/>
+                </a:solidFill>
+                <a:latin typeface="Inter"/>
+              </a:rPr>
+              <a:t>WHY OURS CANNOT</a:t>
             </a:r>
           </a:p>
         </p:txBody>
@@ -8912,8 +9743,8 @@
         </p:nvSpPr>
         <p:spPr>
           <a:xfrm>
-            <a:off x="6766560" y="2788920"/>
-            <a:ext cx="4709160" cy="640080"/>
+            <a:off x="6766560" y="2724912"/>
+            <a:ext cx="4709160" cy="1371600"/>
           </a:xfrm>
           <a:prstGeom prst="rect">
             <a:avLst/>
@@ -8932,59 +9763,39 @@
               </a:lnSpc>
             </a:pPr>
             <a:r>
-              <a:rPr sz="1250" b="0" i="0">
+              <a:rPr sz="1350" b="0">
                 <a:solidFill>
                   <a:srgbClr val="A1A1AA"/>
                 </a:solidFill>
                 <a:latin typeface="Inter"/>
               </a:rPr>
-              <a:t>into the verify page. It re-reads chain state and answers match or mismatch.</a:t>
-            </a:r>
-          </a:p>
-        </p:txBody>
-      </p:sp>
-      <p:pic>
-        <p:nvPicPr>
-          <p:cNvPr id="11" name="Picture 10" descr="03-verify.png"/>
-          <p:cNvPicPr>
-            <a:picLocks noChangeAspect="1"/>
-          </p:cNvPicPr>
-          <p:nvPr/>
-        </p:nvPicPr>
-        <p:blipFill>
-          <a:blip r:embed="rId2"/>
-          <a:stretch>
-            <a:fillRect/>
-          </a:stretch>
-        </p:blipFill>
-        <p:spPr>
-          <a:xfrm>
-            <a:off x="1889055" y="3794760"/>
-            <a:ext cx="3171329" cy="2286000"/>
-          </a:xfrm>
-          <a:prstGeom prst="rect">
-            <a:avLst/>
-          </a:prstGeom>
-        </p:spPr>
-      </p:pic>
-      <p:sp>
-        <p:nvSpPr>
-          <p:cNvPr id="12" name="Rectangle 11"/>
+              <a:t>The ledger keeps base-pay and variable-pay submissions in separate, unlinkable cells — which is the property everything else depends on. So |base| and |variable| are exact, but their intersection is not known.</a:t>
+            </a:r>
+          </a:p>
+        </p:txBody>
+      </p:sp>
+      <p:sp>
+        <p:nvSpPr>
+          <p:cNvPr id="11" name="Rounded Rectangle 10"/>
           <p:cNvSpPr/>
           <p:nvPr/>
         </p:nvSpPr>
         <p:spPr>
           <a:xfrm>
-            <a:off x="1889055" y="3794760"/>
-            <a:ext cx="3171329" cy="2286000"/>
-          </a:xfrm>
-          <a:prstGeom prst="rect">
-            <a:avLst/>
-          </a:prstGeom>
-          <a:noFill/>
+            <a:off x="685800" y="4572000"/>
+            <a:ext cx="5181447" cy="914400"/>
+          </a:xfrm>
+          <a:prstGeom prst="roundRect">
+            <a:avLst>
+              <a:gd name="adj" fmla="val 6000"/>
+            </a:avLst>
+          </a:prstGeom>
+          <a:solidFill>
+            <a:srgbClr val="1A1500"/>
+          </a:solidFill>
           <a:ln w="12700">
             <a:solidFill>
-              <a:srgbClr val="26262B"/>
+              <a:srgbClr val="713F12"/>
             </a:solidFill>
           </a:ln>
           <a:effectLst/>
@@ -9013,101 +9824,105 @@
       </p:sp>
       <p:sp>
         <p:nvSpPr>
+          <p:cNvPr id="12" name="TextBox 11"/>
+          <p:cNvSpPr txBox="1"/>
+          <p:nvPr/>
+        </p:nvSpPr>
+        <p:spPr>
+          <a:xfrm>
+            <a:off x="923544" y="4754880"/>
+            <a:ext cx="4705959" cy="274320"/>
+          </a:xfrm>
+          <a:prstGeom prst="rect">
+            <a:avLst/>
+          </a:prstGeom>
+          <a:noFill/>
+        </p:spPr>
+        <p:txBody>
+          <a:bodyPr wrap="square" lIns="0" rIns="0" tIns="0" bIns="0" anchor="t">
+            <a:spAutoFit/>
+          </a:bodyPr>
+          <a:lstStyle/>
+          <a:p>
+            <a:pPr algn="l">
+              <a:lnSpc>
+                <a:spcPct val="130000"/>
+              </a:lnSpc>
+            </a:pPr>
+            <a:r>
+              <a:rPr sz="1050" b="1">
+                <a:solidFill>
+                  <a:srgbClr val="FACC15"/>
+                </a:solidFill>
+                <a:latin typeface="Inter"/>
+              </a:rPr>
+              <a:t>LINK A PERSON'S BASE AND VARIABLE PAY</a:t>
+            </a:r>
+          </a:p>
+        </p:txBody>
+      </p:sp>
+      <p:sp>
+        <p:nvSpPr>
           <p:cNvPr id="13" name="TextBox 12"/>
           <p:cNvSpPr txBox="1"/>
           <p:nvPr/>
         </p:nvSpPr>
         <p:spPr>
           <a:xfrm>
-            <a:off x="1889055" y="6153912"/>
-            <a:ext cx="3171329" cy="228600"/>
-          </a:xfrm>
-          <a:prstGeom prst="rect">
-            <a:avLst/>
-          </a:prstGeom>
-          <a:noFill/>
-        </p:spPr>
-        <p:txBody>
-          <a:bodyPr wrap="square" lIns="0" rIns="0" tIns="0" bIns="0" anchor="t">
-            <a:spAutoFit/>
-          </a:bodyPr>
-          <a:lstStyle/>
-          <a:p>
-            <a:pPr algn="l">
-              <a:lnSpc>
-                <a:spcPct val="125000"/>
-              </a:lnSpc>
-            </a:pPr>
-            <a:r>
-              <a:rPr sz="950" b="0" i="0">
-                <a:solidFill>
-                  <a:srgbClr val="71717A"/>
-                </a:solidFill>
-                <a:latin typeface="Inter"/>
-              </a:rPr>
-              <a:t>Verification needs no wallet</a:t>
-            </a:r>
-          </a:p>
-        </p:txBody>
-      </p:sp>
-      <p:sp>
-        <p:nvSpPr>
-          <p:cNvPr id="14" name="TextBox 13"/>
-          <p:cNvSpPr txBox="1"/>
-          <p:nvPr/>
-        </p:nvSpPr>
-        <p:spPr>
-          <a:xfrm>
-            <a:off x="6583680" y="3886200"/>
-            <a:ext cx="4922215" cy="365760"/>
-          </a:xfrm>
-          <a:prstGeom prst="rect">
-            <a:avLst/>
-          </a:prstGeom>
-          <a:noFill/>
-        </p:spPr>
-        <p:txBody>
-          <a:bodyPr wrap="square" lIns="0" rIns="0" tIns="0" bIns="0" anchor="t">
-            <a:spAutoFit/>
-          </a:bodyPr>
-          <a:lstStyle/>
-          <a:p>
-            <a:pPr algn="l">
-              <a:lnSpc>
-                <a:spcPct val="145000"/>
-              </a:lnSpc>
-            </a:pPr>
-            <a:r>
-              <a:rPr sz="1200" b="0" i="0">
-                <a:solidFill>
-                  <a:srgbClr val="FACC15"/>
-                </a:solidFill>
-                <a:latin typeface="Inter"/>
-              </a:rPr>
-              <a:t>What this does and does not prove — stated on the page itself.</a:t>
-            </a:r>
-          </a:p>
-        </p:txBody>
-      </p:sp>
-      <p:sp>
-        <p:nvSpPr>
-          <p:cNvPr id="15" name="Rectangle 14"/>
+            <a:off x="923544" y="5047488"/>
+            <a:ext cx="4705959" cy="411480"/>
+          </a:xfrm>
+          <a:prstGeom prst="rect">
+            <a:avLst/>
+          </a:prstGeom>
+          <a:noFill/>
+        </p:spPr>
+        <p:txBody>
+          <a:bodyPr wrap="square" lIns="0" rIns="0" tIns="0" bIns="0" anchor="t">
+            <a:spAutoFit/>
+          </a:bodyPr>
+          <a:lstStyle/>
+          <a:p>
+            <a:pPr algn="l">
+              <a:lnSpc>
+                <a:spcPct val="135000"/>
+              </a:lnSpc>
+            </a:pPr>
+            <a:r>
+              <a:rPr sz="1200" b="0">
+                <a:solidFill>
+                  <a:srgbClr val="A1A1AA"/>
+                </a:solidFill>
+                <a:latin typeface="Inter"/>
+              </a:rPr>
+              <a:t>Reveals both figures for one individual. Refused: it defeats the design.</a:t>
+            </a:r>
+          </a:p>
+        </p:txBody>
+      </p:sp>
+      <p:sp>
+        <p:nvSpPr>
+          <p:cNvPr id="14" name="Rounded Rectangle 13"/>
           <p:cNvSpPr/>
           <p:nvPr/>
         </p:nvSpPr>
         <p:spPr>
           <a:xfrm>
-            <a:off x="6583680" y="4407408"/>
-            <a:ext cx="68580" cy="68580"/>
-          </a:xfrm>
-          <a:prstGeom prst="rect">
-            <a:avLst/>
+            <a:off x="6324447" y="4572000"/>
+            <a:ext cx="5181447" cy="914400"/>
+          </a:xfrm>
+          <a:prstGeom prst="roundRect">
+            <a:avLst>
+              <a:gd name="adj" fmla="val 6000"/>
+            </a:avLst>
           </a:prstGeom>
           <a:solidFill>
-            <a:srgbClr val="FACC15"/>
+            <a:srgbClr val="1A1500"/>
           </a:solidFill>
-          <a:ln>
-            <a:noFill/>
+          <a:ln w="12700">
+            <a:solidFill>
+              <a:srgbClr val="713F12"/>
+            </a:solidFill>
           </a:ln>
           <a:effectLst/>
         </p:spPr>
@@ -9135,71 +9950,105 @@
       </p:sp>
       <p:sp>
         <p:nvSpPr>
+          <p:cNvPr id="15" name="TextBox 14"/>
+          <p:cNvSpPr txBox="1"/>
+          <p:nvPr/>
+        </p:nvSpPr>
+        <p:spPr>
+          <a:xfrm>
+            <a:off x="6562191" y="4754880"/>
+            <a:ext cx="4705959" cy="274320"/>
+          </a:xfrm>
+          <a:prstGeom prst="rect">
+            <a:avLst/>
+          </a:prstGeom>
+          <a:noFill/>
+        </p:spPr>
+        <p:txBody>
+          <a:bodyPr wrap="square" lIns="0" rIns="0" tIns="0" bIns="0" anchor="t">
+            <a:spAutoFit/>
+          </a:bodyPr>
+          <a:lstStyle/>
+          <a:p>
+            <a:pPr algn="l">
+              <a:lnSpc>
+                <a:spcPct val="130000"/>
+              </a:lnSpc>
+            </a:pPr>
+            <a:r>
+              <a:rPr sz="1050" b="1">
+                <a:solidFill>
+                  <a:srgbClr val="FACC15"/>
+                </a:solidFill>
+                <a:latin typeface="Inter"/>
+              </a:rPr>
+              <a:t>COUNT DISTINCT CONTRIBUTORS PER GROUP</a:t>
+            </a:r>
+          </a:p>
+        </p:txBody>
+      </p:sp>
+      <p:sp>
+        <p:nvSpPr>
           <p:cNvPr id="16" name="TextBox 15"/>
           <p:cNvSpPr txBox="1"/>
           <p:nvPr/>
         </p:nvSpPr>
         <p:spPr>
           <a:xfrm>
-            <a:off x="6784848" y="4315968"/>
-            <a:ext cx="4721047" cy="457200"/>
-          </a:xfrm>
-          <a:prstGeom prst="rect">
-            <a:avLst/>
-          </a:prstGeom>
-          <a:noFill/>
-        </p:spPr>
-        <p:txBody>
-          <a:bodyPr wrap="square" lIns="0" rIns="0" tIns="0" bIns="0">
-            <a:spAutoFit/>
-          </a:bodyPr>
-          <a:lstStyle/>
-          <a:p>
-            <a:pPr>
+            <a:off x="6562191" y="5047488"/>
+            <a:ext cx="4705959" cy="411480"/>
+          </a:xfrm>
+          <a:prstGeom prst="rect">
+            <a:avLst/>
+          </a:prstGeom>
+          <a:noFill/>
+        </p:spPr>
+        <p:txBody>
+          <a:bodyPr wrap="square" lIns="0" rIns="0" tIns="0" bIns="0" anchor="t">
+            <a:spAutoFit/>
+          </a:bodyPr>
+          <a:lstStyle/>
+          <a:p>
+            <a:pPr algn="l">
               <a:lnSpc>
                 <a:spcPct val="135000"/>
               </a:lnSpc>
             </a:pPr>
             <a:r>
-              <a:rPr sz="1150" b="1">
-                <a:solidFill>
-                  <a:srgbClr val="F5F5F4"/>
-                </a:solidFill>
-                <a:latin typeface="Inter"/>
-              </a:rPr>
-              <a:t>Proves </a:t>
-            </a:r>
-            <a:r>
-              <a:rPr sz="1150">
+              <a:rPr sz="1200" b="0">
                 <a:solidFill>
                   <a:srgbClr val="A1A1AA"/>
                 </a:solidFill>
                 <a:latin typeface="Inter"/>
               </a:rPr>
-              <a:t>the figures were derived from the counts on chain, and that recomputing them yields the same numbers.</a:t>
-            </a:r>
-          </a:p>
-        </p:txBody>
-      </p:sp>
-      <p:sp>
-        <p:nvSpPr>
-          <p:cNvPr id="17" name="Rectangle 16"/>
+              <a:t>A second nullifier would reveal that one person submitted both. Refused.</a:t>
+            </a:r>
+          </a:p>
+        </p:txBody>
+      </p:sp>
+      <p:sp>
+        <p:nvSpPr>
+          <p:cNvPr id="17" name="Rounded Rectangle 16"/>
           <p:cNvSpPr/>
           <p:nvPr/>
         </p:nvSpPr>
         <p:spPr>
           <a:xfrm>
-            <a:off x="6583680" y="5102352"/>
-            <a:ext cx="68580" cy="68580"/>
-          </a:xfrm>
-          <a:prstGeom prst="rect">
-            <a:avLst/>
+            <a:off x="685800" y="5760720"/>
+            <a:ext cx="10820095" cy="658368"/>
+          </a:xfrm>
+          <a:prstGeom prst="roundRect">
+            <a:avLst>
+              <a:gd name="adj" fmla="val 6000"/>
+            </a:avLst>
           </a:prstGeom>
           <a:solidFill>
-            <a:srgbClr val="FACC15"/>
+            <a:srgbClr val="0A1A0F"/>
           </a:solidFill>
-          <a:ln>
-            <a:noFill/>
+          <a:ln w="12700">
+            <a:solidFill>
+              <a:srgbClr val="14301E"/>
+            </a:solidFill>
           </a:ln>
           <a:effectLst/>
         </p:spPr>
@@ -9233,164 +10082,72 @@
         </p:nvSpPr>
         <p:spPr>
           <a:xfrm>
-            <a:off x="6784848" y="5010912"/>
-            <a:ext cx="4721047" cy="457200"/>
-          </a:xfrm>
-          <a:prstGeom prst="rect">
-            <a:avLst/>
-          </a:prstGeom>
-          <a:noFill/>
-        </p:spPr>
-        <p:txBody>
-          <a:bodyPr wrap="square" lIns="0" rIns="0" tIns="0" bIns="0">
-            <a:spAutoFit/>
-          </a:bodyPr>
-          <a:lstStyle/>
-          <a:p>
-            <a:pPr>
+            <a:off x="960120" y="5760720"/>
+            <a:ext cx="10271455" cy="658368"/>
+          </a:xfrm>
+          <a:prstGeom prst="rect">
+            <a:avLst/>
+          </a:prstGeom>
+          <a:noFill/>
+        </p:spPr>
+        <p:txBody>
+          <a:bodyPr wrap="square" lIns="0" rIns="0" tIns="0" bIns="0" anchor="ctr">
+            <a:spAutoFit/>
+          </a:bodyPr>
+          <a:lstStyle/>
+          <a:p>
+            <a:pPr algn="ctr">
               <a:lnSpc>
                 <a:spcPct val="135000"/>
               </a:lnSpc>
             </a:pPr>
             <a:r>
-              <a:rPr sz="1150" b="1">
-                <a:solidFill>
-                  <a:srgbClr val="F5F5F4"/>
-                </a:solidFill>
-                <a:latin typeface="Inter"/>
-              </a:rPr>
-              <a:t>Does not prove </a:t>
-            </a:r>
-            <a:r>
-              <a:rPr sz="1150">
-                <a:solidFill>
-                  <a:srgbClr val="A1A1AA"/>
-                </a:solidFill>
-                <a:latin typeface="Inter"/>
-              </a:rPr>
-              <a:t>that anyone was paid what they said, or that everyone participated. Participation is voluntary, so the report states its own coverage.</a:t>
-            </a:r>
-          </a:p>
-        </p:txBody>
-      </p:sp>
-      <p:sp>
-        <p:nvSpPr>
-          <p:cNvPr id="19" name="Rectangle 18"/>
-          <p:cNvSpPr/>
-          <p:nvPr/>
-        </p:nvSpPr>
-        <p:spPr>
-          <a:xfrm>
-            <a:off x="685800" y="6291072"/>
-            <a:ext cx="10820095" cy="10972"/>
-          </a:xfrm>
-          <a:prstGeom prst="rect">
-            <a:avLst/>
-          </a:prstGeom>
-          <a:solidFill>
-            <a:srgbClr val="26262B"/>
-          </a:solidFill>
-          <a:ln>
-            <a:noFill/>
-          </a:ln>
-          <a:effectLst/>
-        </p:spPr>
-        <p:style>
-          <a:lnRef idx="1">
-            <a:schemeClr val="accent1"/>
-          </a:lnRef>
-          <a:fillRef idx="3">
-            <a:schemeClr val="accent1"/>
-          </a:fillRef>
-          <a:effectRef idx="2">
-            <a:schemeClr val="accent1"/>
-          </a:effectRef>
-          <a:fontRef idx="minor">
-            <a:schemeClr val="lt1"/>
-          </a:fontRef>
-        </p:style>
-        <p:txBody>
-          <a:bodyPr rtlCol="0" anchor="ctr"/>
-          <a:lstStyle/>
-          <a:p>
-            <a:pPr algn="ctr"/>
-          </a:p>
-        </p:txBody>
-      </p:sp>
-      <p:sp>
-        <p:nvSpPr>
-          <p:cNvPr id="20" name="TextBox 19"/>
+              <a:rPr sz="1300" b="1">
+                <a:solidFill>
+                  <a:srgbClr val="22C55E"/>
+                </a:solidFill>
+                <a:latin typeface="Inter"/>
+              </a:rPr>
+              <a:t>So we publish the interval the model bounds, and the reason it cannot be tightened. A reviewer can check the reasoning rather than take a number on trust.</a:t>
+            </a:r>
+          </a:p>
+        </p:txBody>
+      </p:sp>
+      <p:sp>
+        <p:nvSpPr>
+          <p:cNvPr id="19" name="TextBox 18"/>
           <p:cNvSpPr txBox="1"/>
           <p:nvPr/>
         </p:nvSpPr>
         <p:spPr>
           <a:xfrm>
             <a:off x="685800" y="6400800"/>
-            <a:ext cx="7315200" cy="274320"/>
-          </a:xfrm>
-          <a:prstGeom prst="rect">
-            <a:avLst/>
-          </a:prstGeom>
-          <a:noFill/>
-        </p:spPr>
-        <p:txBody>
-          <a:bodyPr wrap="square" lIns="0" rIns="0" tIns="0" bIns="0" anchor="t">
-            <a:spAutoFit/>
-          </a:bodyPr>
-          <a:lstStyle/>
-          <a:p>
-            <a:pPr algn="l">
-              <a:lnSpc>
-                <a:spcPct val="125000"/>
-              </a:lnSpc>
-            </a:pPr>
-            <a:r>
-              <a:rPr sz="900" b="0" i="0">
+            <a:ext cx="8229600" cy="274320"/>
+          </a:xfrm>
+          <a:prstGeom prst="rect">
+            <a:avLst/>
+          </a:prstGeom>
+          <a:noFill/>
+        </p:spPr>
+        <p:txBody>
+          <a:bodyPr wrap="square" lIns="0" rIns="0" tIns="0" bIns="0" anchor="t">
+            <a:spAutoFit/>
+          </a:bodyPr>
+          <a:lstStyle/>
+          <a:p>
+            <a:pPr algn="l">
+              <a:lnSpc>
+                <a:spcPct val="130000"/>
+              </a:lnSpc>
+            </a:pPr>
+            <a:r>
+              <a:rPr sz="900" b="0">
                 <a:solidFill>
                   <a:srgbClr val="71717A"/>
                 </a:solidFill>
                 <a:latin typeface="Inter"/>
               </a:rPr>
               <a:t>GotIt · Midnight Buildathon · Directive (EU) 2023/970 Art. 9</a:t>
-            </a:r>
-          </a:p>
-        </p:txBody>
-      </p:sp>
-      <p:sp>
-        <p:nvSpPr>
-          <p:cNvPr id="21" name="TextBox 20"/>
-          <p:cNvSpPr txBox="1"/>
-          <p:nvPr/>
-        </p:nvSpPr>
-        <p:spPr>
-          <a:xfrm>
-            <a:off x="10591495" y="6400800"/>
-            <a:ext cx="914400" cy="274320"/>
-          </a:xfrm>
-          <a:prstGeom prst="rect">
-            <a:avLst/>
-          </a:prstGeom>
-          <a:noFill/>
-        </p:spPr>
-        <p:txBody>
-          <a:bodyPr wrap="square" lIns="0" rIns="0" tIns="0" bIns="0" anchor="t">
-            <a:spAutoFit/>
-          </a:bodyPr>
-          <a:lstStyle/>
-          <a:p>
-            <a:pPr algn="r">
-              <a:lnSpc>
-                <a:spcPct val="125000"/>
-              </a:lnSpc>
-            </a:pPr>
-            <a:r>
-              <a:rPr sz="900" b="0" i="0">
-                <a:solidFill>
-                  <a:srgbClr val="71717A"/>
-                </a:solidFill>
-                <a:latin typeface="Inter"/>
-              </a:rPr>
-              <a:t>6</a:t>
             </a:r>
           </a:p>
         </p:txBody>
@@ -9491,7 +10248,7 @@
                 </a:solidFill>
                 <a:latin typeface="Inter"/>
               </a:rPr>
-              <a:t>WHY US</a:t>
+              <a:t>TRUST</a:t>
             </a:r>
           </a:p>
         </p:txBody>
@@ -9524,43 +10281,201 @@
               </a:lnSpc>
             </a:pPr>
             <a:r>
-              <a:rPr sz="2700" b="1" i="0">
+              <a:rPr sz="3100" b="1" i="0">
                 <a:solidFill>
                   <a:srgbClr val="F5F5F4"/>
                 </a:solidFill>
                 <a:latin typeface="Fraunces"/>
               </a:rPr>
-              <a:t>Without ZK you can have one or the other.</a:t>
-            </a:r>
-          </a:p>
-          <a:p>
-            <a:pPr algn="l">
-              <a:lnSpc>
-                <a:spcPct val="108000"/>
-              </a:lnSpc>
-            </a:pPr>
-            <a:r>
-              <a:rPr sz="2700" b="1" i="0">
+              <a:t>Anyone can check it. No wallet, no account.</a:t>
+            </a:r>
+          </a:p>
+        </p:txBody>
+      </p:sp>
+      <p:sp>
+        <p:nvSpPr>
+          <p:cNvPr id="5" name="Rounded Rectangle 4"/>
+          <p:cNvSpPr/>
+          <p:nvPr/>
+        </p:nvSpPr>
+        <p:spPr>
+          <a:xfrm>
+            <a:off x="685800" y="2011680"/>
+            <a:ext cx="5257800" cy="1463040"/>
+          </a:xfrm>
+          <a:prstGeom prst="roundRect">
+            <a:avLst>
+              <a:gd name="adj" fmla="val 6000"/>
+            </a:avLst>
+          </a:prstGeom>
+          <a:solidFill>
+            <a:srgbClr val="121214"/>
+          </a:solidFill>
+          <a:ln w="12700">
+            <a:solidFill>
+              <a:srgbClr val="26262B"/>
+            </a:solidFill>
+          </a:ln>
+          <a:effectLst/>
+        </p:spPr>
+        <p:style>
+          <a:lnRef idx="1">
+            <a:schemeClr val="accent1"/>
+          </a:lnRef>
+          <a:fillRef idx="3">
+            <a:schemeClr val="accent1"/>
+          </a:fillRef>
+          <a:effectRef idx="2">
+            <a:schemeClr val="accent1"/>
+          </a:effectRef>
+          <a:fontRef idx="minor">
+            <a:schemeClr val="lt1"/>
+          </a:fontRef>
+        </p:style>
+        <p:txBody>
+          <a:bodyPr rtlCol="0" anchor="ctr"/>
+          <a:lstStyle/>
+          <a:p>
+            <a:pPr algn="ctr"/>
+          </a:p>
+        </p:txBody>
+      </p:sp>
+      <p:sp>
+        <p:nvSpPr>
+          <p:cNvPr id="6" name="TextBox 5"/>
+          <p:cNvSpPr txBox="1"/>
+          <p:nvPr/>
+        </p:nvSpPr>
+        <p:spPr>
+          <a:xfrm>
+            <a:off x="960120" y="2286000"/>
+            <a:ext cx="4709160" cy="365760"/>
+          </a:xfrm>
+          <a:prstGeom prst="rect">
+            <a:avLst/>
+          </a:prstGeom>
+          <a:noFill/>
+        </p:spPr>
+        <p:txBody>
+          <a:bodyPr wrap="square" lIns="0" rIns="0" tIns="0" bIns="0" anchor="t">
+            <a:spAutoFit/>
+          </a:bodyPr>
+          <a:lstStyle/>
+          <a:p>
+            <a:pPr algn="l">
+              <a:lnSpc>
+                <a:spcPct val="125000"/>
+              </a:lnSpc>
+            </a:pPr>
+            <a:r>
+              <a:rPr sz="1500" b="1" i="0">
                 <a:solidFill>
                   <a:srgbClr val="F5F5F4"/>
                 </a:solidFill>
-                <a:latin typeface="Fraunces"/>
-              </a:rPr>
-              <a:t>With it, you can have both.</a:t>
-            </a:r>
-          </a:p>
-        </p:txBody>
-      </p:sp>
-      <p:sp>
-        <p:nvSpPr>
-          <p:cNvPr id="5" name="TextBox 4"/>
-          <p:cNvSpPr txBox="1"/>
-          <p:nvPr/>
-        </p:nvSpPr>
-        <p:spPr>
-          <a:xfrm>
-            <a:off x="685800" y="2423160"/>
-            <a:ext cx="3200400" cy="256032"/>
+                <a:latin typeface="Inter"/>
+              </a:rPr>
+              <a:t>The employer publishes</a:t>
+            </a:r>
+          </a:p>
+        </p:txBody>
+      </p:sp>
+      <p:sp>
+        <p:nvSpPr>
+          <p:cNvPr id="7" name="TextBox 6"/>
+          <p:cNvSpPr txBox="1"/>
+          <p:nvPr/>
+        </p:nvSpPr>
+        <p:spPr>
+          <a:xfrm>
+            <a:off x="960120" y="2788920"/>
+            <a:ext cx="4709160" cy="640080"/>
+          </a:xfrm>
+          <a:prstGeom prst="rect">
+            <a:avLst/>
+          </a:prstGeom>
+          <a:noFill/>
+        </p:spPr>
+        <p:txBody>
+          <a:bodyPr wrap="square" lIns="0" rIns="0" tIns="0" bIns="0" anchor="t">
+            <a:spAutoFit/>
+          </a:bodyPr>
+          <a:lstStyle/>
+          <a:p>
+            <a:pPr algn="l">
+              <a:lnSpc>
+                <a:spcPct val="145000"/>
+              </a:lnSpc>
+            </a:pPr>
+            <a:r>
+              <a:rPr sz="1250" b="0" i="0">
+                <a:solidFill>
+                  <a:srgbClr val="A1A1AA"/>
+                </a:solidFill>
+                <a:latin typeface="Inter"/>
+              </a:rPr>
+              <a:t>a report plus a fingerprint taken over the exact bucket counts it was built from.</a:t>
+            </a:r>
+          </a:p>
+        </p:txBody>
+      </p:sp>
+      <p:sp>
+        <p:nvSpPr>
+          <p:cNvPr id="8" name="Rounded Rectangle 7"/>
+          <p:cNvSpPr/>
+          <p:nvPr/>
+        </p:nvSpPr>
+        <p:spPr>
+          <a:xfrm>
+            <a:off x="6492240" y="2011680"/>
+            <a:ext cx="5257800" cy="1463040"/>
+          </a:xfrm>
+          <a:prstGeom prst="roundRect">
+            <a:avLst>
+              <a:gd name="adj" fmla="val 6000"/>
+            </a:avLst>
+          </a:prstGeom>
+          <a:solidFill>
+            <a:srgbClr val="121214"/>
+          </a:solidFill>
+          <a:ln w="12700">
+            <a:solidFill>
+              <a:srgbClr val="26262B"/>
+            </a:solidFill>
+          </a:ln>
+          <a:effectLst/>
+        </p:spPr>
+        <p:style>
+          <a:lnRef idx="1">
+            <a:schemeClr val="accent1"/>
+          </a:lnRef>
+          <a:fillRef idx="3">
+            <a:schemeClr val="accent1"/>
+          </a:fillRef>
+          <a:effectRef idx="2">
+            <a:schemeClr val="accent1"/>
+          </a:effectRef>
+          <a:fontRef idx="minor">
+            <a:schemeClr val="lt1"/>
+          </a:fontRef>
+        </p:style>
+        <p:txBody>
+          <a:bodyPr rtlCol="0" anchor="ctr"/>
+          <a:lstStyle/>
+          <a:p>
+            <a:pPr algn="ctr"/>
+          </a:p>
+        </p:txBody>
+      </p:sp>
+      <p:sp>
+        <p:nvSpPr>
+          <p:cNvPr id="9" name="TextBox 8"/>
+          <p:cNvSpPr txBox="1"/>
+          <p:nvPr/>
+        </p:nvSpPr>
+        <p:spPr>
+          <a:xfrm>
+            <a:off x="6766560" y="2286000"/>
+            <a:ext cx="4709160" cy="365760"/>
           </a:xfrm>
           <a:prstGeom prst="rect">
             <a:avLst/>
@@ -9579,143 +10494,395 @@
               </a:lnSpc>
             </a:pPr>
             <a:r>
-              <a:rPr sz="1100" b="1" i="0">
+              <a:rPr sz="1500" b="1" i="0">
+                <a:solidFill>
+                  <a:srgbClr val="F5F5F4"/>
+                </a:solidFill>
+                <a:latin typeface="Inter"/>
+              </a:rPr>
+              <a:t>Anyone pastes that fingerprint</a:t>
+            </a:r>
+          </a:p>
+        </p:txBody>
+      </p:sp>
+      <p:sp>
+        <p:nvSpPr>
+          <p:cNvPr id="10" name="TextBox 9"/>
+          <p:cNvSpPr txBox="1"/>
+          <p:nvPr/>
+        </p:nvSpPr>
+        <p:spPr>
+          <a:xfrm>
+            <a:off x="6766560" y="2788920"/>
+            <a:ext cx="4709160" cy="640080"/>
+          </a:xfrm>
+          <a:prstGeom prst="rect">
+            <a:avLst/>
+          </a:prstGeom>
+          <a:noFill/>
+        </p:spPr>
+        <p:txBody>
+          <a:bodyPr wrap="square" lIns="0" rIns="0" tIns="0" bIns="0" anchor="t">
+            <a:spAutoFit/>
+          </a:bodyPr>
+          <a:lstStyle/>
+          <a:p>
+            <a:pPr algn="l">
+              <a:lnSpc>
+                <a:spcPct val="145000"/>
+              </a:lnSpc>
+            </a:pPr>
+            <a:r>
+              <a:rPr sz="1250" b="0" i="0">
+                <a:solidFill>
+                  <a:srgbClr val="A1A1AA"/>
+                </a:solidFill>
+                <a:latin typeface="Inter"/>
+              </a:rPr>
+              <a:t>into the verify page. It re-reads chain state and answers match or mismatch.</a:t>
+            </a:r>
+          </a:p>
+        </p:txBody>
+      </p:sp>
+      <p:pic>
+        <p:nvPicPr>
+          <p:cNvPr id="11" name="Picture 10" descr="03-verify.png"/>
+          <p:cNvPicPr>
+            <a:picLocks noChangeAspect="1"/>
+          </p:cNvPicPr>
+          <p:nvPr/>
+        </p:nvPicPr>
+        <p:blipFill>
+          <a:blip r:embed="rId2"/>
+          <a:stretch>
+            <a:fillRect/>
+          </a:stretch>
+        </p:blipFill>
+        <p:spPr>
+          <a:xfrm>
+            <a:off x="1889055" y="3794760"/>
+            <a:ext cx="3171329" cy="2286000"/>
+          </a:xfrm>
+          <a:prstGeom prst="rect">
+            <a:avLst/>
+          </a:prstGeom>
+        </p:spPr>
+      </p:pic>
+      <p:sp>
+        <p:nvSpPr>
+          <p:cNvPr id="12" name="Rectangle 11"/>
+          <p:cNvSpPr/>
+          <p:nvPr/>
+        </p:nvSpPr>
+        <p:spPr>
+          <a:xfrm>
+            <a:off x="1889055" y="3794760"/>
+            <a:ext cx="3171329" cy="2286000"/>
+          </a:xfrm>
+          <a:prstGeom prst="rect">
+            <a:avLst/>
+          </a:prstGeom>
+          <a:noFill/>
+          <a:ln w="12700">
+            <a:solidFill>
+              <a:srgbClr val="26262B"/>
+            </a:solidFill>
+          </a:ln>
+          <a:effectLst/>
+        </p:spPr>
+        <p:style>
+          <a:lnRef idx="1">
+            <a:schemeClr val="accent1"/>
+          </a:lnRef>
+          <a:fillRef idx="3">
+            <a:schemeClr val="accent1"/>
+          </a:fillRef>
+          <a:effectRef idx="2">
+            <a:schemeClr val="accent1"/>
+          </a:effectRef>
+          <a:fontRef idx="minor">
+            <a:schemeClr val="lt1"/>
+          </a:fontRef>
+        </p:style>
+        <p:txBody>
+          <a:bodyPr rtlCol="0" anchor="ctr"/>
+          <a:lstStyle/>
+          <a:p>
+            <a:pPr algn="ctr"/>
+          </a:p>
+        </p:txBody>
+      </p:sp>
+      <p:sp>
+        <p:nvSpPr>
+          <p:cNvPr id="13" name="TextBox 12"/>
+          <p:cNvSpPr txBox="1"/>
+          <p:nvPr/>
+        </p:nvSpPr>
+        <p:spPr>
+          <a:xfrm>
+            <a:off x="1889055" y="6153912"/>
+            <a:ext cx="3171329" cy="228600"/>
+          </a:xfrm>
+          <a:prstGeom prst="rect">
+            <a:avLst/>
+          </a:prstGeom>
+          <a:noFill/>
+        </p:spPr>
+        <p:txBody>
+          <a:bodyPr wrap="square" lIns="0" rIns="0" tIns="0" bIns="0" anchor="t">
+            <a:spAutoFit/>
+          </a:bodyPr>
+          <a:lstStyle/>
+          <a:p>
+            <a:pPr algn="l">
+              <a:lnSpc>
+                <a:spcPct val="125000"/>
+              </a:lnSpc>
+            </a:pPr>
+            <a:r>
+              <a:rPr sz="950" b="0" i="0">
                 <a:solidFill>
                   <a:srgbClr val="71717A"/>
                 </a:solidFill>
                 <a:latin typeface="Inter"/>
               </a:rPr>
-              <a:t>Approach</a:t>
-            </a:r>
-          </a:p>
-        </p:txBody>
-      </p:sp>
-      <p:sp>
-        <p:nvSpPr>
-          <p:cNvPr id="6" name="TextBox 5"/>
-          <p:cNvSpPr txBox="1"/>
-          <p:nvPr/>
-        </p:nvSpPr>
-        <p:spPr>
-          <a:xfrm>
-            <a:off x="3886200" y="2423160"/>
-            <a:ext cx="2286000" cy="256032"/>
-          </a:xfrm>
-          <a:prstGeom prst="rect">
-            <a:avLst/>
-          </a:prstGeom>
-          <a:noFill/>
-        </p:spPr>
-        <p:txBody>
-          <a:bodyPr wrap="square" lIns="0" rIns="0" tIns="0" bIns="0" anchor="t">
-            <a:spAutoFit/>
-          </a:bodyPr>
-          <a:lstStyle/>
-          <a:p>
-            <a:pPr algn="l">
-              <a:lnSpc>
-                <a:spcPct val="125000"/>
-              </a:lnSpc>
-            </a:pPr>
-            <a:r>
-              <a:rPr sz="1100" b="1" i="0">
-                <a:solidFill>
-                  <a:srgbClr val="71717A"/>
-                </a:solidFill>
-                <a:latin typeface="Inter"/>
-              </a:rPr>
-              <a:t>Proves the data is real</a:t>
-            </a:r>
-          </a:p>
-        </p:txBody>
-      </p:sp>
-      <p:sp>
-        <p:nvSpPr>
-          <p:cNvPr id="7" name="TextBox 6"/>
-          <p:cNvSpPr txBox="1"/>
-          <p:nvPr/>
-        </p:nvSpPr>
-        <p:spPr>
-          <a:xfrm>
-            <a:off x="6172200" y="2423160"/>
-            <a:ext cx="2103120" cy="256032"/>
-          </a:xfrm>
-          <a:prstGeom prst="rect">
-            <a:avLst/>
-          </a:prstGeom>
-          <a:noFill/>
-        </p:spPr>
-        <p:txBody>
-          <a:bodyPr wrap="square" lIns="0" rIns="0" tIns="0" bIns="0" anchor="t">
-            <a:spAutoFit/>
-          </a:bodyPr>
-          <a:lstStyle/>
-          <a:p>
-            <a:pPr algn="l">
-              <a:lnSpc>
-                <a:spcPct val="125000"/>
-              </a:lnSpc>
-            </a:pPr>
-            <a:r>
-              <a:rPr sz="1100" b="1" i="0">
-                <a:solidFill>
-                  <a:srgbClr val="71717A"/>
-                </a:solidFill>
-                <a:latin typeface="Inter"/>
-              </a:rPr>
-              <a:t>Protects individuals</a:t>
-            </a:r>
-          </a:p>
-        </p:txBody>
-      </p:sp>
-      <p:sp>
-        <p:nvSpPr>
-          <p:cNvPr id="8" name="TextBox 7"/>
-          <p:cNvSpPr txBox="1"/>
-          <p:nvPr/>
-        </p:nvSpPr>
-        <p:spPr>
-          <a:xfrm>
-            <a:off x="8275320" y="2423160"/>
-            <a:ext cx="3227832" cy="256032"/>
-          </a:xfrm>
-          <a:prstGeom prst="rect">
-            <a:avLst/>
-          </a:prstGeom>
-          <a:noFill/>
-        </p:spPr>
-        <p:txBody>
-          <a:bodyPr wrap="square" lIns="0" rIns="0" tIns="0" bIns="0" anchor="t">
-            <a:spAutoFit/>
-          </a:bodyPr>
-          <a:lstStyle/>
-          <a:p>
-            <a:pPr algn="l">
-              <a:lnSpc>
-                <a:spcPct val="125000"/>
-              </a:lnSpc>
-            </a:pPr>
-            <a:r>
-              <a:rPr sz="1100" b="1" i="0">
-                <a:solidFill>
-                  <a:srgbClr val="71717A"/>
-                </a:solidFill>
-                <a:latin typeface="Inter"/>
-              </a:rPr>
-              <a:t>Note</a:t>
-            </a:r>
-          </a:p>
-        </p:txBody>
-      </p:sp>
-      <p:sp>
-        <p:nvSpPr>
-          <p:cNvPr id="9" name="Rectangle 8"/>
+              <a:t>Verification needs no wallet</a:t>
+            </a:r>
+          </a:p>
+        </p:txBody>
+      </p:sp>
+      <p:sp>
+        <p:nvSpPr>
+          <p:cNvPr id="14" name="TextBox 13"/>
+          <p:cNvSpPr txBox="1"/>
+          <p:nvPr/>
+        </p:nvSpPr>
+        <p:spPr>
+          <a:xfrm>
+            <a:off x="6583680" y="3886200"/>
+            <a:ext cx="4922215" cy="365760"/>
+          </a:xfrm>
+          <a:prstGeom prst="rect">
+            <a:avLst/>
+          </a:prstGeom>
+          <a:noFill/>
+        </p:spPr>
+        <p:txBody>
+          <a:bodyPr wrap="square" lIns="0" rIns="0" tIns="0" bIns="0" anchor="t">
+            <a:spAutoFit/>
+          </a:bodyPr>
+          <a:lstStyle/>
+          <a:p>
+            <a:pPr algn="l">
+              <a:lnSpc>
+                <a:spcPct val="145000"/>
+              </a:lnSpc>
+            </a:pPr>
+            <a:r>
+              <a:rPr sz="1200" b="0" i="0">
+                <a:solidFill>
+                  <a:srgbClr val="FACC15"/>
+                </a:solidFill>
+                <a:latin typeface="Inter"/>
+              </a:rPr>
+              <a:t>What this does and does not prove — stated on the page itself.</a:t>
+            </a:r>
+          </a:p>
+        </p:txBody>
+      </p:sp>
+      <p:sp>
+        <p:nvSpPr>
+          <p:cNvPr id="15" name="Rectangle 14"/>
           <p:cNvSpPr/>
           <p:nvPr/>
         </p:nvSpPr>
         <p:spPr>
           <a:xfrm>
-            <a:off x="685800" y="2734056"/>
+            <a:off x="6583680" y="4407408"/>
+            <a:ext cx="68580" cy="68580"/>
+          </a:xfrm>
+          <a:prstGeom prst="rect">
+            <a:avLst/>
+          </a:prstGeom>
+          <a:solidFill>
+            <a:srgbClr val="FACC15"/>
+          </a:solidFill>
+          <a:ln>
+            <a:noFill/>
+          </a:ln>
+          <a:effectLst/>
+        </p:spPr>
+        <p:style>
+          <a:lnRef idx="1">
+            <a:schemeClr val="accent1"/>
+          </a:lnRef>
+          <a:fillRef idx="3">
+            <a:schemeClr val="accent1"/>
+          </a:fillRef>
+          <a:effectRef idx="2">
+            <a:schemeClr val="accent1"/>
+          </a:effectRef>
+          <a:fontRef idx="minor">
+            <a:schemeClr val="lt1"/>
+          </a:fontRef>
+        </p:style>
+        <p:txBody>
+          <a:bodyPr rtlCol="0" anchor="ctr"/>
+          <a:lstStyle/>
+          <a:p>
+            <a:pPr algn="ctr"/>
+          </a:p>
+        </p:txBody>
+      </p:sp>
+      <p:sp>
+        <p:nvSpPr>
+          <p:cNvPr id="16" name="TextBox 15"/>
+          <p:cNvSpPr txBox="1"/>
+          <p:nvPr/>
+        </p:nvSpPr>
+        <p:spPr>
+          <a:xfrm>
+            <a:off x="6784848" y="4315968"/>
+            <a:ext cx="4721047" cy="457200"/>
+          </a:xfrm>
+          <a:prstGeom prst="rect">
+            <a:avLst/>
+          </a:prstGeom>
+          <a:noFill/>
+        </p:spPr>
+        <p:txBody>
+          <a:bodyPr wrap="square" lIns="0" rIns="0" tIns="0" bIns="0">
+            <a:spAutoFit/>
+          </a:bodyPr>
+          <a:lstStyle/>
+          <a:p>
+            <a:pPr>
+              <a:lnSpc>
+                <a:spcPct val="135000"/>
+              </a:lnSpc>
+            </a:pPr>
+            <a:r>
+              <a:rPr sz="1150" b="1">
+                <a:solidFill>
+                  <a:srgbClr val="F5F5F4"/>
+                </a:solidFill>
+                <a:latin typeface="Inter"/>
+              </a:rPr>
+              <a:t>Proves </a:t>
+            </a:r>
+            <a:r>
+              <a:rPr sz="1150">
+                <a:solidFill>
+                  <a:srgbClr val="A1A1AA"/>
+                </a:solidFill>
+                <a:latin typeface="Inter"/>
+              </a:rPr>
+              <a:t>the figures were derived from the counts on chain, and that recomputing them yields the same numbers.</a:t>
+            </a:r>
+          </a:p>
+        </p:txBody>
+      </p:sp>
+      <p:sp>
+        <p:nvSpPr>
+          <p:cNvPr id="17" name="Rectangle 16"/>
+          <p:cNvSpPr/>
+          <p:nvPr/>
+        </p:nvSpPr>
+        <p:spPr>
+          <a:xfrm>
+            <a:off x="6583680" y="5102352"/>
+            <a:ext cx="68580" cy="68580"/>
+          </a:xfrm>
+          <a:prstGeom prst="rect">
+            <a:avLst/>
+          </a:prstGeom>
+          <a:solidFill>
+            <a:srgbClr val="FACC15"/>
+          </a:solidFill>
+          <a:ln>
+            <a:noFill/>
+          </a:ln>
+          <a:effectLst/>
+        </p:spPr>
+        <p:style>
+          <a:lnRef idx="1">
+            <a:schemeClr val="accent1"/>
+          </a:lnRef>
+          <a:fillRef idx="3">
+            <a:schemeClr val="accent1"/>
+          </a:fillRef>
+          <a:effectRef idx="2">
+            <a:schemeClr val="accent1"/>
+          </a:effectRef>
+          <a:fontRef idx="minor">
+            <a:schemeClr val="lt1"/>
+          </a:fontRef>
+        </p:style>
+        <p:txBody>
+          <a:bodyPr rtlCol="0" anchor="ctr"/>
+          <a:lstStyle/>
+          <a:p>
+            <a:pPr algn="ctr"/>
+          </a:p>
+        </p:txBody>
+      </p:sp>
+      <p:sp>
+        <p:nvSpPr>
+          <p:cNvPr id="18" name="TextBox 17"/>
+          <p:cNvSpPr txBox="1"/>
+          <p:nvPr/>
+        </p:nvSpPr>
+        <p:spPr>
+          <a:xfrm>
+            <a:off x="6784848" y="5010912"/>
+            <a:ext cx="4721047" cy="457200"/>
+          </a:xfrm>
+          <a:prstGeom prst="rect">
+            <a:avLst/>
+          </a:prstGeom>
+          <a:noFill/>
+        </p:spPr>
+        <p:txBody>
+          <a:bodyPr wrap="square" lIns="0" rIns="0" tIns="0" bIns="0">
+            <a:spAutoFit/>
+          </a:bodyPr>
+          <a:lstStyle/>
+          <a:p>
+            <a:pPr>
+              <a:lnSpc>
+                <a:spcPct val="135000"/>
+              </a:lnSpc>
+            </a:pPr>
+            <a:r>
+              <a:rPr sz="1150" b="1">
+                <a:solidFill>
+                  <a:srgbClr val="F5F5F4"/>
+                </a:solidFill>
+                <a:latin typeface="Inter"/>
+              </a:rPr>
+              <a:t>Does not prove </a:t>
+            </a:r>
+            <a:r>
+              <a:rPr sz="1150">
+                <a:solidFill>
+                  <a:srgbClr val="A1A1AA"/>
+                </a:solidFill>
+                <a:latin typeface="Inter"/>
+              </a:rPr>
+              <a:t>that anyone was paid what they said, or that everyone participated. Participation is voluntary, so the report states its own coverage.</a:t>
+            </a:r>
+          </a:p>
+        </p:txBody>
+      </p:sp>
+      <p:sp>
+        <p:nvSpPr>
+          <p:cNvPr id="19" name="Rectangle 18"/>
+          <p:cNvSpPr/>
+          <p:nvPr/>
+        </p:nvSpPr>
+        <p:spPr>
+          <a:xfrm>
+            <a:off x="685800" y="6291072"/>
             <a:ext cx="10820095" cy="10972"/>
           </a:xfrm>
           <a:prstGeom prst="rect">
@@ -9753,1246 +10920,7 @@
       </p:sp>
       <p:sp>
         <p:nvSpPr>
-          <p:cNvPr id="10" name="TextBox 9"/>
-          <p:cNvSpPr txBox="1"/>
-          <p:nvPr/>
-        </p:nvSpPr>
-        <p:spPr>
-          <a:xfrm>
-            <a:off x="685800" y="2816352"/>
-            <a:ext cx="3200400" cy="420624"/>
-          </a:xfrm>
-          <a:prstGeom prst="rect">
-            <a:avLst/>
-          </a:prstGeom>
-          <a:noFill/>
-        </p:spPr>
-        <p:txBody>
-          <a:bodyPr wrap="square" lIns="0" rIns="0" tIns="0" bIns="0" anchor="t">
-            <a:spAutoFit/>
-          </a:bodyPr>
-          <a:lstStyle/>
-          <a:p>
-            <a:pPr algn="l">
-              <a:lnSpc>
-                <a:spcPct val="100000"/>
-              </a:lnSpc>
-            </a:pPr>
-            <a:r>
-              <a:rPr sz="1200" b="0" i="0">
-                <a:solidFill>
-                  <a:srgbClr val="F5F5F4"/>
-                </a:solidFill>
-                <a:latin typeface="Inter"/>
-              </a:rPr>
-              <a:t>Payroll spreadsheet</a:t>
-            </a:r>
-          </a:p>
-        </p:txBody>
-      </p:sp>
-      <p:sp>
-        <p:nvSpPr>
-          <p:cNvPr id="11" name="TextBox 10"/>
-          <p:cNvSpPr txBox="1"/>
-          <p:nvPr/>
-        </p:nvSpPr>
-        <p:spPr>
-          <a:xfrm>
-            <a:off x="3886200" y="2816352"/>
-            <a:ext cx="2286000" cy="420624"/>
-          </a:xfrm>
-          <a:prstGeom prst="rect">
-            <a:avLst/>
-          </a:prstGeom>
-          <a:noFill/>
-        </p:spPr>
-        <p:txBody>
-          <a:bodyPr wrap="square" lIns="0" rIns="0" tIns="0" bIns="0" anchor="t">
-            <a:spAutoFit/>
-          </a:bodyPr>
-          <a:lstStyle/>
-          <a:p>
-            <a:pPr algn="l">
-              <a:lnSpc>
-                <a:spcPct val="100000"/>
-              </a:lnSpc>
-            </a:pPr>
-            <a:r>
-              <a:rPr sz="1200" b="1" i="0">
-                <a:solidFill>
-                  <a:srgbClr val="EF4444"/>
-                </a:solidFill>
-                <a:latin typeface="Inter"/>
-              </a:rPr>
-              <a:t>no</a:t>
-            </a:r>
-          </a:p>
-        </p:txBody>
-      </p:sp>
-      <p:sp>
-        <p:nvSpPr>
-          <p:cNvPr id="12" name="TextBox 11"/>
-          <p:cNvSpPr txBox="1"/>
-          <p:nvPr/>
-        </p:nvSpPr>
-        <p:spPr>
-          <a:xfrm>
-            <a:off x="6172200" y="2816352"/>
-            <a:ext cx="2103120" cy="420624"/>
-          </a:xfrm>
-          <a:prstGeom prst="rect">
-            <a:avLst/>
-          </a:prstGeom>
-          <a:noFill/>
-        </p:spPr>
-        <p:txBody>
-          <a:bodyPr wrap="square" lIns="0" rIns="0" tIns="0" bIns="0" anchor="t">
-            <a:spAutoFit/>
-          </a:bodyPr>
-          <a:lstStyle/>
-          <a:p>
-            <a:pPr algn="l">
-              <a:lnSpc>
-                <a:spcPct val="100000"/>
-              </a:lnSpc>
-            </a:pPr>
-            <a:r>
-              <a:rPr sz="1200" b="1" i="0">
-                <a:solidFill>
-                  <a:srgbClr val="EF4444"/>
-                </a:solidFill>
-                <a:latin typeface="Inter"/>
-              </a:rPr>
-              <a:t>no</a:t>
-            </a:r>
-          </a:p>
-        </p:txBody>
-      </p:sp>
-      <p:sp>
-        <p:nvSpPr>
-          <p:cNvPr id="13" name="TextBox 12"/>
-          <p:cNvSpPr txBox="1"/>
-          <p:nvPr/>
-        </p:nvSpPr>
-        <p:spPr>
-          <a:xfrm>
-            <a:off x="8275320" y="2816352"/>
-            <a:ext cx="3227832" cy="420624"/>
-          </a:xfrm>
-          <a:prstGeom prst="rect">
-            <a:avLst/>
-          </a:prstGeom>
-          <a:noFill/>
-        </p:spPr>
-        <p:txBody>
-          <a:bodyPr wrap="square" lIns="0" rIns="0" tIns="0" bIns="0" anchor="t">
-            <a:spAutoFit/>
-          </a:bodyPr>
-          <a:lstStyle/>
-          <a:p>
-            <a:pPr algn="l">
-              <a:lnSpc>
-                <a:spcPct val="100000"/>
-              </a:lnSpc>
-            </a:pPr>
-            <a:r>
-              <a:rPr sz="1200" b="1" i="0">
-                <a:solidFill>
-                  <a:srgbClr val="A1A1AA"/>
-                </a:solidFill>
-                <a:latin typeface="Inter"/>
-              </a:rPr>
-              <a:t>— it is the raw records</a:t>
-            </a:r>
-          </a:p>
-        </p:txBody>
-      </p:sp>
-      <p:sp>
-        <p:nvSpPr>
-          <p:cNvPr id="14" name="Rectangle 13"/>
-          <p:cNvSpPr/>
-          <p:nvPr/>
-        </p:nvSpPr>
-        <p:spPr>
-          <a:xfrm>
-            <a:off x="685800" y="3200400"/>
-            <a:ext cx="10820095" cy="10972"/>
-          </a:xfrm>
-          <a:prstGeom prst="rect">
-            <a:avLst/>
-          </a:prstGeom>
-          <a:solidFill>
-            <a:srgbClr val="26262B"/>
-          </a:solidFill>
-          <a:ln>
-            <a:noFill/>
-          </a:ln>
-          <a:effectLst/>
-        </p:spPr>
-        <p:style>
-          <a:lnRef idx="1">
-            <a:schemeClr val="accent1"/>
-          </a:lnRef>
-          <a:fillRef idx="3">
-            <a:schemeClr val="accent1"/>
-          </a:fillRef>
-          <a:effectRef idx="2">
-            <a:schemeClr val="accent1"/>
-          </a:effectRef>
-          <a:fontRef idx="minor">
-            <a:schemeClr val="lt1"/>
-          </a:fontRef>
-        </p:style>
-        <p:txBody>
-          <a:bodyPr rtlCol="0" anchor="ctr"/>
-          <a:lstStyle/>
-          <a:p>
-            <a:pPr algn="ctr"/>
-          </a:p>
-        </p:txBody>
-      </p:sp>
-      <p:sp>
-        <p:nvSpPr>
-          <p:cNvPr id="15" name="TextBox 14"/>
-          <p:cNvSpPr txBox="1"/>
-          <p:nvPr/>
-        </p:nvSpPr>
-        <p:spPr>
-          <a:xfrm>
-            <a:off x="685800" y="3282696"/>
-            <a:ext cx="3200400" cy="420624"/>
-          </a:xfrm>
-          <a:prstGeom prst="rect">
-            <a:avLst/>
-          </a:prstGeom>
-          <a:noFill/>
-        </p:spPr>
-        <p:txBody>
-          <a:bodyPr wrap="square" lIns="0" rIns="0" tIns="0" bIns="0" anchor="t">
-            <a:spAutoFit/>
-          </a:bodyPr>
-          <a:lstStyle/>
-          <a:p>
-            <a:pPr algn="l">
-              <a:lnSpc>
-                <a:spcPct val="100000"/>
-              </a:lnSpc>
-            </a:pPr>
-            <a:r>
-              <a:rPr sz="1200" b="0" i="0">
-                <a:solidFill>
-                  <a:srgbClr val="F5F5F4"/>
-                </a:solidFill>
-                <a:latin typeface="Inter"/>
-              </a:rPr>
-              <a:t>HR survey</a:t>
-            </a:r>
-          </a:p>
-        </p:txBody>
-      </p:sp>
-      <p:sp>
-        <p:nvSpPr>
-          <p:cNvPr id="16" name="TextBox 15"/>
-          <p:cNvSpPr txBox="1"/>
-          <p:nvPr/>
-        </p:nvSpPr>
-        <p:spPr>
-          <a:xfrm>
-            <a:off x="3886200" y="3282696"/>
-            <a:ext cx="2286000" cy="420624"/>
-          </a:xfrm>
-          <a:prstGeom prst="rect">
-            <a:avLst/>
-          </a:prstGeom>
-          <a:noFill/>
-        </p:spPr>
-        <p:txBody>
-          <a:bodyPr wrap="square" lIns="0" rIns="0" tIns="0" bIns="0" anchor="t">
-            <a:spAutoFit/>
-          </a:bodyPr>
-          <a:lstStyle/>
-          <a:p>
-            <a:pPr algn="l">
-              <a:lnSpc>
-                <a:spcPct val="100000"/>
-              </a:lnSpc>
-            </a:pPr>
-            <a:r>
-              <a:rPr sz="1200" b="1" i="0">
-                <a:solidFill>
-                  <a:srgbClr val="EF4444"/>
-                </a:solidFill>
-                <a:latin typeface="Inter"/>
-              </a:rPr>
-              <a:t>no</a:t>
-            </a:r>
-          </a:p>
-        </p:txBody>
-      </p:sp>
-      <p:sp>
-        <p:nvSpPr>
-          <p:cNvPr id="17" name="TextBox 16"/>
-          <p:cNvSpPr txBox="1"/>
-          <p:nvPr/>
-        </p:nvSpPr>
-        <p:spPr>
-          <a:xfrm>
-            <a:off x="6172200" y="3282696"/>
-            <a:ext cx="2103120" cy="420624"/>
-          </a:xfrm>
-          <a:prstGeom prst="rect">
-            <a:avLst/>
-          </a:prstGeom>
-          <a:noFill/>
-        </p:spPr>
-        <p:txBody>
-          <a:bodyPr wrap="square" lIns="0" rIns="0" tIns="0" bIns="0" anchor="t">
-            <a:spAutoFit/>
-          </a:bodyPr>
-          <a:lstStyle/>
-          <a:p>
-            <a:pPr algn="l">
-              <a:lnSpc>
-                <a:spcPct val="100000"/>
-              </a:lnSpc>
-            </a:pPr>
-            <a:r>
-              <a:rPr sz="1200" b="1" i="0">
-                <a:solidFill>
-                  <a:srgbClr val="EF4444"/>
-                </a:solidFill>
-                <a:latin typeface="Inter"/>
-              </a:rPr>
-              <a:t>no</a:t>
-            </a:r>
-          </a:p>
-        </p:txBody>
-      </p:sp>
-      <p:sp>
-        <p:nvSpPr>
-          <p:cNvPr id="18" name="TextBox 17"/>
-          <p:cNvSpPr txBox="1"/>
-          <p:nvPr/>
-        </p:nvSpPr>
-        <p:spPr>
-          <a:xfrm>
-            <a:off x="8275320" y="3282696"/>
-            <a:ext cx="3227832" cy="420624"/>
-          </a:xfrm>
-          <a:prstGeom prst="rect">
-            <a:avLst/>
-          </a:prstGeom>
-          <a:noFill/>
-        </p:spPr>
-        <p:txBody>
-          <a:bodyPr wrap="square" lIns="0" rIns="0" tIns="0" bIns="0" anchor="t">
-            <a:spAutoFit/>
-          </a:bodyPr>
-          <a:lstStyle/>
-          <a:p>
-            <a:pPr algn="l">
-              <a:lnSpc>
-                <a:spcPct val="100000"/>
-              </a:lnSpc>
-            </a:pPr>
-            <a:r>
-              <a:rPr sz="1200" b="1" i="0">
-                <a:solidFill>
-                  <a:srgbClr val="A1A1AA"/>
-                </a:solidFill>
-                <a:latin typeface="Inter"/>
-              </a:rPr>
-              <a:t>gameable, uneven</a:t>
-            </a:r>
-          </a:p>
-        </p:txBody>
-      </p:sp>
-      <p:sp>
-        <p:nvSpPr>
-          <p:cNvPr id="19" name="Rectangle 18"/>
-          <p:cNvSpPr/>
-          <p:nvPr/>
-        </p:nvSpPr>
-        <p:spPr>
-          <a:xfrm>
-            <a:off x="685800" y="3666744"/>
-            <a:ext cx="10820095" cy="10972"/>
-          </a:xfrm>
-          <a:prstGeom prst="rect">
-            <a:avLst/>
-          </a:prstGeom>
-          <a:solidFill>
-            <a:srgbClr val="26262B"/>
-          </a:solidFill>
-          <a:ln>
-            <a:noFill/>
-          </a:ln>
-          <a:effectLst/>
-        </p:spPr>
-        <p:style>
-          <a:lnRef idx="1">
-            <a:schemeClr val="accent1"/>
-          </a:lnRef>
-          <a:fillRef idx="3">
-            <a:schemeClr val="accent1"/>
-          </a:fillRef>
-          <a:effectRef idx="2">
-            <a:schemeClr val="accent1"/>
-          </a:effectRef>
-          <a:fontRef idx="minor">
-            <a:schemeClr val="lt1"/>
-          </a:fontRef>
-        </p:style>
-        <p:txBody>
-          <a:bodyPr rtlCol="0" anchor="ctr"/>
-          <a:lstStyle/>
-          <a:p>
-            <a:pPr algn="ctr"/>
-          </a:p>
-        </p:txBody>
-      </p:sp>
-      <p:sp>
-        <p:nvSpPr>
           <p:cNvPr id="20" name="TextBox 19"/>
-          <p:cNvSpPr txBox="1"/>
-          <p:nvPr/>
-        </p:nvSpPr>
-        <p:spPr>
-          <a:xfrm>
-            <a:off x="685800" y="3749040"/>
-            <a:ext cx="3200400" cy="420624"/>
-          </a:xfrm>
-          <a:prstGeom prst="rect">
-            <a:avLst/>
-          </a:prstGeom>
-          <a:noFill/>
-        </p:spPr>
-        <p:txBody>
-          <a:bodyPr wrap="square" lIns="0" rIns="0" tIns="0" bIns="0" anchor="t">
-            <a:spAutoFit/>
-          </a:bodyPr>
-          <a:lstStyle/>
-          <a:p>
-            <a:pPr algn="l">
-              <a:lnSpc>
-                <a:spcPct val="100000"/>
-              </a:lnSpc>
-            </a:pPr>
-            <a:r>
-              <a:rPr sz="1200" b="0" i="0">
-                <a:solidFill>
-                  <a:srgbClr val="F5F5F4"/>
-                </a:solidFill>
-                <a:latin typeface="Inter"/>
-              </a:rPr>
-              <a:t>“Anonymised” CSV export</a:t>
-            </a:r>
-          </a:p>
-        </p:txBody>
-      </p:sp>
-      <p:sp>
-        <p:nvSpPr>
-          <p:cNvPr id="21" name="TextBox 20"/>
-          <p:cNvSpPr txBox="1"/>
-          <p:nvPr/>
-        </p:nvSpPr>
-        <p:spPr>
-          <a:xfrm>
-            <a:off x="3886200" y="3749040"/>
-            <a:ext cx="2286000" cy="420624"/>
-          </a:xfrm>
-          <a:prstGeom prst="rect">
-            <a:avLst/>
-          </a:prstGeom>
-          <a:noFill/>
-        </p:spPr>
-        <p:txBody>
-          <a:bodyPr wrap="square" lIns="0" rIns="0" tIns="0" bIns="0" anchor="t">
-            <a:spAutoFit/>
-          </a:bodyPr>
-          <a:lstStyle/>
-          <a:p>
-            <a:pPr algn="l">
-              <a:lnSpc>
-                <a:spcPct val="100000"/>
-              </a:lnSpc>
-            </a:pPr>
-            <a:r>
-              <a:rPr sz="1200" b="1" i="0">
-                <a:solidFill>
-                  <a:srgbClr val="EF4444"/>
-                </a:solidFill>
-                <a:latin typeface="Inter"/>
-              </a:rPr>
-              <a:t>no</a:t>
-            </a:r>
-          </a:p>
-        </p:txBody>
-      </p:sp>
-      <p:sp>
-        <p:nvSpPr>
-          <p:cNvPr id="22" name="TextBox 21"/>
-          <p:cNvSpPr txBox="1"/>
-          <p:nvPr/>
-        </p:nvSpPr>
-        <p:spPr>
-          <a:xfrm>
-            <a:off x="6172200" y="3749040"/>
-            <a:ext cx="2103120" cy="420624"/>
-          </a:xfrm>
-          <a:prstGeom prst="rect">
-            <a:avLst/>
-          </a:prstGeom>
-          <a:noFill/>
-        </p:spPr>
-        <p:txBody>
-          <a:bodyPr wrap="square" lIns="0" rIns="0" tIns="0" bIns="0" anchor="t">
-            <a:spAutoFit/>
-          </a:bodyPr>
-          <a:lstStyle/>
-          <a:p>
-            <a:pPr algn="l">
-              <a:lnSpc>
-                <a:spcPct val="100000"/>
-              </a:lnSpc>
-            </a:pPr>
-            <a:r>
-              <a:rPr sz="1200" b="1" i="0">
-                <a:solidFill>
-                  <a:srgbClr val="EF4444"/>
-                </a:solidFill>
-                <a:latin typeface="Inter"/>
-              </a:rPr>
-              <a:t>no</a:t>
-            </a:r>
-          </a:p>
-        </p:txBody>
-      </p:sp>
-      <p:sp>
-        <p:nvSpPr>
-          <p:cNvPr id="23" name="TextBox 22"/>
-          <p:cNvSpPr txBox="1"/>
-          <p:nvPr/>
-        </p:nvSpPr>
-        <p:spPr>
-          <a:xfrm>
-            <a:off x="8275320" y="3749040"/>
-            <a:ext cx="3227832" cy="420624"/>
-          </a:xfrm>
-          <a:prstGeom prst="rect">
-            <a:avLst/>
-          </a:prstGeom>
-          <a:noFill/>
-        </p:spPr>
-        <p:txBody>
-          <a:bodyPr wrap="square" lIns="0" rIns="0" tIns="0" bIns="0" anchor="t">
-            <a:spAutoFit/>
-          </a:bodyPr>
-          <a:lstStyle/>
-          <a:p>
-            <a:pPr algn="l">
-              <a:lnSpc>
-                <a:spcPct val="100000"/>
-              </a:lnSpc>
-            </a:pPr>
-            <a:r>
-              <a:rPr sz="1200" b="1" i="0">
-                <a:solidFill>
-                  <a:srgbClr val="A1A1AA"/>
-                </a:solidFill>
-                <a:latin typeface="Inter"/>
-              </a:rPr>
-              <a:t>small cells re-identify</a:t>
-            </a:r>
-          </a:p>
-        </p:txBody>
-      </p:sp>
-      <p:sp>
-        <p:nvSpPr>
-          <p:cNvPr id="24" name="Rectangle 23"/>
-          <p:cNvSpPr/>
-          <p:nvPr/>
-        </p:nvSpPr>
-        <p:spPr>
-          <a:xfrm>
-            <a:off x="685800" y="4133088"/>
-            <a:ext cx="10820095" cy="10972"/>
-          </a:xfrm>
-          <a:prstGeom prst="rect">
-            <a:avLst/>
-          </a:prstGeom>
-          <a:solidFill>
-            <a:srgbClr val="26262B"/>
-          </a:solidFill>
-          <a:ln>
-            <a:noFill/>
-          </a:ln>
-          <a:effectLst/>
-        </p:spPr>
-        <p:style>
-          <a:lnRef idx="1">
-            <a:schemeClr val="accent1"/>
-          </a:lnRef>
-          <a:fillRef idx="3">
-            <a:schemeClr val="accent1"/>
-          </a:fillRef>
-          <a:effectRef idx="2">
-            <a:schemeClr val="accent1"/>
-          </a:effectRef>
-          <a:fontRef idx="minor">
-            <a:schemeClr val="lt1"/>
-          </a:fontRef>
-        </p:style>
-        <p:txBody>
-          <a:bodyPr rtlCol="0" anchor="ctr"/>
-          <a:lstStyle/>
-          <a:p>
-            <a:pPr algn="ctr"/>
-          </a:p>
-        </p:txBody>
-      </p:sp>
-      <p:sp>
-        <p:nvSpPr>
-          <p:cNvPr id="25" name="TextBox 24"/>
-          <p:cNvSpPr txBox="1"/>
-          <p:nvPr/>
-        </p:nvSpPr>
-        <p:spPr>
-          <a:xfrm>
-            <a:off x="685800" y="4215384"/>
-            <a:ext cx="3200400" cy="420624"/>
-          </a:xfrm>
-          <a:prstGeom prst="rect">
-            <a:avLst/>
-          </a:prstGeom>
-          <a:noFill/>
-        </p:spPr>
-        <p:txBody>
-          <a:bodyPr wrap="square" lIns="0" rIns="0" tIns="0" bIns="0" anchor="t">
-            <a:spAutoFit/>
-          </a:bodyPr>
-          <a:lstStyle/>
-          <a:p>
-            <a:pPr algn="l">
-              <a:lnSpc>
-                <a:spcPct val="100000"/>
-              </a:lnSpc>
-            </a:pPr>
-            <a:r>
-              <a:rPr sz="1200" b="0" i="0">
-                <a:solidFill>
-                  <a:srgbClr val="F5F5F4"/>
-                </a:solidFill>
-                <a:latin typeface="Inter"/>
-              </a:rPr>
-              <a:t>Employer attestation</a:t>
-            </a:r>
-          </a:p>
-        </p:txBody>
-      </p:sp>
-      <p:sp>
-        <p:nvSpPr>
-          <p:cNvPr id="26" name="TextBox 25"/>
-          <p:cNvSpPr txBox="1"/>
-          <p:nvPr/>
-        </p:nvSpPr>
-        <p:spPr>
-          <a:xfrm>
-            <a:off x="3886200" y="4215384"/>
-            <a:ext cx="2286000" cy="420624"/>
-          </a:xfrm>
-          <a:prstGeom prst="rect">
-            <a:avLst/>
-          </a:prstGeom>
-          <a:noFill/>
-        </p:spPr>
-        <p:txBody>
-          <a:bodyPr wrap="square" lIns="0" rIns="0" tIns="0" bIns="0" anchor="t">
-            <a:spAutoFit/>
-          </a:bodyPr>
-          <a:lstStyle/>
-          <a:p>
-            <a:pPr algn="l">
-              <a:lnSpc>
-                <a:spcPct val="100000"/>
-              </a:lnSpc>
-            </a:pPr>
-            <a:r>
-              <a:rPr sz="1200" b="1" i="0">
-                <a:solidFill>
-                  <a:srgbClr val="EF4444"/>
-                </a:solidFill>
-                <a:latin typeface="Inter"/>
-              </a:rPr>
-              <a:t>no</a:t>
-            </a:r>
-          </a:p>
-        </p:txBody>
-      </p:sp>
-      <p:sp>
-        <p:nvSpPr>
-          <p:cNvPr id="27" name="TextBox 26"/>
-          <p:cNvSpPr txBox="1"/>
-          <p:nvPr/>
-        </p:nvSpPr>
-        <p:spPr>
-          <a:xfrm>
-            <a:off x="6172200" y="4215384"/>
-            <a:ext cx="2103120" cy="420624"/>
-          </a:xfrm>
-          <a:prstGeom prst="rect">
-            <a:avLst/>
-          </a:prstGeom>
-          <a:noFill/>
-        </p:spPr>
-        <p:txBody>
-          <a:bodyPr wrap="square" lIns="0" rIns="0" tIns="0" bIns="0" anchor="t">
-            <a:spAutoFit/>
-          </a:bodyPr>
-          <a:lstStyle/>
-          <a:p>
-            <a:pPr algn="l">
-              <a:lnSpc>
-                <a:spcPct val="100000"/>
-              </a:lnSpc>
-            </a:pPr>
-            <a:r>
-              <a:rPr sz="1200" b="1" i="0">
-                <a:solidFill>
-                  <a:srgbClr val="FACC15"/>
-                </a:solidFill>
-                <a:latin typeface="Inter"/>
-              </a:rPr>
-              <a:t>depends</a:t>
-            </a:r>
-          </a:p>
-        </p:txBody>
-      </p:sp>
-      <p:sp>
-        <p:nvSpPr>
-          <p:cNvPr id="28" name="TextBox 27"/>
-          <p:cNvSpPr txBox="1"/>
-          <p:nvPr/>
-        </p:nvSpPr>
-        <p:spPr>
-          <a:xfrm>
-            <a:off x="8275320" y="4215384"/>
-            <a:ext cx="3227832" cy="420624"/>
-          </a:xfrm>
-          <a:prstGeom prst="rect">
-            <a:avLst/>
-          </a:prstGeom>
-          <a:noFill/>
-        </p:spPr>
-        <p:txBody>
-          <a:bodyPr wrap="square" lIns="0" rIns="0" tIns="0" bIns="0" anchor="t">
-            <a:spAutoFit/>
-          </a:bodyPr>
-          <a:lstStyle/>
-          <a:p>
-            <a:pPr algn="l">
-              <a:lnSpc>
-                <a:spcPct val="100000"/>
-              </a:lnSpc>
-            </a:pPr>
-            <a:r>
-              <a:rPr sz="1200" b="1" i="0">
-                <a:solidFill>
-                  <a:srgbClr val="A1A1AA"/>
-                </a:solidFill>
-                <a:latin typeface="Inter"/>
-              </a:rPr>
-              <a:t>it is a promise</a:t>
-            </a:r>
-          </a:p>
-        </p:txBody>
-      </p:sp>
-      <p:sp>
-        <p:nvSpPr>
-          <p:cNvPr id="29" name="Rectangle 28"/>
-          <p:cNvSpPr/>
-          <p:nvPr/>
-        </p:nvSpPr>
-        <p:spPr>
-          <a:xfrm>
-            <a:off x="685800" y="4599432"/>
-            <a:ext cx="10820095" cy="10972"/>
-          </a:xfrm>
-          <a:prstGeom prst="rect">
-            <a:avLst/>
-          </a:prstGeom>
-          <a:solidFill>
-            <a:srgbClr val="26262B"/>
-          </a:solidFill>
-          <a:ln>
-            <a:noFill/>
-          </a:ln>
-          <a:effectLst/>
-        </p:spPr>
-        <p:style>
-          <a:lnRef idx="1">
-            <a:schemeClr val="accent1"/>
-          </a:lnRef>
-          <a:fillRef idx="3">
-            <a:schemeClr val="accent1"/>
-          </a:fillRef>
-          <a:effectRef idx="2">
-            <a:schemeClr val="accent1"/>
-          </a:effectRef>
-          <a:fontRef idx="minor">
-            <a:schemeClr val="lt1"/>
-          </a:fontRef>
-        </p:style>
-        <p:txBody>
-          <a:bodyPr rtlCol="0" anchor="ctr"/>
-          <a:lstStyle/>
-          <a:p>
-            <a:pPr algn="ctr"/>
-          </a:p>
-        </p:txBody>
-      </p:sp>
-      <p:sp>
-        <p:nvSpPr>
-          <p:cNvPr id="30" name="TextBox 29"/>
-          <p:cNvSpPr txBox="1"/>
-          <p:nvPr/>
-        </p:nvSpPr>
-        <p:spPr>
-          <a:xfrm>
-            <a:off x="685800" y="4681728"/>
-            <a:ext cx="3200400" cy="420624"/>
-          </a:xfrm>
-          <a:prstGeom prst="rect">
-            <a:avLst/>
-          </a:prstGeom>
-          <a:noFill/>
-        </p:spPr>
-        <p:txBody>
-          <a:bodyPr wrap="square" lIns="0" rIns="0" tIns="0" bIns="0" anchor="t">
-            <a:spAutoFit/>
-          </a:bodyPr>
-          <a:lstStyle/>
-          <a:p>
-            <a:pPr algn="l">
-              <a:lnSpc>
-                <a:spcPct val="100000"/>
-              </a:lnSpc>
-            </a:pPr>
-            <a:r>
-              <a:rPr sz="1200" b="0" i="0">
-                <a:solidFill>
-                  <a:srgbClr val="F5F5F4"/>
-                </a:solidFill>
-                <a:latin typeface="Inter"/>
-              </a:rPr>
-              <a:t>Equilux · Wave 1 winner</a:t>
-            </a:r>
-          </a:p>
-        </p:txBody>
-      </p:sp>
-      <p:sp>
-        <p:nvSpPr>
-          <p:cNvPr id="31" name="TextBox 30"/>
-          <p:cNvSpPr txBox="1"/>
-          <p:nvPr/>
-        </p:nvSpPr>
-        <p:spPr>
-          <a:xfrm>
-            <a:off x="3886200" y="4681728"/>
-            <a:ext cx="2286000" cy="420624"/>
-          </a:xfrm>
-          <a:prstGeom prst="rect">
-            <a:avLst/>
-          </a:prstGeom>
-          <a:noFill/>
-        </p:spPr>
-        <p:txBody>
-          <a:bodyPr wrap="square" lIns="0" rIns="0" tIns="0" bIns="0" anchor="t">
-            <a:spAutoFit/>
-          </a:bodyPr>
-          <a:lstStyle/>
-          <a:p>
-            <a:pPr algn="l">
-              <a:lnSpc>
-                <a:spcPct val="100000"/>
-              </a:lnSpc>
-            </a:pPr>
-            <a:r>
-              <a:rPr sz="1200" b="1" i="0">
-                <a:solidFill>
-                  <a:srgbClr val="FACC15"/>
-                </a:solidFill>
-                <a:latin typeface="Inter"/>
-              </a:rPr>
-              <a:t>partial</a:t>
-            </a:r>
-          </a:p>
-        </p:txBody>
-      </p:sp>
-      <p:sp>
-        <p:nvSpPr>
-          <p:cNvPr id="32" name="TextBox 31"/>
-          <p:cNvSpPr txBox="1"/>
-          <p:nvPr/>
-        </p:nvSpPr>
-        <p:spPr>
-          <a:xfrm>
-            <a:off x="6172200" y="4681728"/>
-            <a:ext cx="2103120" cy="420624"/>
-          </a:xfrm>
-          <a:prstGeom prst="rect">
-            <a:avLst/>
-          </a:prstGeom>
-          <a:noFill/>
-        </p:spPr>
-        <p:txBody>
-          <a:bodyPr wrap="square" lIns="0" rIns="0" tIns="0" bIns="0" anchor="t">
-            <a:spAutoFit/>
-          </a:bodyPr>
-          <a:lstStyle/>
-          <a:p>
-            <a:pPr algn="l">
-              <a:lnSpc>
-                <a:spcPct val="100000"/>
-              </a:lnSpc>
-            </a:pPr>
-            <a:r>
-              <a:rPr sz="1200" b="1" i="0">
-                <a:solidFill>
-                  <a:srgbClr val="FACC15"/>
-                </a:solidFill>
-                <a:latin typeface="Inter"/>
-              </a:rPr>
-              <a:t>partial</a:t>
-            </a:r>
-          </a:p>
-        </p:txBody>
-      </p:sp>
-      <p:sp>
-        <p:nvSpPr>
-          <p:cNvPr id="33" name="TextBox 32"/>
-          <p:cNvSpPr txBox="1"/>
-          <p:nvPr/>
-        </p:nvSpPr>
-        <p:spPr>
-          <a:xfrm>
-            <a:off x="8275320" y="4681728"/>
-            <a:ext cx="3227832" cy="420624"/>
-          </a:xfrm>
-          <a:prstGeom prst="rect">
-            <a:avLst/>
-          </a:prstGeom>
-          <a:noFill/>
-        </p:spPr>
-        <p:txBody>
-          <a:bodyPr wrap="square" lIns="0" rIns="0" tIns="0" bIns="0" anchor="t">
-            <a:spAutoFit/>
-          </a:bodyPr>
-          <a:lstStyle/>
-          <a:p>
-            <a:pPr algn="l">
-              <a:lnSpc>
-                <a:spcPct val="100000"/>
-              </a:lnSpc>
-            </a:pPr>
-            <a:r>
-              <a:rPr sz="1200" b="1" i="0">
-                <a:solidFill>
-                  <a:srgbClr val="A1A1AA"/>
-                </a:solidFill>
-                <a:latin typeface="Inter"/>
-              </a:rPr>
-              <a:t>12 circuits; judge asked for an HRIS plugin</a:t>
-            </a:r>
-          </a:p>
-        </p:txBody>
-      </p:sp>
-      <p:sp>
-        <p:nvSpPr>
-          <p:cNvPr id="34" name="Rectangle 33"/>
-          <p:cNvSpPr/>
-          <p:nvPr/>
-        </p:nvSpPr>
-        <p:spPr>
-          <a:xfrm>
-            <a:off x="685800" y="5065776"/>
-            <a:ext cx="10820095" cy="10972"/>
-          </a:xfrm>
-          <a:prstGeom prst="rect">
-            <a:avLst/>
-          </a:prstGeom>
-          <a:solidFill>
-            <a:srgbClr val="26262B"/>
-          </a:solidFill>
-          <a:ln>
-            <a:noFill/>
-          </a:ln>
-          <a:effectLst/>
-        </p:spPr>
-        <p:style>
-          <a:lnRef idx="1">
-            <a:schemeClr val="accent1"/>
-          </a:lnRef>
-          <a:fillRef idx="3">
-            <a:schemeClr val="accent1"/>
-          </a:fillRef>
-          <a:effectRef idx="2">
-            <a:schemeClr val="accent1"/>
-          </a:effectRef>
-          <a:fontRef idx="minor">
-            <a:schemeClr val="lt1"/>
-          </a:fontRef>
-        </p:style>
-        <p:txBody>
-          <a:bodyPr rtlCol="0" anchor="ctr"/>
-          <a:lstStyle/>
-          <a:p>
-            <a:pPr algn="ctr"/>
-          </a:p>
-        </p:txBody>
-      </p:sp>
-      <p:sp>
-        <p:nvSpPr>
-          <p:cNvPr id="35" name="TextBox 34"/>
-          <p:cNvSpPr txBox="1"/>
-          <p:nvPr/>
-        </p:nvSpPr>
-        <p:spPr>
-          <a:xfrm>
-            <a:off x="685800" y="5148072"/>
-            <a:ext cx="3200400" cy="420624"/>
-          </a:xfrm>
-          <a:prstGeom prst="rect">
-            <a:avLst/>
-          </a:prstGeom>
-          <a:noFill/>
-        </p:spPr>
-        <p:txBody>
-          <a:bodyPr wrap="square" lIns="0" rIns="0" tIns="0" bIns="0" anchor="t">
-            <a:spAutoFit/>
-          </a:bodyPr>
-          <a:lstStyle/>
-          <a:p>
-            <a:pPr algn="l">
-              <a:lnSpc>
-                <a:spcPct val="100000"/>
-              </a:lnSpc>
-            </a:pPr>
-            <a:r>
-              <a:rPr sz="1200" b="0" i="0">
-                <a:solidFill>
-                  <a:srgbClr val="F5F5F4"/>
-                </a:solidFill>
-                <a:latin typeface="Inter"/>
-              </a:rPr>
-              <a:t>GotIt</a:t>
-            </a:r>
-          </a:p>
-        </p:txBody>
-      </p:sp>
-      <p:sp>
-        <p:nvSpPr>
-          <p:cNvPr id="36" name="TextBox 35"/>
-          <p:cNvSpPr txBox="1"/>
-          <p:nvPr/>
-        </p:nvSpPr>
-        <p:spPr>
-          <a:xfrm>
-            <a:off x="3886200" y="5148072"/>
-            <a:ext cx="2286000" cy="420624"/>
-          </a:xfrm>
-          <a:prstGeom prst="rect">
-            <a:avLst/>
-          </a:prstGeom>
-          <a:noFill/>
-        </p:spPr>
-        <p:txBody>
-          <a:bodyPr wrap="square" lIns="0" rIns="0" tIns="0" bIns="0" anchor="t">
-            <a:spAutoFit/>
-          </a:bodyPr>
-          <a:lstStyle/>
-          <a:p>
-            <a:pPr algn="l">
-              <a:lnSpc>
-                <a:spcPct val="100000"/>
-              </a:lnSpc>
-            </a:pPr>
-            <a:r>
-              <a:rPr sz="1200" b="1" i="0">
-                <a:solidFill>
-                  <a:srgbClr val="22C55E"/>
-                </a:solidFill>
-                <a:latin typeface="Inter"/>
-              </a:rPr>
-              <a:t>yes</a:t>
-            </a:r>
-          </a:p>
-        </p:txBody>
-      </p:sp>
-      <p:sp>
-        <p:nvSpPr>
-          <p:cNvPr id="37" name="TextBox 36"/>
-          <p:cNvSpPr txBox="1"/>
-          <p:nvPr/>
-        </p:nvSpPr>
-        <p:spPr>
-          <a:xfrm>
-            <a:off x="6172200" y="5148072"/>
-            <a:ext cx="2103120" cy="420624"/>
-          </a:xfrm>
-          <a:prstGeom prst="rect">
-            <a:avLst/>
-          </a:prstGeom>
-          <a:noFill/>
-        </p:spPr>
-        <p:txBody>
-          <a:bodyPr wrap="square" lIns="0" rIns="0" tIns="0" bIns="0" anchor="t">
-            <a:spAutoFit/>
-          </a:bodyPr>
-          <a:lstStyle/>
-          <a:p>
-            <a:pPr algn="l">
-              <a:lnSpc>
-                <a:spcPct val="100000"/>
-              </a:lnSpc>
-            </a:pPr>
-            <a:r>
-              <a:rPr sz="1200" b="1" i="0">
-                <a:solidFill>
-                  <a:srgbClr val="22C55E"/>
-                </a:solidFill>
-                <a:latin typeface="Inter"/>
-              </a:rPr>
-              <a:t>yes</a:t>
-            </a:r>
-          </a:p>
-        </p:txBody>
-      </p:sp>
-      <p:sp>
-        <p:nvSpPr>
-          <p:cNvPr id="38" name="TextBox 37"/>
-          <p:cNvSpPr txBox="1"/>
-          <p:nvPr/>
-        </p:nvSpPr>
-        <p:spPr>
-          <a:xfrm>
-            <a:off x="8275320" y="5148072"/>
-            <a:ext cx="3227832" cy="420624"/>
-          </a:xfrm>
-          <a:prstGeom prst="rect">
-            <a:avLst/>
-          </a:prstGeom>
-          <a:noFill/>
-        </p:spPr>
-        <p:txBody>
-          <a:bodyPr wrap="square" lIns="0" rIns="0" tIns="0" bIns="0" anchor="t">
-            <a:spAutoFit/>
-          </a:bodyPr>
-          <a:lstStyle/>
-          <a:p>
-            <a:pPr algn="l">
-              <a:lnSpc>
-                <a:spcPct val="100000"/>
-              </a:lnSpc>
-            </a:pPr>
-            <a:r>
-              <a:rPr sz="1200" b="1" i="0">
-                <a:solidFill>
-                  <a:srgbClr val="22C55E"/>
-                </a:solidFill>
-                <a:latin typeface="Inter"/>
-              </a:rPr>
-              <a:t>verified, gated in-circuit</a:t>
-            </a:r>
-          </a:p>
-        </p:txBody>
-      </p:sp>
-      <p:sp>
-        <p:nvSpPr>
-          <p:cNvPr id="39" name="TextBox 38"/>
-          <p:cNvSpPr txBox="1"/>
-          <p:nvPr/>
-        </p:nvSpPr>
-        <p:spPr>
-          <a:xfrm>
-            <a:off x="685800" y="5440680"/>
-            <a:ext cx="10820095" cy="640080"/>
-          </a:xfrm>
-          <a:prstGeom prst="rect">
-            <a:avLst/>
-          </a:prstGeom>
-          <a:noFill/>
-        </p:spPr>
-        <p:txBody>
-          <a:bodyPr wrap="square" lIns="0" rIns="0" tIns="0" bIns="0" anchor="t">
-            <a:spAutoFit/>
-          </a:bodyPr>
-          <a:lstStyle/>
-          <a:p>
-            <a:pPr algn="l">
-              <a:lnSpc>
-                <a:spcPct val="145000"/>
-              </a:lnSpc>
-            </a:pPr>
-            <a:r>
-              <a:rPr sz="1200" b="0" i="0">
-                <a:solidFill>
-                  <a:srgbClr val="71717A"/>
-                </a:solidFill>
-                <a:latin typeface="Inter"/>
-              </a:rPr>
-              <a:t>The honest gap: our issuer still learns who works where. It cannot link a person to their figure, because it never receives the secret that derives the nullifier — but removing it entirely is Wave 3.</a:t>
-            </a:r>
-          </a:p>
-        </p:txBody>
-      </p:sp>
-      <p:sp>
-        <p:nvSpPr>
-          <p:cNvPr id="40" name="Rectangle 39"/>
-          <p:cNvSpPr/>
-          <p:nvPr/>
-        </p:nvSpPr>
-        <p:spPr>
-          <a:xfrm>
-            <a:off x="685800" y="6291072"/>
-            <a:ext cx="10820095" cy="10972"/>
-          </a:xfrm>
-          <a:prstGeom prst="rect">
-            <a:avLst/>
-          </a:prstGeom>
-          <a:solidFill>
-            <a:srgbClr val="26262B"/>
-          </a:solidFill>
-          <a:ln>
-            <a:noFill/>
-          </a:ln>
-          <a:effectLst/>
-        </p:spPr>
-        <p:style>
-          <a:lnRef idx="1">
-            <a:schemeClr val="accent1"/>
-          </a:lnRef>
-          <a:fillRef idx="3">
-            <a:schemeClr val="accent1"/>
-          </a:fillRef>
-          <a:effectRef idx="2">
-            <a:schemeClr val="accent1"/>
-          </a:effectRef>
-          <a:fontRef idx="minor">
-            <a:schemeClr val="lt1"/>
-          </a:fontRef>
-        </p:style>
-        <p:txBody>
-          <a:bodyPr rtlCol="0" anchor="ctr"/>
-          <a:lstStyle/>
-          <a:p>
-            <a:pPr algn="ctr"/>
-          </a:p>
-        </p:txBody>
-      </p:sp>
-      <p:sp>
-        <p:nvSpPr>
-          <p:cNvPr id="41" name="TextBox 40"/>
           <p:cNvSpPr txBox="1"/>
           <p:nvPr/>
         </p:nvSpPr>
@@ -11031,7 +10959,7 @@
       </p:sp>
       <p:sp>
         <p:nvSpPr>
-          <p:cNvPr id="42" name="TextBox 41"/>
+          <p:cNvPr id="21" name="TextBox 20"/>
           <p:cNvSpPr txBox="1"/>
           <p:nvPr/>
         </p:nvSpPr>
@@ -11164,7 +11092,7 @@
                 </a:solidFill>
                 <a:latin typeface="Inter"/>
               </a:rPr>
-              <a:t>CHALLENGES</a:t>
+              <a:t>WHY US</a:t>
             </a:r>
           </a:p>
         </p:txBody>
@@ -11197,58 +11125,69 @@
               </a:lnSpc>
             </a:pPr>
             <a:r>
-              <a:rPr sz="3100" b="1" i="0">
+              <a:rPr sz="2700" b="1" i="0">
                 <a:solidFill>
                   <a:srgbClr val="F5F5F4"/>
                 </a:solidFill>
                 <a:latin typeface="Fraunces"/>
               </a:rPr>
-              <a:t>Four things that were genuinely hard.</a:t>
-            </a:r>
-          </a:p>
-        </p:txBody>
-      </p:sp>
-      <p:sp>
-        <p:nvSpPr>
-          <p:cNvPr id="5" name="Rectangle 4"/>
-          <p:cNvSpPr/>
-          <p:nvPr/>
-        </p:nvSpPr>
-        <p:spPr>
-          <a:xfrm>
-            <a:off x="685800" y="2029968"/>
-            <a:ext cx="68580" cy="68580"/>
-          </a:xfrm>
-          <a:prstGeom prst="rect">
-            <a:avLst/>
-          </a:prstGeom>
-          <a:solidFill>
-            <a:srgbClr val="FACC15"/>
-          </a:solidFill>
-          <a:ln>
-            <a:noFill/>
-          </a:ln>
-          <a:effectLst/>
-        </p:spPr>
-        <p:style>
-          <a:lnRef idx="1">
-            <a:schemeClr val="accent1"/>
-          </a:lnRef>
-          <a:fillRef idx="3">
-            <a:schemeClr val="accent1"/>
-          </a:fillRef>
-          <a:effectRef idx="2">
-            <a:schemeClr val="accent1"/>
-          </a:effectRef>
-          <a:fontRef idx="minor">
-            <a:schemeClr val="lt1"/>
-          </a:fontRef>
-        </p:style>
-        <p:txBody>
-          <a:bodyPr rtlCol="0" anchor="ctr"/>
-          <a:lstStyle/>
-          <a:p>
-            <a:pPr algn="ctr"/>
+              <a:t>Without ZK you can have one or the other.</a:t>
+            </a:r>
+          </a:p>
+          <a:p>
+            <a:pPr algn="l">
+              <a:lnSpc>
+                <a:spcPct val="108000"/>
+              </a:lnSpc>
+            </a:pPr>
+            <a:r>
+              <a:rPr sz="2700" b="1" i="0">
+                <a:solidFill>
+                  <a:srgbClr val="F5F5F4"/>
+                </a:solidFill>
+                <a:latin typeface="Fraunces"/>
+              </a:rPr>
+              <a:t>With it, you can have both.</a:t>
+            </a:r>
+          </a:p>
+        </p:txBody>
+      </p:sp>
+      <p:sp>
+        <p:nvSpPr>
+          <p:cNvPr id="5" name="TextBox 4"/>
+          <p:cNvSpPr txBox="1"/>
+          <p:nvPr/>
+        </p:nvSpPr>
+        <p:spPr>
+          <a:xfrm>
+            <a:off x="685800" y="2423160"/>
+            <a:ext cx="3200400" cy="256032"/>
+          </a:xfrm>
+          <a:prstGeom prst="rect">
+            <a:avLst/>
+          </a:prstGeom>
+          <a:noFill/>
+        </p:spPr>
+        <p:txBody>
+          <a:bodyPr wrap="square" lIns="0" rIns="0" tIns="0" bIns="0" anchor="t">
+            <a:spAutoFit/>
+          </a:bodyPr>
+          <a:lstStyle/>
+          <a:p>
+            <a:pPr algn="l">
+              <a:lnSpc>
+                <a:spcPct val="125000"/>
+              </a:lnSpc>
+            </a:pPr>
+            <a:r>
+              <a:rPr sz="1100" b="1" i="0">
+                <a:solidFill>
+                  <a:srgbClr val="71717A"/>
+                </a:solidFill>
+                <a:latin typeface="Inter"/>
+              </a:rPr>
+              <a:t>Approach</a:t>
+            </a:r>
           </a:p>
         </p:txBody>
       </p:sp>
@@ -11260,87 +11199,73 @@
         </p:nvSpPr>
         <p:spPr>
           <a:xfrm>
-            <a:off x="886968" y="1938528"/>
-            <a:ext cx="10618927" cy="457200"/>
-          </a:xfrm>
-          <a:prstGeom prst="rect">
-            <a:avLst/>
-          </a:prstGeom>
-          <a:noFill/>
-        </p:spPr>
-        <p:txBody>
-          <a:bodyPr wrap="square" lIns="0" rIns="0" tIns="0" bIns="0">
-            <a:spAutoFit/>
-          </a:bodyPr>
-          <a:lstStyle/>
-          <a:p>
-            <a:pPr>
-              <a:lnSpc>
-                <a:spcPct val="135000"/>
-              </a:lnSpc>
-            </a:pPr>
-            <a:r>
-              <a:rPr sz="1300" b="1">
-                <a:solidFill>
-                  <a:srgbClr val="F5F5F4"/>
-                </a:solidFill>
-                <a:latin typeface="Inter"/>
-              </a:rPr>
-              <a:t>Counting meant giving up a Counter. </a:t>
-            </a:r>
-            <a:r>
-              <a:rPr sz="1300">
-                <a:solidFill>
-                  <a:srgbClr val="A1A1AA"/>
-                </a:solidFill>
-                <a:latin typeface="Inter"/>
-              </a:rPr>
-              <a:t>Counter is not readable inside Compact 0.23 circuits — the contract could count but never report. Replaced with a readable singleton cell.</a:t>
-            </a:r>
-          </a:p>
-        </p:txBody>
-      </p:sp>
-      <p:sp>
-        <p:nvSpPr>
-          <p:cNvPr id="7" name="Rectangle 6"/>
-          <p:cNvSpPr/>
-          <p:nvPr/>
-        </p:nvSpPr>
-        <p:spPr>
-          <a:xfrm>
-            <a:off x="685800" y="2779776"/>
-            <a:ext cx="68580" cy="68580"/>
-          </a:xfrm>
-          <a:prstGeom prst="rect">
-            <a:avLst/>
-          </a:prstGeom>
-          <a:solidFill>
-            <a:srgbClr val="FACC15"/>
-          </a:solidFill>
-          <a:ln>
-            <a:noFill/>
-          </a:ln>
-          <a:effectLst/>
-        </p:spPr>
-        <p:style>
-          <a:lnRef idx="1">
-            <a:schemeClr val="accent1"/>
-          </a:lnRef>
-          <a:fillRef idx="3">
-            <a:schemeClr val="accent1"/>
-          </a:fillRef>
-          <a:effectRef idx="2">
-            <a:schemeClr val="accent1"/>
-          </a:effectRef>
-          <a:fontRef idx="minor">
-            <a:schemeClr val="lt1"/>
-          </a:fontRef>
-        </p:style>
-        <p:txBody>
-          <a:bodyPr rtlCol="0" anchor="ctr"/>
-          <a:lstStyle/>
-          <a:p>
-            <a:pPr algn="ctr"/>
+            <a:off x="3886200" y="2423160"/>
+            <a:ext cx="2286000" cy="256032"/>
+          </a:xfrm>
+          <a:prstGeom prst="rect">
+            <a:avLst/>
+          </a:prstGeom>
+          <a:noFill/>
+        </p:spPr>
+        <p:txBody>
+          <a:bodyPr wrap="square" lIns="0" rIns="0" tIns="0" bIns="0" anchor="t">
+            <a:spAutoFit/>
+          </a:bodyPr>
+          <a:lstStyle/>
+          <a:p>
+            <a:pPr algn="l">
+              <a:lnSpc>
+                <a:spcPct val="125000"/>
+              </a:lnSpc>
+            </a:pPr>
+            <a:r>
+              <a:rPr sz="1100" b="1" i="0">
+                <a:solidFill>
+                  <a:srgbClr val="71717A"/>
+                </a:solidFill>
+                <a:latin typeface="Inter"/>
+              </a:rPr>
+              <a:t>Proves the data is real</a:t>
+            </a:r>
+          </a:p>
+        </p:txBody>
+      </p:sp>
+      <p:sp>
+        <p:nvSpPr>
+          <p:cNvPr id="7" name="TextBox 6"/>
+          <p:cNvSpPr txBox="1"/>
+          <p:nvPr/>
+        </p:nvSpPr>
+        <p:spPr>
+          <a:xfrm>
+            <a:off x="6172200" y="2423160"/>
+            <a:ext cx="2103120" cy="256032"/>
+          </a:xfrm>
+          <a:prstGeom prst="rect">
+            <a:avLst/>
+          </a:prstGeom>
+          <a:noFill/>
+        </p:spPr>
+        <p:txBody>
+          <a:bodyPr wrap="square" lIns="0" rIns="0" tIns="0" bIns="0" anchor="t">
+            <a:spAutoFit/>
+          </a:bodyPr>
+          <a:lstStyle/>
+          <a:p>
+            <a:pPr algn="l">
+              <a:lnSpc>
+                <a:spcPct val="125000"/>
+              </a:lnSpc>
+            </a:pPr>
+            <a:r>
+              <a:rPr sz="1100" b="1" i="0">
+                <a:solidFill>
+                  <a:srgbClr val="71717A"/>
+                </a:solidFill>
+                <a:latin typeface="Inter"/>
+              </a:rPr>
+              <a:t>Protects individuals</a:t>
+            </a:r>
           </a:p>
         </p:txBody>
       </p:sp>
@@ -11352,42 +11277,33 @@
         </p:nvSpPr>
         <p:spPr>
           <a:xfrm>
-            <a:off x="886968" y="2688336"/>
-            <a:ext cx="10618927" cy="457200"/>
-          </a:xfrm>
-          <a:prstGeom prst="rect">
-            <a:avLst/>
-          </a:prstGeom>
-          <a:noFill/>
-        </p:spPr>
-        <p:txBody>
-          <a:bodyPr wrap="square" lIns="0" rIns="0" tIns="0" bIns="0">
-            <a:spAutoFit/>
-          </a:bodyPr>
-          <a:lstStyle/>
-          <a:p>
-            <a:pPr>
-              <a:lnSpc>
-                <a:spcPct val="135000"/>
-              </a:lnSpc>
-            </a:pPr>
-            <a:r>
-              <a:rPr sz="1300" b="1">
-                <a:solidFill>
-                  <a:srgbClr val="F5F5F4"/>
-                </a:solidFill>
-                <a:latin typeface="Inter"/>
-              </a:rPr>
-              <a:t>A bucketed mean is not a mean. </a:t>
-            </a:r>
-            <a:r>
-              <a:rPr sz="1300">
-                <a:solidFill>
-                  <a:srgbClr val="A1A1AA"/>
-                </a:solidFill>
-                <a:latin typeface="Inter"/>
-              </a:rPr>
-              <a:t>The first version published point estimates. $124,900 and $100,000 land in the same bucket but are not the same number. Every mean and gap is now an interval.</a:t>
+            <a:off x="8275320" y="2423160"/>
+            <a:ext cx="3227832" cy="256032"/>
+          </a:xfrm>
+          <a:prstGeom prst="rect">
+            <a:avLst/>
+          </a:prstGeom>
+          <a:noFill/>
+        </p:spPr>
+        <p:txBody>
+          <a:bodyPr wrap="square" lIns="0" rIns="0" tIns="0" bIns="0" anchor="t">
+            <a:spAutoFit/>
+          </a:bodyPr>
+          <a:lstStyle/>
+          <a:p>
+            <a:pPr algn="l">
+              <a:lnSpc>
+                <a:spcPct val="125000"/>
+              </a:lnSpc>
+            </a:pPr>
+            <a:r>
+              <a:rPr sz="1100" b="1" i="0">
+                <a:solidFill>
+                  <a:srgbClr val="71717A"/>
+                </a:solidFill>
+                <a:latin typeface="Inter"/>
+              </a:rPr>
+              <a:t>Note</a:t>
             </a:r>
           </a:p>
         </p:txBody>
@@ -11400,191 +11316,7 @@
         </p:nvSpPr>
         <p:spPr>
           <a:xfrm>
-            <a:off x="685800" y="3529584"/>
-            <a:ext cx="68580" cy="68580"/>
-          </a:xfrm>
-          <a:prstGeom prst="rect">
-            <a:avLst/>
-          </a:prstGeom>
-          <a:solidFill>
-            <a:srgbClr val="FACC15"/>
-          </a:solidFill>
-          <a:ln>
-            <a:noFill/>
-          </a:ln>
-          <a:effectLst/>
-        </p:spPr>
-        <p:style>
-          <a:lnRef idx="1">
-            <a:schemeClr val="accent1"/>
-          </a:lnRef>
-          <a:fillRef idx="3">
-            <a:schemeClr val="accent1"/>
-          </a:fillRef>
-          <a:effectRef idx="2">
-            <a:schemeClr val="accent1"/>
-          </a:effectRef>
-          <a:fontRef idx="minor">
-            <a:schemeClr val="lt1"/>
-          </a:fontRef>
-        </p:style>
-        <p:txBody>
-          <a:bodyPr rtlCol="0" anchor="ctr"/>
-          <a:lstStyle/>
-          <a:p>
-            <a:pPr algn="ctr"/>
-          </a:p>
-        </p:txBody>
-      </p:sp>
-      <p:sp>
-        <p:nvSpPr>
-          <p:cNvPr id="10" name="TextBox 9"/>
-          <p:cNvSpPr txBox="1"/>
-          <p:nvPr/>
-        </p:nvSpPr>
-        <p:spPr>
-          <a:xfrm>
-            <a:off x="886968" y="3438144"/>
-            <a:ext cx="10618927" cy="457200"/>
-          </a:xfrm>
-          <a:prstGeom prst="rect">
-            <a:avLst/>
-          </a:prstGeom>
-          <a:noFill/>
-        </p:spPr>
-        <p:txBody>
-          <a:bodyPr wrap="square" lIns="0" rIns="0" tIns="0" bIns="0">
-            <a:spAutoFit/>
-          </a:bodyPr>
-          <a:lstStyle/>
-          <a:p>
-            <a:pPr>
-              <a:lnSpc>
-                <a:spcPct val="135000"/>
-              </a:lnSpc>
-            </a:pPr>
-            <a:r>
-              <a:rPr sz="1300" b="1">
-                <a:solidFill>
-                  <a:srgbClr val="F5F5F4"/>
-                </a:solidFill>
-                <a:latin typeface="Inter"/>
-              </a:rPr>
-              <a:t>A midpoint is not a defensible materiality test. </a:t>
-            </a:r>
-            <a:r>
-              <a:rPr sz="1300">
-                <a:solidFill>
-                  <a:srgbClr val="A1A1AA"/>
-                </a:solidFill>
-                <a:latin typeface="Inter"/>
-              </a:rPr>
-              <a:t>Flagging against a midpoint would cry wolf on a compliant category and trigger a joint pay assessment. Only a proven 5% disparity counts.</a:t>
-            </a:r>
-          </a:p>
-        </p:txBody>
-      </p:sp>
-      <p:sp>
-        <p:nvSpPr>
-          <p:cNvPr id="11" name="Rectangle 10"/>
-          <p:cNvSpPr/>
-          <p:nvPr/>
-        </p:nvSpPr>
-        <p:spPr>
-          <a:xfrm>
-            <a:off x="685800" y="4279392"/>
-            <a:ext cx="68580" cy="68580"/>
-          </a:xfrm>
-          <a:prstGeom prst="rect">
-            <a:avLst/>
-          </a:prstGeom>
-          <a:solidFill>
-            <a:srgbClr val="FACC15"/>
-          </a:solidFill>
-          <a:ln>
-            <a:noFill/>
-          </a:ln>
-          <a:effectLst/>
-        </p:spPr>
-        <p:style>
-          <a:lnRef idx="1">
-            <a:schemeClr val="accent1"/>
-          </a:lnRef>
-          <a:fillRef idx="3">
-            <a:schemeClr val="accent1"/>
-          </a:fillRef>
-          <a:effectRef idx="2">
-            <a:schemeClr val="accent1"/>
-          </a:effectRef>
-          <a:fontRef idx="minor">
-            <a:schemeClr val="lt1"/>
-          </a:fontRef>
-        </p:style>
-        <p:txBody>
-          <a:bodyPr rtlCol="0" anchor="ctr"/>
-          <a:lstStyle/>
-          <a:p>
-            <a:pPr algn="ctr"/>
-          </a:p>
-        </p:txBody>
-      </p:sp>
-      <p:sp>
-        <p:nvSpPr>
-          <p:cNvPr id="12" name="TextBox 11"/>
-          <p:cNvSpPr txBox="1"/>
-          <p:nvPr/>
-        </p:nvSpPr>
-        <p:spPr>
-          <a:xfrm>
-            <a:off x="886968" y="4187952"/>
-            <a:ext cx="10618927" cy="457200"/>
-          </a:xfrm>
-          <a:prstGeom prst="rect">
-            <a:avLst/>
-          </a:prstGeom>
-          <a:noFill/>
-        </p:spPr>
-        <p:txBody>
-          <a:bodyPr wrap="square" lIns="0" rIns="0" tIns="0" bIns="0">
-            <a:spAutoFit/>
-          </a:bodyPr>
-          <a:lstStyle/>
-          <a:p>
-            <a:pPr>
-              <a:lnSpc>
-                <a:spcPct val="135000"/>
-              </a:lnSpc>
-            </a:pPr>
-            <a:r>
-              <a:rPr sz="1300" b="1">
-                <a:solidFill>
-                  <a:srgbClr val="F5F5F4"/>
-                </a:solidFill>
-                <a:latin typeface="Inter"/>
-              </a:rPr>
-              <a:t>Hash parity between the browser and the circuits. </a:t>
-            </a:r>
-            <a:r>
-              <a:rPr sz="1300">
-                <a:solidFill>
-                  <a:srgbClr val="A1A1AA"/>
-                </a:solidFill>
-                <a:latin typeface="Inter"/>
-              </a:rPr>
-              <a:t>One drift and a salary lands in the wrong cell, silently. 34 tests run the generated contract to make it impossible.</a:t>
-            </a:r>
-          </a:p>
-        </p:txBody>
-      </p:sp>
-      <p:sp>
-        <p:nvSpPr>
-          <p:cNvPr id="13" name="Rectangle 12"/>
-          <p:cNvSpPr/>
-          <p:nvPr/>
-        </p:nvSpPr>
-        <p:spPr>
-          <a:xfrm>
-            <a:off x="685800" y="6291072"/>
+            <a:off x="685800" y="2734056"/>
             <a:ext cx="10820095" cy="10972"/>
           </a:xfrm>
           <a:prstGeom prst="rect">
@@ -11622,7 +11354,1246 @@
       </p:sp>
       <p:sp>
         <p:nvSpPr>
-          <p:cNvPr id="14" name="TextBox 13"/>
+          <p:cNvPr id="10" name="TextBox 9"/>
+          <p:cNvSpPr txBox="1"/>
+          <p:nvPr/>
+        </p:nvSpPr>
+        <p:spPr>
+          <a:xfrm>
+            <a:off x="685800" y="2816352"/>
+            <a:ext cx="3200400" cy="420624"/>
+          </a:xfrm>
+          <a:prstGeom prst="rect">
+            <a:avLst/>
+          </a:prstGeom>
+          <a:noFill/>
+        </p:spPr>
+        <p:txBody>
+          <a:bodyPr wrap="square" lIns="0" rIns="0" tIns="0" bIns="0" anchor="t">
+            <a:spAutoFit/>
+          </a:bodyPr>
+          <a:lstStyle/>
+          <a:p>
+            <a:pPr algn="l">
+              <a:lnSpc>
+                <a:spcPct val="100000"/>
+              </a:lnSpc>
+            </a:pPr>
+            <a:r>
+              <a:rPr sz="1200" b="0" i="0">
+                <a:solidFill>
+                  <a:srgbClr val="F5F5F4"/>
+                </a:solidFill>
+                <a:latin typeface="Inter"/>
+              </a:rPr>
+              <a:t>Payroll spreadsheet</a:t>
+            </a:r>
+          </a:p>
+        </p:txBody>
+      </p:sp>
+      <p:sp>
+        <p:nvSpPr>
+          <p:cNvPr id="11" name="TextBox 10"/>
+          <p:cNvSpPr txBox="1"/>
+          <p:nvPr/>
+        </p:nvSpPr>
+        <p:spPr>
+          <a:xfrm>
+            <a:off x="3886200" y="2816352"/>
+            <a:ext cx="2286000" cy="420624"/>
+          </a:xfrm>
+          <a:prstGeom prst="rect">
+            <a:avLst/>
+          </a:prstGeom>
+          <a:noFill/>
+        </p:spPr>
+        <p:txBody>
+          <a:bodyPr wrap="square" lIns="0" rIns="0" tIns="0" bIns="0" anchor="t">
+            <a:spAutoFit/>
+          </a:bodyPr>
+          <a:lstStyle/>
+          <a:p>
+            <a:pPr algn="l">
+              <a:lnSpc>
+                <a:spcPct val="100000"/>
+              </a:lnSpc>
+            </a:pPr>
+            <a:r>
+              <a:rPr sz="1200" b="1" i="0">
+                <a:solidFill>
+                  <a:srgbClr val="EF4444"/>
+                </a:solidFill>
+                <a:latin typeface="Inter"/>
+              </a:rPr>
+              <a:t>no</a:t>
+            </a:r>
+          </a:p>
+        </p:txBody>
+      </p:sp>
+      <p:sp>
+        <p:nvSpPr>
+          <p:cNvPr id="12" name="TextBox 11"/>
+          <p:cNvSpPr txBox="1"/>
+          <p:nvPr/>
+        </p:nvSpPr>
+        <p:spPr>
+          <a:xfrm>
+            <a:off x="6172200" y="2816352"/>
+            <a:ext cx="2103120" cy="420624"/>
+          </a:xfrm>
+          <a:prstGeom prst="rect">
+            <a:avLst/>
+          </a:prstGeom>
+          <a:noFill/>
+        </p:spPr>
+        <p:txBody>
+          <a:bodyPr wrap="square" lIns="0" rIns="0" tIns="0" bIns="0" anchor="t">
+            <a:spAutoFit/>
+          </a:bodyPr>
+          <a:lstStyle/>
+          <a:p>
+            <a:pPr algn="l">
+              <a:lnSpc>
+                <a:spcPct val="100000"/>
+              </a:lnSpc>
+            </a:pPr>
+            <a:r>
+              <a:rPr sz="1200" b="1" i="0">
+                <a:solidFill>
+                  <a:srgbClr val="EF4444"/>
+                </a:solidFill>
+                <a:latin typeface="Inter"/>
+              </a:rPr>
+              <a:t>no</a:t>
+            </a:r>
+          </a:p>
+        </p:txBody>
+      </p:sp>
+      <p:sp>
+        <p:nvSpPr>
+          <p:cNvPr id="13" name="TextBox 12"/>
+          <p:cNvSpPr txBox="1"/>
+          <p:nvPr/>
+        </p:nvSpPr>
+        <p:spPr>
+          <a:xfrm>
+            <a:off x="8275320" y="2816352"/>
+            <a:ext cx="3227832" cy="420624"/>
+          </a:xfrm>
+          <a:prstGeom prst="rect">
+            <a:avLst/>
+          </a:prstGeom>
+          <a:noFill/>
+        </p:spPr>
+        <p:txBody>
+          <a:bodyPr wrap="square" lIns="0" rIns="0" tIns="0" bIns="0" anchor="t">
+            <a:spAutoFit/>
+          </a:bodyPr>
+          <a:lstStyle/>
+          <a:p>
+            <a:pPr algn="l">
+              <a:lnSpc>
+                <a:spcPct val="100000"/>
+              </a:lnSpc>
+            </a:pPr>
+            <a:r>
+              <a:rPr sz="1200" b="1" i="0">
+                <a:solidFill>
+                  <a:srgbClr val="A1A1AA"/>
+                </a:solidFill>
+                <a:latin typeface="Inter"/>
+              </a:rPr>
+              <a:t>— it is the raw records</a:t>
+            </a:r>
+          </a:p>
+        </p:txBody>
+      </p:sp>
+      <p:sp>
+        <p:nvSpPr>
+          <p:cNvPr id="14" name="Rectangle 13"/>
+          <p:cNvSpPr/>
+          <p:nvPr/>
+        </p:nvSpPr>
+        <p:spPr>
+          <a:xfrm>
+            <a:off x="685800" y="3200400"/>
+            <a:ext cx="10820095" cy="10972"/>
+          </a:xfrm>
+          <a:prstGeom prst="rect">
+            <a:avLst/>
+          </a:prstGeom>
+          <a:solidFill>
+            <a:srgbClr val="26262B"/>
+          </a:solidFill>
+          <a:ln>
+            <a:noFill/>
+          </a:ln>
+          <a:effectLst/>
+        </p:spPr>
+        <p:style>
+          <a:lnRef idx="1">
+            <a:schemeClr val="accent1"/>
+          </a:lnRef>
+          <a:fillRef idx="3">
+            <a:schemeClr val="accent1"/>
+          </a:fillRef>
+          <a:effectRef idx="2">
+            <a:schemeClr val="accent1"/>
+          </a:effectRef>
+          <a:fontRef idx="minor">
+            <a:schemeClr val="lt1"/>
+          </a:fontRef>
+        </p:style>
+        <p:txBody>
+          <a:bodyPr rtlCol="0" anchor="ctr"/>
+          <a:lstStyle/>
+          <a:p>
+            <a:pPr algn="ctr"/>
+          </a:p>
+        </p:txBody>
+      </p:sp>
+      <p:sp>
+        <p:nvSpPr>
+          <p:cNvPr id="15" name="TextBox 14"/>
+          <p:cNvSpPr txBox="1"/>
+          <p:nvPr/>
+        </p:nvSpPr>
+        <p:spPr>
+          <a:xfrm>
+            <a:off x="685800" y="3282696"/>
+            <a:ext cx="3200400" cy="420624"/>
+          </a:xfrm>
+          <a:prstGeom prst="rect">
+            <a:avLst/>
+          </a:prstGeom>
+          <a:noFill/>
+        </p:spPr>
+        <p:txBody>
+          <a:bodyPr wrap="square" lIns="0" rIns="0" tIns="0" bIns="0" anchor="t">
+            <a:spAutoFit/>
+          </a:bodyPr>
+          <a:lstStyle/>
+          <a:p>
+            <a:pPr algn="l">
+              <a:lnSpc>
+                <a:spcPct val="100000"/>
+              </a:lnSpc>
+            </a:pPr>
+            <a:r>
+              <a:rPr sz="1200" b="0" i="0">
+                <a:solidFill>
+                  <a:srgbClr val="F5F5F4"/>
+                </a:solidFill>
+                <a:latin typeface="Inter"/>
+              </a:rPr>
+              <a:t>HR survey</a:t>
+            </a:r>
+          </a:p>
+        </p:txBody>
+      </p:sp>
+      <p:sp>
+        <p:nvSpPr>
+          <p:cNvPr id="16" name="TextBox 15"/>
+          <p:cNvSpPr txBox="1"/>
+          <p:nvPr/>
+        </p:nvSpPr>
+        <p:spPr>
+          <a:xfrm>
+            <a:off x="3886200" y="3282696"/>
+            <a:ext cx="2286000" cy="420624"/>
+          </a:xfrm>
+          <a:prstGeom prst="rect">
+            <a:avLst/>
+          </a:prstGeom>
+          <a:noFill/>
+        </p:spPr>
+        <p:txBody>
+          <a:bodyPr wrap="square" lIns="0" rIns="0" tIns="0" bIns="0" anchor="t">
+            <a:spAutoFit/>
+          </a:bodyPr>
+          <a:lstStyle/>
+          <a:p>
+            <a:pPr algn="l">
+              <a:lnSpc>
+                <a:spcPct val="100000"/>
+              </a:lnSpc>
+            </a:pPr>
+            <a:r>
+              <a:rPr sz="1200" b="1" i="0">
+                <a:solidFill>
+                  <a:srgbClr val="EF4444"/>
+                </a:solidFill>
+                <a:latin typeface="Inter"/>
+              </a:rPr>
+              <a:t>no</a:t>
+            </a:r>
+          </a:p>
+        </p:txBody>
+      </p:sp>
+      <p:sp>
+        <p:nvSpPr>
+          <p:cNvPr id="17" name="TextBox 16"/>
+          <p:cNvSpPr txBox="1"/>
+          <p:nvPr/>
+        </p:nvSpPr>
+        <p:spPr>
+          <a:xfrm>
+            <a:off x="6172200" y="3282696"/>
+            <a:ext cx="2103120" cy="420624"/>
+          </a:xfrm>
+          <a:prstGeom prst="rect">
+            <a:avLst/>
+          </a:prstGeom>
+          <a:noFill/>
+        </p:spPr>
+        <p:txBody>
+          <a:bodyPr wrap="square" lIns="0" rIns="0" tIns="0" bIns="0" anchor="t">
+            <a:spAutoFit/>
+          </a:bodyPr>
+          <a:lstStyle/>
+          <a:p>
+            <a:pPr algn="l">
+              <a:lnSpc>
+                <a:spcPct val="100000"/>
+              </a:lnSpc>
+            </a:pPr>
+            <a:r>
+              <a:rPr sz="1200" b="1" i="0">
+                <a:solidFill>
+                  <a:srgbClr val="EF4444"/>
+                </a:solidFill>
+                <a:latin typeface="Inter"/>
+              </a:rPr>
+              <a:t>no</a:t>
+            </a:r>
+          </a:p>
+        </p:txBody>
+      </p:sp>
+      <p:sp>
+        <p:nvSpPr>
+          <p:cNvPr id="18" name="TextBox 17"/>
+          <p:cNvSpPr txBox="1"/>
+          <p:nvPr/>
+        </p:nvSpPr>
+        <p:spPr>
+          <a:xfrm>
+            <a:off x="8275320" y="3282696"/>
+            <a:ext cx="3227832" cy="420624"/>
+          </a:xfrm>
+          <a:prstGeom prst="rect">
+            <a:avLst/>
+          </a:prstGeom>
+          <a:noFill/>
+        </p:spPr>
+        <p:txBody>
+          <a:bodyPr wrap="square" lIns="0" rIns="0" tIns="0" bIns="0" anchor="t">
+            <a:spAutoFit/>
+          </a:bodyPr>
+          <a:lstStyle/>
+          <a:p>
+            <a:pPr algn="l">
+              <a:lnSpc>
+                <a:spcPct val="100000"/>
+              </a:lnSpc>
+            </a:pPr>
+            <a:r>
+              <a:rPr sz="1200" b="1" i="0">
+                <a:solidFill>
+                  <a:srgbClr val="A1A1AA"/>
+                </a:solidFill>
+                <a:latin typeface="Inter"/>
+              </a:rPr>
+              <a:t>gameable, uneven</a:t>
+            </a:r>
+          </a:p>
+        </p:txBody>
+      </p:sp>
+      <p:sp>
+        <p:nvSpPr>
+          <p:cNvPr id="19" name="Rectangle 18"/>
+          <p:cNvSpPr/>
+          <p:nvPr/>
+        </p:nvSpPr>
+        <p:spPr>
+          <a:xfrm>
+            <a:off x="685800" y="3666744"/>
+            <a:ext cx="10820095" cy="10972"/>
+          </a:xfrm>
+          <a:prstGeom prst="rect">
+            <a:avLst/>
+          </a:prstGeom>
+          <a:solidFill>
+            <a:srgbClr val="26262B"/>
+          </a:solidFill>
+          <a:ln>
+            <a:noFill/>
+          </a:ln>
+          <a:effectLst/>
+        </p:spPr>
+        <p:style>
+          <a:lnRef idx="1">
+            <a:schemeClr val="accent1"/>
+          </a:lnRef>
+          <a:fillRef idx="3">
+            <a:schemeClr val="accent1"/>
+          </a:fillRef>
+          <a:effectRef idx="2">
+            <a:schemeClr val="accent1"/>
+          </a:effectRef>
+          <a:fontRef idx="minor">
+            <a:schemeClr val="lt1"/>
+          </a:fontRef>
+        </p:style>
+        <p:txBody>
+          <a:bodyPr rtlCol="0" anchor="ctr"/>
+          <a:lstStyle/>
+          <a:p>
+            <a:pPr algn="ctr"/>
+          </a:p>
+        </p:txBody>
+      </p:sp>
+      <p:sp>
+        <p:nvSpPr>
+          <p:cNvPr id="20" name="TextBox 19"/>
+          <p:cNvSpPr txBox="1"/>
+          <p:nvPr/>
+        </p:nvSpPr>
+        <p:spPr>
+          <a:xfrm>
+            <a:off x="685800" y="3749040"/>
+            <a:ext cx="3200400" cy="420624"/>
+          </a:xfrm>
+          <a:prstGeom prst="rect">
+            <a:avLst/>
+          </a:prstGeom>
+          <a:noFill/>
+        </p:spPr>
+        <p:txBody>
+          <a:bodyPr wrap="square" lIns="0" rIns="0" tIns="0" bIns="0" anchor="t">
+            <a:spAutoFit/>
+          </a:bodyPr>
+          <a:lstStyle/>
+          <a:p>
+            <a:pPr algn="l">
+              <a:lnSpc>
+                <a:spcPct val="100000"/>
+              </a:lnSpc>
+            </a:pPr>
+            <a:r>
+              <a:rPr sz="1200" b="0" i="0">
+                <a:solidFill>
+                  <a:srgbClr val="F5F5F4"/>
+                </a:solidFill>
+                <a:latin typeface="Inter"/>
+              </a:rPr>
+              <a:t>“Anonymised” CSV export</a:t>
+            </a:r>
+          </a:p>
+        </p:txBody>
+      </p:sp>
+      <p:sp>
+        <p:nvSpPr>
+          <p:cNvPr id="21" name="TextBox 20"/>
+          <p:cNvSpPr txBox="1"/>
+          <p:nvPr/>
+        </p:nvSpPr>
+        <p:spPr>
+          <a:xfrm>
+            <a:off x="3886200" y="3749040"/>
+            <a:ext cx="2286000" cy="420624"/>
+          </a:xfrm>
+          <a:prstGeom prst="rect">
+            <a:avLst/>
+          </a:prstGeom>
+          <a:noFill/>
+        </p:spPr>
+        <p:txBody>
+          <a:bodyPr wrap="square" lIns="0" rIns="0" tIns="0" bIns="0" anchor="t">
+            <a:spAutoFit/>
+          </a:bodyPr>
+          <a:lstStyle/>
+          <a:p>
+            <a:pPr algn="l">
+              <a:lnSpc>
+                <a:spcPct val="100000"/>
+              </a:lnSpc>
+            </a:pPr>
+            <a:r>
+              <a:rPr sz="1200" b="1" i="0">
+                <a:solidFill>
+                  <a:srgbClr val="EF4444"/>
+                </a:solidFill>
+                <a:latin typeface="Inter"/>
+              </a:rPr>
+              <a:t>no</a:t>
+            </a:r>
+          </a:p>
+        </p:txBody>
+      </p:sp>
+      <p:sp>
+        <p:nvSpPr>
+          <p:cNvPr id="22" name="TextBox 21"/>
+          <p:cNvSpPr txBox="1"/>
+          <p:nvPr/>
+        </p:nvSpPr>
+        <p:spPr>
+          <a:xfrm>
+            <a:off x="6172200" y="3749040"/>
+            <a:ext cx="2103120" cy="420624"/>
+          </a:xfrm>
+          <a:prstGeom prst="rect">
+            <a:avLst/>
+          </a:prstGeom>
+          <a:noFill/>
+        </p:spPr>
+        <p:txBody>
+          <a:bodyPr wrap="square" lIns="0" rIns="0" tIns="0" bIns="0" anchor="t">
+            <a:spAutoFit/>
+          </a:bodyPr>
+          <a:lstStyle/>
+          <a:p>
+            <a:pPr algn="l">
+              <a:lnSpc>
+                <a:spcPct val="100000"/>
+              </a:lnSpc>
+            </a:pPr>
+            <a:r>
+              <a:rPr sz="1200" b="1" i="0">
+                <a:solidFill>
+                  <a:srgbClr val="EF4444"/>
+                </a:solidFill>
+                <a:latin typeface="Inter"/>
+              </a:rPr>
+              <a:t>no</a:t>
+            </a:r>
+          </a:p>
+        </p:txBody>
+      </p:sp>
+      <p:sp>
+        <p:nvSpPr>
+          <p:cNvPr id="23" name="TextBox 22"/>
+          <p:cNvSpPr txBox="1"/>
+          <p:nvPr/>
+        </p:nvSpPr>
+        <p:spPr>
+          <a:xfrm>
+            <a:off x="8275320" y="3749040"/>
+            <a:ext cx="3227832" cy="420624"/>
+          </a:xfrm>
+          <a:prstGeom prst="rect">
+            <a:avLst/>
+          </a:prstGeom>
+          <a:noFill/>
+        </p:spPr>
+        <p:txBody>
+          <a:bodyPr wrap="square" lIns="0" rIns="0" tIns="0" bIns="0" anchor="t">
+            <a:spAutoFit/>
+          </a:bodyPr>
+          <a:lstStyle/>
+          <a:p>
+            <a:pPr algn="l">
+              <a:lnSpc>
+                <a:spcPct val="100000"/>
+              </a:lnSpc>
+            </a:pPr>
+            <a:r>
+              <a:rPr sz="1200" b="1" i="0">
+                <a:solidFill>
+                  <a:srgbClr val="A1A1AA"/>
+                </a:solidFill>
+                <a:latin typeface="Inter"/>
+              </a:rPr>
+              <a:t>small cells re-identify</a:t>
+            </a:r>
+          </a:p>
+        </p:txBody>
+      </p:sp>
+      <p:sp>
+        <p:nvSpPr>
+          <p:cNvPr id="24" name="Rectangle 23"/>
+          <p:cNvSpPr/>
+          <p:nvPr/>
+        </p:nvSpPr>
+        <p:spPr>
+          <a:xfrm>
+            <a:off x="685800" y="4133088"/>
+            <a:ext cx="10820095" cy="10972"/>
+          </a:xfrm>
+          <a:prstGeom prst="rect">
+            <a:avLst/>
+          </a:prstGeom>
+          <a:solidFill>
+            <a:srgbClr val="26262B"/>
+          </a:solidFill>
+          <a:ln>
+            <a:noFill/>
+          </a:ln>
+          <a:effectLst/>
+        </p:spPr>
+        <p:style>
+          <a:lnRef idx="1">
+            <a:schemeClr val="accent1"/>
+          </a:lnRef>
+          <a:fillRef idx="3">
+            <a:schemeClr val="accent1"/>
+          </a:fillRef>
+          <a:effectRef idx="2">
+            <a:schemeClr val="accent1"/>
+          </a:effectRef>
+          <a:fontRef idx="minor">
+            <a:schemeClr val="lt1"/>
+          </a:fontRef>
+        </p:style>
+        <p:txBody>
+          <a:bodyPr rtlCol="0" anchor="ctr"/>
+          <a:lstStyle/>
+          <a:p>
+            <a:pPr algn="ctr"/>
+          </a:p>
+        </p:txBody>
+      </p:sp>
+      <p:sp>
+        <p:nvSpPr>
+          <p:cNvPr id="25" name="TextBox 24"/>
+          <p:cNvSpPr txBox="1"/>
+          <p:nvPr/>
+        </p:nvSpPr>
+        <p:spPr>
+          <a:xfrm>
+            <a:off x="685800" y="4215384"/>
+            <a:ext cx="3200400" cy="420624"/>
+          </a:xfrm>
+          <a:prstGeom prst="rect">
+            <a:avLst/>
+          </a:prstGeom>
+          <a:noFill/>
+        </p:spPr>
+        <p:txBody>
+          <a:bodyPr wrap="square" lIns="0" rIns="0" tIns="0" bIns="0" anchor="t">
+            <a:spAutoFit/>
+          </a:bodyPr>
+          <a:lstStyle/>
+          <a:p>
+            <a:pPr algn="l">
+              <a:lnSpc>
+                <a:spcPct val="100000"/>
+              </a:lnSpc>
+            </a:pPr>
+            <a:r>
+              <a:rPr sz="1200" b="0" i="0">
+                <a:solidFill>
+                  <a:srgbClr val="F5F5F4"/>
+                </a:solidFill>
+                <a:latin typeface="Inter"/>
+              </a:rPr>
+              <a:t>Employer attestation</a:t>
+            </a:r>
+          </a:p>
+        </p:txBody>
+      </p:sp>
+      <p:sp>
+        <p:nvSpPr>
+          <p:cNvPr id="26" name="TextBox 25"/>
+          <p:cNvSpPr txBox="1"/>
+          <p:nvPr/>
+        </p:nvSpPr>
+        <p:spPr>
+          <a:xfrm>
+            <a:off x="3886200" y="4215384"/>
+            <a:ext cx="2286000" cy="420624"/>
+          </a:xfrm>
+          <a:prstGeom prst="rect">
+            <a:avLst/>
+          </a:prstGeom>
+          <a:noFill/>
+        </p:spPr>
+        <p:txBody>
+          <a:bodyPr wrap="square" lIns="0" rIns="0" tIns="0" bIns="0" anchor="t">
+            <a:spAutoFit/>
+          </a:bodyPr>
+          <a:lstStyle/>
+          <a:p>
+            <a:pPr algn="l">
+              <a:lnSpc>
+                <a:spcPct val="100000"/>
+              </a:lnSpc>
+            </a:pPr>
+            <a:r>
+              <a:rPr sz="1200" b="1" i="0">
+                <a:solidFill>
+                  <a:srgbClr val="EF4444"/>
+                </a:solidFill>
+                <a:latin typeface="Inter"/>
+              </a:rPr>
+              <a:t>no</a:t>
+            </a:r>
+          </a:p>
+        </p:txBody>
+      </p:sp>
+      <p:sp>
+        <p:nvSpPr>
+          <p:cNvPr id="27" name="TextBox 26"/>
+          <p:cNvSpPr txBox="1"/>
+          <p:nvPr/>
+        </p:nvSpPr>
+        <p:spPr>
+          <a:xfrm>
+            <a:off x="6172200" y="4215384"/>
+            <a:ext cx="2103120" cy="420624"/>
+          </a:xfrm>
+          <a:prstGeom prst="rect">
+            <a:avLst/>
+          </a:prstGeom>
+          <a:noFill/>
+        </p:spPr>
+        <p:txBody>
+          <a:bodyPr wrap="square" lIns="0" rIns="0" tIns="0" bIns="0" anchor="t">
+            <a:spAutoFit/>
+          </a:bodyPr>
+          <a:lstStyle/>
+          <a:p>
+            <a:pPr algn="l">
+              <a:lnSpc>
+                <a:spcPct val="100000"/>
+              </a:lnSpc>
+            </a:pPr>
+            <a:r>
+              <a:rPr sz="1200" b="1" i="0">
+                <a:solidFill>
+                  <a:srgbClr val="FACC15"/>
+                </a:solidFill>
+                <a:latin typeface="Inter"/>
+              </a:rPr>
+              <a:t>depends</a:t>
+            </a:r>
+          </a:p>
+        </p:txBody>
+      </p:sp>
+      <p:sp>
+        <p:nvSpPr>
+          <p:cNvPr id="28" name="TextBox 27"/>
+          <p:cNvSpPr txBox="1"/>
+          <p:nvPr/>
+        </p:nvSpPr>
+        <p:spPr>
+          <a:xfrm>
+            <a:off x="8275320" y="4215384"/>
+            <a:ext cx="3227832" cy="420624"/>
+          </a:xfrm>
+          <a:prstGeom prst="rect">
+            <a:avLst/>
+          </a:prstGeom>
+          <a:noFill/>
+        </p:spPr>
+        <p:txBody>
+          <a:bodyPr wrap="square" lIns="0" rIns="0" tIns="0" bIns="0" anchor="t">
+            <a:spAutoFit/>
+          </a:bodyPr>
+          <a:lstStyle/>
+          <a:p>
+            <a:pPr algn="l">
+              <a:lnSpc>
+                <a:spcPct val="100000"/>
+              </a:lnSpc>
+            </a:pPr>
+            <a:r>
+              <a:rPr sz="1200" b="1" i="0">
+                <a:solidFill>
+                  <a:srgbClr val="A1A1AA"/>
+                </a:solidFill>
+                <a:latin typeface="Inter"/>
+              </a:rPr>
+              <a:t>it is a promise</a:t>
+            </a:r>
+          </a:p>
+        </p:txBody>
+      </p:sp>
+      <p:sp>
+        <p:nvSpPr>
+          <p:cNvPr id="29" name="Rectangle 28"/>
+          <p:cNvSpPr/>
+          <p:nvPr/>
+        </p:nvSpPr>
+        <p:spPr>
+          <a:xfrm>
+            <a:off x="685800" y="4599432"/>
+            <a:ext cx="10820095" cy="10972"/>
+          </a:xfrm>
+          <a:prstGeom prst="rect">
+            <a:avLst/>
+          </a:prstGeom>
+          <a:solidFill>
+            <a:srgbClr val="26262B"/>
+          </a:solidFill>
+          <a:ln>
+            <a:noFill/>
+          </a:ln>
+          <a:effectLst/>
+        </p:spPr>
+        <p:style>
+          <a:lnRef idx="1">
+            <a:schemeClr val="accent1"/>
+          </a:lnRef>
+          <a:fillRef idx="3">
+            <a:schemeClr val="accent1"/>
+          </a:fillRef>
+          <a:effectRef idx="2">
+            <a:schemeClr val="accent1"/>
+          </a:effectRef>
+          <a:fontRef idx="minor">
+            <a:schemeClr val="lt1"/>
+          </a:fontRef>
+        </p:style>
+        <p:txBody>
+          <a:bodyPr rtlCol="0" anchor="ctr"/>
+          <a:lstStyle/>
+          <a:p>
+            <a:pPr algn="ctr"/>
+          </a:p>
+        </p:txBody>
+      </p:sp>
+      <p:sp>
+        <p:nvSpPr>
+          <p:cNvPr id="30" name="TextBox 29"/>
+          <p:cNvSpPr txBox="1"/>
+          <p:nvPr/>
+        </p:nvSpPr>
+        <p:spPr>
+          <a:xfrm>
+            <a:off x="685800" y="4681728"/>
+            <a:ext cx="3200400" cy="420624"/>
+          </a:xfrm>
+          <a:prstGeom prst="rect">
+            <a:avLst/>
+          </a:prstGeom>
+          <a:noFill/>
+        </p:spPr>
+        <p:txBody>
+          <a:bodyPr wrap="square" lIns="0" rIns="0" tIns="0" bIns="0" anchor="t">
+            <a:spAutoFit/>
+          </a:bodyPr>
+          <a:lstStyle/>
+          <a:p>
+            <a:pPr algn="l">
+              <a:lnSpc>
+                <a:spcPct val="100000"/>
+              </a:lnSpc>
+            </a:pPr>
+            <a:r>
+              <a:rPr sz="1200" b="0" i="0">
+                <a:solidFill>
+                  <a:srgbClr val="F5F5F4"/>
+                </a:solidFill>
+                <a:latin typeface="Inter"/>
+              </a:rPr>
+              <a:t>Equilux · Wave 1 winner</a:t>
+            </a:r>
+          </a:p>
+        </p:txBody>
+      </p:sp>
+      <p:sp>
+        <p:nvSpPr>
+          <p:cNvPr id="31" name="TextBox 30"/>
+          <p:cNvSpPr txBox="1"/>
+          <p:nvPr/>
+        </p:nvSpPr>
+        <p:spPr>
+          <a:xfrm>
+            <a:off x="3886200" y="4681728"/>
+            <a:ext cx="2286000" cy="420624"/>
+          </a:xfrm>
+          <a:prstGeom prst="rect">
+            <a:avLst/>
+          </a:prstGeom>
+          <a:noFill/>
+        </p:spPr>
+        <p:txBody>
+          <a:bodyPr wrap="square" lIns="0" rIns="0" tIns="0" bIns="0" anchor="t">
+            <a:spAutoFit/>
+          </a:bodyPr>
+          <a:lstStyle/>
+          <a:p>
+            <a:pPr algn="l">
+              <a:lnSpc>
+                <a:spcPct val="100000"/>
+              </a:lnSpc>
+            </a:pPr>
+            <a:r>
+              <a:rPr sz="1200" b="1" i="0">
+                <a:solidFill>
+                  <a:srgbClr val="FACC15"/>
+                </a:solidFill>
+                <a:latin typeface="Inter"/>
+              </a:rPr>
+              <a:t>partial</a:t>
+            </a:r>
+          </a:p>
+        </p:txBody>
+      </p:sp>
+      <p:sp>
+        <p:nvSpPr>
+          <p:cNvPr id="32" name="TextBox 31"/>
+          <p:cNvSpPr txBox="1"/>
+          <p:nvPr/>
+        </p:nvSpPr>
+        <p:spPr>
+          <a:xfrm>
+            <a:off x="6172200" y="4681728"/>
+            <a:ext cx="2103120" cy="420624"/>
+          </a:xfrm>
+          <a:prstGeom prst="rect">
+            <a:avLst/>
+          </a:prstGeom>
+          <a:noFill/>
+        </p:spPr>
+        <p:txBody>
+          <a:bodyPr wrap="square" lIns="0" rIns="0" tIns="0" bIns="0" anchor="t">
+            <a:spAutoFit/>
+          </a:bodyPr>
+          <a:lstStyle/>
+          <a:p>
+            <a:pPr algn="l">
+              <a:lnSpc>
+                <a:spcPct val="100000"/>
+              </a:lnSpc>
+            </a:pPr>
+            <a:r>
+              <a:rPr sz="1200" b="1" i="0">
+                <a:solidFill>
+                  <a:srgbClr val="FACC15"/>
+                </a:solidFill>
+                <a:latin typeface="Inter"/>
+              </a:rPr>
+              <a:t>partial</a:t>
+            </a:r>
+          </a:p>
+        </p:txBody>
+      </p:sp>
+      <p:sp>
+        <p:nvSpPr>
+          <p:cNvPr id="33" name="TextBox 32"/>
+          <p:cNvSpPr txBox="1"/>
+          <p:nvPr/>
+        </p:nvSpPr>
+        <p:spPr>
+          <a:xfrm>
+            <a:off x="8275320" y="4681728"/>
+            <a:ext cx="3227832" cy="420624"/>
+          </a:xfrm>
+          <a:prstGeom prst="rect">
+            <a:avLst/>
+          </a:prstGeom>
+          <a:noFill/>
+        </p:spPr>
+        <p:txBody>
+          <a:bodyPr wrap="square" lIns="0" rIns="0" tIns="0" bIns="0" anchor="t">
+            <a:spAutoFit/>
+          </a:bodyPr>
+          <a:lstStyle/>
+          <a:p>
+            <a:pPr algn="l">
+              <a:lnSpc>
+                <a:spcPct val="100000"/>
+              </a:lnSpc>
+            </a:pPr>
+            <a:r>
+              <a:rPr sz="1200" b="1" i="0">
+                <a:solidFill>
+                  <a:srgbClr val="A1A1AA"/>
+                </a:solidFill>
+                <a:latin typeface="Inter"/>
+              </a:rPr>
+              <a:t>12 circuits; judge asked for an HRIS plugin</a:t>
+            </a:r>
+          </a:p>
+        </p:txBody>
+      </p:sp>
+      <p:sp>
+        <p:nvSpPr>
+          <p:cNvPr id="34" name="Rectangle 33"/>
+          <p:cNvSpPr/>
+          <p:nvPr/>
+        </p:nvSpPr>
+        <p:spPr>
+          <a:xfrm>
+            <a:off x="685800" y="5065776"/>
+            <a:ext cx="10820095" cy="10972"/>
+          </a:xfrm>
+          <a:prstGeom prst="rect">
+            <a:avLst/>
+          </a:prstGeom>
+          <a:solidFill>
+            <a:srgbClr val="26262B"/>
+          </a:solidFill>
+          <a:ln>
+            <a:noFill/>
+          </a:ln>
+          <a:effectLst/>
+        </p:spPr>
+        <p:style>
+          <a:lnRef idx="1">
+            <a:schemeClr val="accent1"/>
+          </a:lnRef>
+          <a:fillRef idx="3">
+            <a:schemeClr val="accent1"/>
+          </a:fillRef>
+          <a:effectRef idx="2">
+            <a:schemeClr val="accent1"/>
+          </a:effectRef>
+          <a:fontRef idx="minor">
+            <a:schemeClr val="lt1"/>
+          </a:fontRef>
+        </p:style>
+        <p:txBody>
+          <a:bodyPr rtlCol="0" anchor="ctr"/>
+          <a:lstStyle/>
+          <a:p>
+            <a:pPr algn="ctr"/>
+          </a:p>
+        </p:txBody>
+      </p:sp>
+      <p:sp>
+        <p:nvSpPr>
+          <p:cNvPr id="35" name="TextBox 34"/>
+          <p:cNvSpPr txBox="1"/>
+          <p:nvPr/>
+        </p:nvSpPr>
+        <p:spPr>
+          <a:xfrm>
+            <a:off x="685800" y="5148072"/>
+            <a:ext cx="3200400" cy="420624"/>
+          </a:xfrm>
+          <a:prstGeom prst="rect">
+            <a:avLst/>
+          </a:prstGeom>
+          <a:noFill/>
+        </p:spPr>
+        <p:txBody>
+          <a:bodyPr wrap="square" lIns="0" rIns="0" tIns="0" bIns="0" anchor="t">
+            <a:spAutoFit/>
+          </a:bodyPr>
+          <a:lstStyle/>
+          <a:p>
+            <a:pPr algn="l">
+              <a:lnSpc>
+                <a:spcPct val="100000"/>
+              </a:lnSpc>
+            </a:pPr>
+            <a:r>
+              <a:rPr sz="1200" b="0" i="0">
+                <a:solidFill>
+                  <a:srgbClr val="F5F5F4"/>
+                </a:solidFill>
+                <a:latin typeface="Inter"/>
+              </a:rPr>
+              <a:t>GotIt</a:t>
+            </a:r>
+          </a:p>
+        </p:txBody>
+      </p:sp>
+      <p:sp>
+        <p:nvSpPr>
+          <p:cNvPr id="36" name="TextBox 35"/>
+          <p:cNvSpPr txBox="1"/>
+          <p:nvPr/>
+        </p:nvSpPr>
+        <p:spPr>
+          <a:xfrm>
+            <a:off x="3886200" y="5148072"/>
+            <a:ext cx="2286000" cy="420624"/>
+          </a:xfrm>
+          <a:prstGeom prst="rect">
+            <a:avLst/>
+          </a:prstGeom>
+          <a:noFill/>
+        </p:spPr>
+        <p:txBody>
+          <a:bodyPr wrap="square" lIns="0" rIns="0" tIns="0" bIns="0" anchor="t">
+            <a:spAutoFit/>
+          </a:bodyPr>
+          <a:lstStyle/>
+          <a:p>
+            <a:pPr algn="l">
+              <a:lnSpc>
+                <a:spcPct val="100000"/>
+              </a:lnSpc>
+            </a:pPr>
+            <a:r>
+              <a:rPr sz="1200" b="1" i="0">
+                <a:solidFill>
+                  <a:srgbClr val="22C55E"/>
+                </a:solidFill>
+                <a:latin typeface="Inter"/>
+              </a:rPr>
+              <a:t>yes</a:t>
+            </a:r>
+          </a:p>
+        </p:txBody>
+      </p:sp>
+      <p:sp>
+        <p:nvSpPr>
+          <p:cNvPr id="37" name="TextBox 36"/>
+          <p:cNvSpPr txBox="1"/>
+          <p:nvPr/>
+        </p:nvSpPr>
+        <p:spPr>
+          <a:xfrm>
+            <a:off x="6172200" y="5148072"/>
+            <a:ext cx="2103120" cy="420624"/>
+          </a:xfrm>
+          <a:prstGeom prst="rect">
+            <a:avLst/>
+          </a:prstGeom>
+          <a:noFill/>
+        </p:spPr>
+        <p:txBody>
+          <a:bodyPr wrap="square" lIns="0" rIns="0" tIns="0" bIns="0" anchor="t">
+            <a:spAutoFit/>
+          </a:bodyPr>
+          <a:lstStyle/>
+          <a:p>
+            <a:pPr algn="l">
+              <a:lnSpc>
+                <a:spcPct val="100000"/>
+              </a:lnSpc>
+            </a:pPr>
+            <a:r>
+              <a:rPr sz="1200" b="1" i="0">
+                <a:solidFill>
+                  <a:srgbClr val="22C55E"/>
+                </a:solidFill>
+                <a:latin typeface="Inter"/>
+              </a:rPr>
+              <a:t>yes</a:t>
+            </a:r>
+          </a:p>
+        </p:txBody>
+      </p:sp>
+      <p:sp>
+        <p:nvSpPr>
+          <p:cNvPr id="38" name="TextBox 37"/>
+          <p:cNvSpPr txBox="1"/>
+          <p:nvPr/>
+        </p:nvSpPr>
+        <p:spPr>
+          <a:xfrm>
+            <a:off x="8275320" y="5148072"/>
+            <a:ext cx="3227832" cy="420624"/>
+          </a:xfrm>
+          <a:prstGeom prst="rect">
+            <a:avLst/>
+          </a:prstGeom>
+          <a:noFill/>
+        </p:spPr>
+        <p:txBody>
+          <a:bodyPr wrap="square" lIns="0" rIns="0" tIns="0" bIns="0" anchor="t">
+            <a:spAutoFit/>
+          </a:bodyPr>
+          <a:lstStyle/>
+          <a:p>
+            <a:pPr algn="l">
+              <a:lnSpc>
+                <a:spcPct val="100000"/>
+              </a:lnSpc>
+            </a:pPr>
+            <a:r>
+              <a:rPr sz="1200" b="1" i="0">
+                <a:solidFill>
+                  <a:srgbClr val="22C55E"/>
+                </a:solidFill>
+                <a:latin typeface="Inter"/>
+              </a:rPr>
+              <a:t>verified, gated in-circuit</a:t>
+            </a:r>
+          </a:p>
+        </p:txBody>
+      </p:sp>
+      <p:sp>
+        <p:nvSpPr>
+          <p:cNvPr id="39" name="TextBox 38"/>
+          <p:cNvSpPr txBox="1"/>
+          <p:nvPr/>
+        </p:nvSpPr>
+        <p:spPr>
+          <a:xfrm>
+            <a:off x="685800" y="5440680"/>
+            <a:ext cx="10820095" cy="640080"/>
+          </a:xfrm>
+          <a:prstGeom prst="rect">
+            <a:avLst/>
+          </a:prstGeom>
+          <a:noFill/>
+        </p:spPr>
+        <p:txBody>
+          <a:bodyPr wrap="square" lIns="0" rIns="0" tIns="0" bIns="0" anchor="t">
+            <a:spAutoFit/>
+          </a:bodyPr>
+          <a:lstStyle/>
+          <a:p>
+            <a:pPr algn="l">
+              <a:lnSpc>
+                <a:spcPct val="145000"/>
+              </a:lnSpc>
+            </a:pPr>
+            <a:r>
+              <a:rPr sz="1200" b="0" i="0">
+                <a:solidFill>
+                  <a:srgbClr val="71717A"/>
+                </a:solidFill>
+                <a:latin typeface="Inter"/>
+              </a:rPr>
+              <a:t>The honest gap: our issuer still learns who works where. It cannot link a person to their figure, because it never receives the secret that derives the nullifier — but removing it entirely is Wave 3.</a:t>
+            </a:r>
+          </a:p>
+        </p:txBody>
+      </p:sp>
+      <p:sp>
+        <p:nvSpPr>
+          <p:cNvPr id="40" name="Rectangle 39"/>
+          <p:cNvSpPr/>
+          <p:nvPr/>
+        </p:nvSpPr>
+        <p:spPr>
+          <a:xfrm>
+            <a:off x="685800" y="6291072"/>
+            <a:ext cx="10820095" cy="10972"/>
+          </a:xfrm>
+          <a:prstGeom prst="rect">
+            <a:avLst/>
+          </a:prstGeom>
+          <a:solidFill>
+            <a:srgbClr val="26262B"/>
+          </a:solidFill>
+          <a:ln>
+            <a:noFill/>
+          </a:ln>
+          <a:effectLst/>
+        </p:spPr>
+        <p:style>
+          <a:lnRef idx="1">
+            <a:schemeClr val="accent1"/>
+          </a:lnRef>
+          <a:fillRef idx="3">
+            <a:schemeClr val="accent1"/>
+          </a:fillRef>
+          <a:effectRef idx="2">
+            <a:schemeClr val="accent1"/>
+          </a:effectRef>
+          <a:fontRef idx="minor">
+            <a:schemeClr val="lt1"/>
+          </a:fontRef>
+        </p:style>
+        <p:txBody>
+          <a:bodyPr rtlCol="0" anchor="ctr"/>
+          <a:lstStyle/>
+          <a:p>
+            <a:pPr algn="ctr"/>
+          </a:p>
+        </p:txBody>
+      </p:sp>
+      <p:sp>
+        <p:nvSpPr>
+          <p:cNvPr id="41" name="TextBox 40"/>
           <p:cNvSpPr txBox="1"/>
           <p:nvPr/>
         </p:nvSpPr>
@@ -11661,7 +12632,7 @@
       </p:sp>
       <p:sp>
         <p:nvSpPr>
-          <p:cNvPr id="15" name="TextBox 14"/>
+          <p:cNvPr id="42" name="TextBox 41"/>
           <p:cNvSpPr txBox="1"/>
           <p:nvPr/>
         </p:nvSpPr>
@@ -11790,11 +12761,11 @@
             <a:r>
               <a:rPr sz="1100" b="1" i="0">
                 <a:solidFill>
-                  <a:srgbClr val="FACC15"/>
-                </a:solidFill>
-                <a:latin typeface="Inter"/>
-              </a:rPr>
-              <a:t>HOW WE LOST WAVE 1</a:t>
+                  <a:srgbClr val="71717A"/>
+                </a:solidFill>
+                <a:latin typeface="Inter"/>
+              </a:rPr>
+              <a:t>CHALLENGES</a:t>
             </a:r>
           </a:p>
         </p:txBody>
@@ -11827,56 +12798,36 @@
               </a:lnSpc>
             </a:pPr>
             <a:r>
-              <a:rPr sz="2800" b="1" i="0">
+              <a:rPr sz="3100" b="1" i="0">
                 <a:solidFill>
                   <a:srgbClr val="F5F5F4"/>
                 </a:solidFill>
                 <a:latin typeface="Fraunces"/>
               </a:rPr>
-              <a:t>We scored zero of 159. The build was fine.</a:t>
-            </a:r>
-          </a:p>
-          <a:p>
-            <a:pPr algn="l">
-              <a:lnSpc>
-                <a:spcPct val="108000"/>
-              </a:lnSpc>
-            </a:pPr>
-            <a:r>
-              <a:rPr sz="2800" b="1" i="0">
-                <a:solidFill>
-                  <a:srgbClr val="F5F5F4"/>
-                </a:solidFill>
-                <a:latin typeface="Fraunces"/>
-              </a:rPr>
-              <a:t>The submission was not.</a:t>
-            </a:r>
-          </a:p>
-        </p:txBody>
-      </p:sp>
-      <p:sp>
-        <p:nvSpPr>
-          <p:cNvPr id="5" name="Rounded Rectangle 4"/>
+              <a:t>Five things that were genuinely hard.</a:t>
+            </a:r>
+          </a:p>
+        </p:txBody>
+      </p:sp>
+      <p:sp>
+        <p:nvSpPr>
+          <p:cNvPr id="5" name="Rectangle 4"/>
           <p:cNvSpPr/>
           <p:nvPr/>
         </p:nvSpPr>
         <p:spPr>
           <a:xfrm>
-            <a:off x="685800" y="2148840"/>
-            <a:ext cx="3520440" cy="2286000"/>
-          </a:xfrm>
-          <a:prstGeom prst="roundRect">
-            <a:avLst>
-              <a:gd name="adj" fmla="val 6000"/>
-            </a:avLst>
+            <a:off x="685800" y="2029968"/>
+            <a:ext cx="68580" cy="68580"/>
+          </a:xfrm>
+          <a:prstGeom prst="rect">
+            <a:avLst/>
           </a:prstGeom>
           <a:solidFill>
-            <a:srgbClr val="121214"/>
+            <a:srgbClr val="FACC15"/>
           </a:solidFill>
-          <a:ln w="12700">
-            <a:solidFill>
-              <a:srgbClr val="26262B"/>
-            </a:solidFill>
+          <a:ln>
+            <a:noFill/>
           </a:ln>
           <a:effectLst/>
         </p:spPr>
@@ -11910,99 +12861,65 @@
         </p:nvSpPr>
         <p:spPr>
           <a:xfrm>
-            <a:off x="941832" y="2423160"/>
-            <a:ext cx="3008376" cy="457200"/>
-          </a:xfrm>
-          <a:prstGeom prst="rect">
-            <a:avLst/>
-          </a:prstGeom>
-          <a:noFill/>
-        </p:spPr>
-        <p:txBody>
-          <a:bodyPr wrap="square" lIns="0" rIns="0" tIns="0" bIns="0" anchor="t">
-            <a:spAutoFit/>
-          </a:bodyPr>
-          <a:lstStyle/>
-          <a:p>
-            <a:pPr algn="l">
-              <a:lnSpc>
-                <a:spcPct val="125000"/>
-              </a:lnSpc>
-            </a:pPr>
-            <a:r>
-              <a:rPr sz="1500" b="1" i="0">
-                <a:solidFill>
-                  <a:srgbClr val="EF4444"/>
-                </a:solidFill>
-                <a:latin typeface="Inter"/>
-              </a:rPr>
-              <a:t>An empty section</a:t>
-            </a:r>
-          </a:p>
-        </p:txBody>
-      </p:sp>
-      <p:sp>
-        <p:nvSpPr>
-          <p:cNvPr id="7" name="TextBox 6"/>
-          <p:cNvSpPr txBox="1"/>
-          <p:nvPr/>
-        </p:nvSpPr>
-        <p:spPr>
-          <a:xfrm>
-            <a:off x="941832" y="3017520"/>
-            <a:ext cx="3008376" cy="1280160"/>
-          </a:xfrm>
-          <a:prstGeom prst="rect">
-            <a:avLst/>
-          </a:prstGeom>
-          <a:noFill/>
-        </p:spPr>
-        <p:txBody>
-          <a:bodyPr wrap="square" lIns="0" rIns="0" tIns="0" bIns="0" anchor="t">
-            <a:spAutoFit/>
-          </a:bodyPr>
-          <a:lstStyle/>
-          <a:p>
-            <a:pPr algn="l">
-              <a:lnSpc>
-                <a:spcPct val="145000"/>
-              </a:lnSpc>
-            </a:pPr>
-            <a:r>
-              <a:rPr sz="1150" b="0" i="0">
+            <a:off x="886968" y="1938528"/>
+            <a:ext cx="10618927" cy="457200"/>
+          </a:xfrm>
+          <a:prstGeom prst="rect">
+            <a:avLst/>
+          </a:prstGeom>
+          <a:noFill/>
+        </p:spPr>
+        <p:txBody>
+          <a:bodyPr wrap="square" lIns="0" rIns="0" tIns="0" bIns="0">
+            <a:spAutoFit/>
+          </a:bodyPr>
+          <a:lstStyle/>
+          <a:p>
+            <a:pPr>
+              <a:lnSpc>
+                <a:spcPct val="135000"/>
+              </a:lnSpc>
+            </a:pPr>
+            <a:r>
+              <a:rPr sz="1300" b="1">
+                <a:solidFill>
+                  <a:srgbClr val="F5F5F4"/>
+                </a:solidFill>
+                <a:latin typeface="Inter"/>
+              </a:rPr>
+              <a:t>Counting meant giving up a Counter. </a:t>
+            </a:r>
+            <a:r>
+              <a:rPr sz="1300">
                 <a:solidFill>
                   <a:srgbClr val="A1A1AA"/>
                 </a:solidFill>
                 <a:latin typeface="Inter"/>
               </a:rPr>
-              <a:t>Our “Challenges I ran into” section shipped as five bold headings with no text under them — the only one of 159 like it. Nobody re-reads their own pitch like a judge does.</a:t>
-            </a:r>
-          </a:p>
-        </p:txBody>
-      </p:sp>
-      <p:sp>
-        <p:nvSpPr>
-          <p:cNvPr id="8" name="Rounded Rectangle 7"/>
+              <a:t>Counter is not readable inside Compact 0.23 circuits — the contract could count but never report. Replaced with a readable singleton cell.</a:t>
+            </a:r>
+          </a:p>
+        </p:txBody>
+      </p:sp>
+      <p:sp>
+        <p:nvSpPr>
+          <p:cNvPr id="7" name="Rectangle 6"/>
           <p:cNvSpPr/>
           <p:nvPr/>
         </p:nvSpPr>
         <p:spPr>
           <a:xfrm>
-            <a:off x="4526280" y="2148840"/>
-            <a:ext cx="3520440" cy="2286000"/>
-          </a:xfrm>
-          <a:prstGeom prst="roundRect">
-            <a:avLst>
-              <a:gd name="adj" fmla="val 6000"/>
-            </a:avLst>
+            <a:off x="685800" y="2779776"/>
+            <a:ext cx="68580" cy="68580"/>
+          </a:xfrm>
+          <a:prstGeom prst="rect">
+            <a:avLst/>
           </a:prstGeom>
           <a:solidFill>
-            <a:srgbClr val="121214"/>
+            <a:srgbClr val="FACC15"/>
           </a:solidFill>
-          <a:ln w="12700">
-            <a:solidFill>
-              <a:srgbClr val="26262B"/>
-            </a:solidFill>
+          <a:ln>
+            <a:noFill/>
           </a:ln>
           <a:effectLst/>
         </p:spPr>
@@ -12030,105 +12947,71 @@
       </p:sp>
       <p:sp>
         <p:nvSpPr>
-          <p:cNvPr id="9" name="TextBox 8"/>
-          <p:cNvSpPr txBox="1"/>
-          <p:nvPr/>
-        </p:nvSpPr>
-        <p:spPr>
-          <a:xfrm>
-            <a:off x="4782312" y="2423160"/>
-            <a:ext cx="3008376" cy="457200"/>
-          </a:xfrm>
-          <a:prstGeom prst="rect">
-            <a:avLst/>
-          </a:prstGeom>
-          <a:noFill/>
-        </p:spPr>
-        <p:txBody>
-          <a:bodyPr wrap="square" lIns="0" rIns="0" tIns="0" bIns="0" anchor="t">
-            <a:spAutoFit/>
-          </a:bodyPr>
-          <a:lstStyle/>
-          <a:p>
-            <a:pPr algn="l">
-              <a:lnSpc>
-                <a:spcPct val="125000"/>
-              </a:lnSpc>
-            </a:pPr>
-            <a:r>
-              <a:rPr sz="1500" b="1" i="0">
-                <a:solidFill>
-                  <a:srgbClr val="EF4444"/>
-                </a:solidFill>
-                <a:latin typeface="Inter"/>
-              </a:rPr>
-              <a:t>A placeholder profile</a:t>
-            </a:r>
-          </a:p>
-        </p:txBody>
-      </p:sp>
-      <p:sp>
-        <p:nvSpPr>
-          <p:cNvPr id="10" name="TextBox 9"/>
-          <p:cNvSpPr txBox="1"/>
-          <p:nvPr/>
-        </p:nvSpPr>
-        <p:spPr>
-          <a:xfrm>
-            <a:off x="4782312" y="3017520"/>
-            <a:ext cx="3008376" cy="1280160"/>
-          </a:xfrm>
-          <a:prstGeom prst="rect">
-            <a:avLst/>
-          </a:prstGeom>
-          <a:noFill/>
-        </p:spPr>
-        <p:txBody>
-          <a:bodyPr wrap="square" lIns="0" rIns="0" tIns="0" bIns="0" anchor="t">
-            <a:spAutoFit/>
-          </a:bodyPr>
-          <a:lstStyle/>
-          <a:p>
-            <a:pPr algn="l">
-              <a:lnSpc>
-                <a:spcPct val="145000"/>
-              </a:lnSpc>
-            </a:pPr>
-            <a:r>
-              <a:rPr sz="1150" b="0" i="0">
+          <p:cNvPr id="8" name="TextBox 7"/>
+          <p:cNvSpPr txBox="1"/>
+          <p:nvPr/>
+        </p:nvSpPr>
+        <p:spPr>
+          <a:xfrm>
+            <a:off x="886968" y="2688336"/>
+            <a:ext cx="10618927" cy="457200"/>
+          </a:xfrm>
+          <a:prstGeom prst="rect">
+            <a:avLst/>
+          </a:prstGeom>
+          <a:noFill/>
+        </p:spPr>
+        <p:txBody>
+          <a:bodyPr wrap="square" lIns="0" rIns="0" tIns="0" bIns="0">
+            <a:spAutoFit/>
+          </a:bodyPr>
+          <a:lstStyle/>
+          <a:p>
+            <a:pPr>
+              <a:lnSpc>
+                <a:spcPct val="135000"/>
+              </a:lnSpc>
+            </a:pPr>
+            <a:r>
+              <a:rPr sz="1300" b="1">
+                <a:solidFill>
+                  <a:srgbClr val="F5F5F4"/>
+                </a:solidFill>
+                <a:latin typeface="Inter"/>
+              </a:rPr>
+              <a:t>A bucketed mean is not a mean. </a:t>
+            </a:r>
+            <a:r>
+              <a:rPr sz="1300">
                 <a:solidFill>
                   <a:srgbClr val="A1A1AA"/>
                 </a:solidFill>
                 <a:latin typeface="Inter"/>
               </a:rPr>
-              <a:t>Community bio: “chill but cool.” No website, no socials. All seven funded teams had a website.</a:t>
-            </a:r>
-          </a:p>
-        </p:txBody>
-      </p:sp>
-      <p:sp>
-        <p:nvSpPr>
-          <p:cNvPr id="11" name="Rounded Rectangle 10"/>
+              <a:t>The first version published point estimates. $124,900 and $100,000 land in the same bucket but are not the same number. Every mean and gap is now an interval.</a:t>
+            </a:r>
+          </a:p>
+        </p:txBody>
+      </p:sp>
+      <p:sp>
+        <p:nvSpPr>
+          <p:cNvPr id="9" name="Rectangle 8"/>
           <p:cNvSpPr/>
           <p:nvPr/>
         </p:nvSpPr>
         <p:spPr>
           <a:xfrm>
-            <a:off x="8366760" y="2148840"/>
-            <a:ext cx="3520440" cy="2286000"/>
-          </a:xfrm>
-          <a:prstGeom prst="roundRect">
-            <a:avLst>
-              <a:gd name="adj" fmla="val 6000"/>
-            </a:avLst>
+            <a:off x="685800" y="3529584"/>
+            <a:ext cx="68580" cy="68580"/>
+          </a:xfrm>
+          <a:prstGeom prst="rect">
+            <a:avLst/>
           </a:prstGeom>
           <a:solidFill>
-            <a:srgbClr val="121214"/>
+            <a:srgbClr val="FACC15"/>
           </a:solidFill>
-          <a:ln w="12700">
-            <a:solidFill>
-              <a:srgbClr val="26262B"/>
-            </a:solidFill>
+          <a:ln>
+            <a:noFill/>
           </a:ln>
           <a:effectLst/>
         </p:spPr>
@@ -12156,105 +13039,71 @@
       </p:sp>
       <p:sp>
         <p:nvSpPr>
-          <p:cNvPr id="12" name="TextBox 11"/>
-          <p:cNvSpPr txBox="1"/>
-          <p:nvPr/>
-        </p:nvSpPr>
-        <p:spPr>
-          <a:xfrm>
-            <a:off x="8622792" y="2423160"/>
-            <a:ext cx="3008376" cy="457200"/>
-          </a:xfrm>
-          <a:prstGeom prst="rect">
-            <a:avLst/>
-          </a:prstGeom>
-          <a:noFill/>
-        </p:spPr>
-        <p:txBody>
-          <a:bodyPr wrap="square" lIns="0" rIns="0" tIns="0" bIns="0" anchor="t">
-            <a:spAutoFit/>
-          </a:bodyPr>
-          <a:lstStyle/>
-          <a:p>
-            <a:pPr algn="l">
-              <a:lnSpc>
-                <a:spcPct val="125000"/>
-              </a:lnSpc>
-            </a:pPr>
-            <a:r>
-              <a:rPr sz="1500" b="1" i="0">
-                <a:solidFill>
-                  <a:srgbClr val="EF4444"/>
-                </a:solidFill>
-                <a:latin typeface="Inter"/>
-              </a:rPr>
-              <a:t>One tag, wrong category</a:t>
-            </a:r>
-          </a:p>
-        </p:txBody>
-      </p:sp>
-      <p:sp>
-        <p:nvSpPr>
-          <p:cNvPr id="13" name="TextBox 12"/>
-          <p:cNvSpPr txBox="1"/>
-          <p:nvPr/>
-        </p:nvSpPr>
-        <p:spPr>
-          <a:xfrm>
-            <a:off x="8622792" y="3017520"/>
-            <a:ext cx="3008376" cy="1280160"/>
-          </a:xfrm>
-          <a:prstGeom prst="rect">
-            <a:avLst/>
-          </a:prstGeom>
-          <a:noFill/>
-        </p:spPr>
-        <p:txBody>
-          <a:bodyPr wrap="square" lIns="0" rIns="0" tIns="0" bIns="0" anchor="t">
-            <a:spAutoFit/>
-          </a:bodyPr>
-          <a:lstStyle/>
-          <a:p>
-            <a:pPr algn="l">
-              <a:lnSpc>
-                <a:spcPct val="145000"/>
-              </a:lnSpc>
-            </a:pPr>
-            <a:r>
-              <a:rPr sz="1150" b="0" i="0">
+          <p:cNvPr id="10" name="TextBox 9"/>
+          <p:cNvSpPr txBox="1"/>
+          <p:nvPr/>
+        </p:nvSpPr>
+        <p:spPr>
+          <a:xfrm>
+            <a:off x="886968" y="3438144"/>
+            <a:ext cx="10618927" cy="457200"/>
+          </a:xfrm>
+          <a:prstGeom prst="rect">
+            <a:avLst/>
+          </a:prstGeom>
+          <a:noFill/>
+        </p:spPr>
+        <p:txBody>
+          <a:bodyPr wrap="square" lIns="0" rIns="0" tIns="0" bIns="0">
+            <a:spAutoFit/>
+          </a:bodyPr>
+          <a:lstStyle/>
+          <a:p>
+            <a:pPr>
+              <a:lnSpc>
+                <a:spcPct val="135000"/>
+              </a:lnSpc>
+            </a:pPr>
+            <a:r>
+              <a:rPr sz="1300" b="1">
+                <a:solidFill>
+                  <a:srgbClr val="F5F5F4"/>
+                </a:solidFill>
+                <a:latin typeface="Inter"/>
+              </a:rPr>
+              <a:t>A midpoint is not a defensible materiality test. </a:t>
+            </a:r>
+            <a:r>
+              <a:rPr sz="1300">
                 <a:solidFill>
                   <a:srgbClr val="A1A1AA"/>
                 </a:solidFill>
                 <a:latin typeface="Inter"/>
               </a:rPr>
-              <a:t>A single `TypeScript` tag, filed under the most crowded category. The field median was five tags.</a:t>
-            </a:r>
-          </a:p>
-        </p:txBody>
-      </p:sp>
-      <p:sp>
-        <p:nvSpPr>
-          <p:cNvPr id="14" name="Rounded Rectangle 13"/>
+              <a:t>Flagging against a midpoint would cry wolf on a compliant category and trigger a joint pay assessment. Only a proven 5% disparity counts.</a:t>
+            </a:r>
+          </a:p>
+        </p:txBody>
+      </p:sp>
+      <p:sp>
+        <p:nvSpPr>
+          <p:cNvPr id="11" name="Rectangle 10"/>
           <p:cNvSpPr/>
           <p:nvPr/>
         </p:nvSpPr>
         <p:spPr>
           <a:xfrm>
-            <a:off x="685800" y="4754880"/>
-            <a:ext cx="10820095" cy="960120"/>
-          </a:xfrm>
-          <a:prstGeom prst="roundRect">
-            <a:avLst>
-              <a:gd name="adj" fmla="val 6000"/>
-            </a:avLst>
+            <a:off x="685800" y="4279392"/>
+            <a:ext cx="68580" cy="68580"/>
+          </a:xfrm>
+          <a:prstGeom prst="rect">
+            <a:avLst/>
           </a:prstGeom>
           <a:solidFill>
-            <a:srgbClr val="1A1A1E"/>
+            <a:srgbClr val="FACC15"/>
           </a:solidFill>
-          <a:ln w="12700">
-            <a:solidFill>
-              <a:srgbClr val="26262B"/>
-            </a:solidFill>
+          <a:ln>
+            <a:noFill/>
           </a:ln>
           <a:effectLst/>
         </p:spPr>
@@ -12282,85 +13131,55 @@
       </p:sp>
       <p:sp>
         <p:nvSpPr>
-          <p:cNvPr id="15" name="TextBox 14"/>
-          <p:cNvSpPr txBox="1"/>
-          <p:nvPr/>
-        </p:nvSpPr>
-        <p:spPr>
-          <a:xfrm>
-            <a:off x="978408" y="4919472"/>
-            <a:ext cx="10234879" cy="548640"/>
-          </a:xfrm>
-          <a:prstGeom prst="rect">
-            <a:avLst/>
-          </a:prstGeom>
-          <a:noFill/>
-        </p:spPr>
-        <p:txBody>
-          <a:bodyPr wrap="square" lIns="0" rIns="0" tIns="0" bIns="0" anchor="t">
-            <a:spAutoFit/>
-          </a:bodyPr>
-          <a:lstStyle/>
-          <a:p>
-            <a:pPr algn="l">
+          <p:cNvPr id="12" name="TextBox 11"/>
+          <p:cNvSpPr txBox="1"/>
+          <p:nvPr/>
+        </p:nvSpPr>
+        <p:spPr>
+          <a:xfrm>
+            <a:off x="886968" y="4187952"/>
+            <a:ext cx="10618927" cy="457200"/>
+          </a:xfrm>
+          <a:prstGeom prst="rect">
+            <a:avLst/>
+          </a:prstGeom>
+          <a:noFill/>
+        </p:spPr>
+        <p:txBody>
+          <a:bodyPr wrap="square" lIns="0" rIns="0" tIns="0" bIns="0">
+            <a:spAutoFit/>
+          </a:bodyPr>
+          <a:lstStyle/>
+          <a:p>
+            <a:pPr>
               <a:lnSpc>
                 <a:spcPct val="135000"/>
               </a:lnSpc>
             </a:pPr>
             <a:r>
-              <a:rPr sz="1250" b="0" i="0">
+              <a:rPr sz="1300" b="1">
                 <a:solidFill>
                   <a:srgbClr val="F5F5F4"/>
                 </a:solidFill>
                 <a:latin typeface="Inter"/>
               </a:rPr>
-              <a:t>What changed: a pre-submission gate now fails a pitch with an empty section, a jargon tagline, too few tags or a missing community link. It reports 21 errors against our real Wave 1 draft.</a:t>
-            </a:r>
-          </a:p>
-        </p:txBody>
-      </p:sp>
-      <p:sp>
-        <p:nvSpPr>
-          <p:cNvPr id="16" name="TextBox 15"/>
-          <p:cNvSpPr txBox="1"/>
-          <p:nvPr/>
-        </p:nvSpPr>
-        <p:spPr>
-          <a:xfrm>
-            <a:off x="978408" y="5504688"/>
-            <a:ext cx="10234879" cy="256032"/>
-          </a:xfrm>
-          <a:prstGeom prst="rect">
-            <a:avLst/>
-          </a:prstGeom>
-          <a:noFill/>
-        </p:spPr>
-        <p:txBody>
-          <a:bodyPr wrap="square" lIns="0" rIns="0" tIns="0" bIns="0" anchor="t">
-            <a:spAutoFit/>
-          </a:bodyPr>
-          <a:lstStyle/>
-          <a:p>
-            <a:pPr algn="l">
-              <a:lnSpc>
-                <a:spcPct val="125000"/>
-              </a:lnSpc>
-            </a:pPr>
-            <a:r>
-              <a:rPr sz="1100" b="0" i="0">
-                <a:solidFill>
-                  <a:srgbClr val="71717A"/>
-                </a:solidFill>
-                <a:latin typeface="Inter"/>
-              </a:rPr>
-              <a:t>The post-mortem is in the repo: docs/WAVE1-POSTMORTEM.md</a:t>
-            </a:r>
-          </a:p>
-        </p:txBody>
-      </p:sp>
-      <p:sp>
-        <p:nvSpPr>
-          <p:cNvPr id="17" name="Rectangle 16"/>
+              <a:t>Hash parity between the browser and the circuits. </a:t>
+            </a:r>
+            <a:r>
+              <a:rPr sz="1300">
+                <a:solidFill>
+                  <a:srgbClr val="A1A1AA"/>
+                </a:solidFill>
+                <a:latin typeface="Inter"/>
+              </a:rPr>
+              <a:t>One drift and a salary lands in the wrong cell, silently. 34 tests run the generated contract to make it impossible.</a:t>
+            </a:r>
+          </a:p>
+        </p:txBody>
+      </p:sp>
+      <p:sp>
+        <p:nvSpPr>
+          <p:cNvPr id="13" name="Rectangle 12"/>
           <p:cNvSpPr/>
           <p:nvPr/>
         </p:nvSpPr>
@@ -12404,7 +13223,7 @@
       </p:sp>
       <p:sp>
         <p:nvSpPr>
-          <p:cNvPr id="18" name="TextBox 17"/>
+          <p:cNvPr id="14" name="TextBox 13"/>
           <p:cNvSpPr txBox="1"/>
           <p:nvPr/>
         </p:nvSpPr>
@@ -12443,7 +13262,7 @@
       </p:sp>
       <p:sp>
         <p:nvSpPr>
-          <p:cNvPr id="19" name="TextBox 18"/>
+          <p:cNvPr id="15" name="TextBox 14"/>
           <p:cNvSpPr txBox="1"/>
           <p:nvPr/>
         </p:nvSpPr>
@@ -12477,6 +13296,98 @@
               </a:rPr>
               <a:t>9</a:t>
             </a:r>
+          </a:p>
+        </p:txBody>
+      </p:sp>
+      <p:sp>
+        <p:nvSpPr>
+          <p:cNvPr id="16" name="TextBox 15"/>
+          <p:cNvSpPr txBox="1"/>
+          <p:nvPr/>
+        </p:nvSpPr>
+        <p:spPr>
+          <a:xfrm>
+            <a:off x="886968" y="4937760"/>
+            <a:ext cx="10616184" cy="1097280"/>
+          </a:xfrm>
+          <a:prstGeom prst="rect">
+            <a:avLst/>
+          </a:prstGeom>
+          <a:noFill/>
+        </p:spPr>
+        <p:txBody>
+          <a:bodyPr wrap="square" lIns="0" rIns="0" tIns="0" bIns="0">
+            <a:spAutoFit/>
+          </a:bodyPr>
+          <a:lstStyle/>
+          <a:p>
+            <a:pPr>
+              <a:lnSpc>
+                <a:spcPct val="135000"/>
+              </a:lnSpc>
+            </a:pPr>
+            <a:r>
+              <a:rPr sz="1300" b="1">
+                <a:solidFill>
+                  <a:srgbClr val="F5F5F4"/>
+                </a:solidFill>
+                <a:latin typeface="Inter"/>
+              </a:rPr>
+              <a:t>Our own test suite was validating a stale build. </a:t>
+            </a:r>
+            <a:r>
+              <a:rPr sz="1300">
+                <a:solidFill>
+                  <a:srgbClr val="A1A1AA"/>
+                </a:solidFill>
+                <a:latin typeface="Inter"/>
+              </a:rPr>
+              <a:t>The web tests resolved the shared package to its committed dist/ rather than its source, so 42 of them passed against engine code that had since changed — which is exactly why two headline bugs were invisible to the entire web suite. A green suite that tests the wrong artefact is worse than no suite.</a:t>
+            </a:r>
+          </a:p>
+        </p:txBody>
+      </p:sp>
+      <p:sp>
+        <p:nvSpPr>
+          <p:cNvPr id="17" name="Rectangle 16"/>
+          <p:cNvSpPr/>
+          <p:nvPr/>
+        </p:nvSpPr>
+        <p:spPr>
+          <a:xfrm>
+            <a:off x="685800" y="5070348"/>
+            <a:ext cx="68580" cy="68580"/>
+          </a:xfrm>
+          <a:prstGeom prst="rect">
+            <a:avLst/>
+          </a:prstGeom>
+          <a:solidFill>
+            <a:srgbClr val="FACC15"/>
+          </a:solidFill>
+          <a:ln>
+            <a:noFill/>
+          </a:ln>
+          <a:effectLst/>
+        </p:spPr>
+        <p:style>
+          <a:lnRef idx="1">
+            <a:schemeClr val="accent1"/>
+          </a:lnRef>
+          <a:fillRef idx="3">
+            <a:schemeClr val="accent1"/>
+          </a:fillRef>
+          <a:effectRef idx="2">
+            <a:schemeClr val="accent1"/>
+          </a:effectRef>
+          <a:fontRef idx="minor">
+            <a:schemeClr val="lt1"/>
+          </a:fontRef>
+        </p:style>
+        <p:txBody>
+          <a:bodyPr rtlCol="0" anchor="ctr"/>
+          <a:lstStyle/>
+          <a:p>
+            <a:pPr algn="ctr"/>
           </a:p>
         </p:txBody>
       </p:sp>
